--- a/slides/DDD-Workshop-Slides.pptx
+++ b/slides/DDD-Workshop-Slides.pptx
@@ -547,7 +547,7 @@
           </a:p>
           <a:p>
             <a:r>
-              <a:t>Then: "Today you'll write two event-sourced aggregates from scratch."</a:t>
+              <a:t>Then: "Today you'll build a complete event-sourced gift card service."</a:t>
             </a:r>
           </a:p>
         </p:txBody>
@@ -622,22 +622,17 @@
           </a:p>
           <a:p>
             <a:r>
-              <a:t>"The Effect type is the key innovation. It's not just events — it's a full program."</a:t>
-            </a:r>
-          </a:p>
-          <a:p>
-            <a:r>
               <a:t>Highlight persist + andReply — they'll use these in Exercise 1.</a:t>
             </a:r>
           </a:p>
           <a:p>
             <a:r>
-              <a:t>Mention andRun — they'll use this in Exercise 2.</a:t>
-            </a:r>
-          </a:p>
-          <a:p>
-            <a:r>
-              <a:t>"Think of it as: decide returns a recipe, the runtime executes it."</a:t>
+              <a:t>Mention andRun — they'll see it in the LLM demo.</a:t>
+            </a:r>
+          </a:p>
+          <a:p>
+            <a:r>
+              <a:t>"decide returns a recipe, the runtime executes it."</a:t>
             </a:r>
           </a:p>
         </p:txBody>
@@ -712,27 +707,17 @@
           </a:p>
           <a:p>
             <a:r>
-              <a:t>THIS IS THE AHA SLIDE. Go row by row.</a:t>
-            </a:r>
-          </a:p>
-          <a:p>
-            <a:r>
-              <a:t>"If you know DDD, you already know TEOB. The mapping is 1:1."</a:t>
-            </a:r>
-          </a:p>
-          <a:p>
-            <a:r>
-              <a:t>Emphasize: decide is the decision function, apply is the evolve/fold.</a:t>
-            </a:r>
-          </a:p>
-          <a:p>
-            <a:r>
-              <a:t>"Invariants are first-class — executable and testable, not just documentation."</a:t>
-            </a:r>
-          </a:p>
-          <a:p>
-            <a:r>
-              <a:t>Pause here. Ask: "Any questions before we see where TEOB goes beyond DDD?"</a:t>
+              <a:t>THE AHA SLIDE. Go row by row.</a:t>
+            </a:r>
+          </a:p>
+          <a:p>
+            <a:r>
+              <a:t>"If you know DDD, you already know TEOB."</a:t>
+            </a:r>
+          </a:p>
+          <a:p>
+            <a:r>
+              <a:t>Pause for questions before Exercise 1.</a:t>
             </a:r>
           </a:p>
         </p:txBody>
@@ -812,17 +797,7 @@
           </a:p>
           <a:p>
             <a:r>
-              <a:t>Don't go deep on Stash — mention it exists, move on.</a:t>
-            </a:r>
-          </a:p>
-          <a:p>
-            <a:r>
-              <a:t>Emphasize Effect ADT and Reply — they'll use these immediately.</a:t>
-            </a:r>
-          </a:p>
-          <a:p>
-            <a:r>
-              <a:t>"ctx is your toolbox. In Exercise 1 you won't need it. In Exercise 2, it's everything."</a:t>
+              <a:t>Mention projections — they'll build one in Exercise 2.</a:t>
             </a:r>
           </a:p>
         </p:txBody>
@@ -902,12 +877,7 @@
           </a:p>
           <a:p>
             <a:r>
-              <a:t>"In the exercises, we use InMemoryRuntime. In production, swap to Postgres. Zero code changes."</a:t>
-            </a:r>
-          </a:p>
-          <a:p>
-            <a:r>
-              <a:t>This is the payoff of the separation.</a:t>
+              <a:t>"In exercises, we use InMemoryRuntime. In production, swap to Postgres."</a:t>
             </a:r>
           </a:p>
         </p:txBody>
@@ -982,27 +952,17 @@
           </a:p>
           <a:p>
             <a:r>
-              <a:t>LIVE DEMO: Open terminal, run the test command. Show 13 failing tests.</a:t>
-            </a:r>
-          </a:p>
-          <a:p>
-            <a:r>
-              <a:t>"Your job for the next 30 minutes: make them green."</a:t>
-            </a:r>
-          </a:p>
-          <a:p>
-            <a:r>
-              <a:t>"Start with Issue — it's the simplest. The hints are in the file."</a:t>
-            </a:r>
-          </a:p>
-          <a:p>
-            <a:r>
-              <a:t>Walk through the file structure briefly: gift-card.ts has TODOs, tests tell you what to expect.</a:t>
-            </a:r>
-          </a:p>
-          <a:p>
-            <a:r>
-              <a:t>"Solution is in gift-card.solution.ts — but try first!"</a:t>
+              <a:t>LIVE DEMO: Run tests. Show 13 failing.</a:t>
+            </a:r>
+          </a:p>
+          <a:p>
+            <a:r>
+              <a:t>"Start with Issue — it's the simplest. The hints are in HINTS-aggregate.md."</a:t>
+            </a:r>
+          </a:p>
+          <a:p>
+            <a:r>
+              <a:t>"Solution is in aggregate.solution.ts — but try first!"</a:t>
             </a:r>
           </a:p>
         </p:txBody>
@@ -1072,38 +1032,27 @@
           <a:lstStyle/>
           <a:p>
             <a:r>
-              <a:t>TIMING: 0:42–1:12 (30 min work time)</a:t>
-            </a:r>
-          </a:p>
-          <a:p>
-            <a:r>
-              <a:t>LEAVE THIS SLIDE UP during exercise.</a:t>
-            </a:r>
-          </a:p>
-          <a:p/>
-          <a:p>
-            <a:r>
-              <a:t>Walk the room / monitor chat.</a:t>
-            </a:r>
-          </a:p>
-          <a:p>
-            <a:r>
-              <a:t>At 15 min: "How many tests are green so far? Show of hands: more than 5?"</a:t>
-            </a:r>
-          </a:p>
-          <a:p>
-            <a:r>
-              <a:t>At 15 min: Show Hint 1 if people are stuck (the Issue case pattern).</a:t>
-            </a:r>
-          </a:p>
-          <a:p>
-            <a:r>
-              <a:t>At 25 min: If significant portion stuck, live-code the Issue case on screen.</a:t>
-            </a:r>
-          </a:p>
-          <a:p>
-            <a:r>
-              <a:t>At 28 min: "2 minutes left — if you haven't finished, that's fine. We'll review together."</a:t>
+              <a:t>TIMING: 0:42–1:12 (30 min)</a:t>
+            </a:r>
+          </a:p>
+          <a:p>
+            <a:r>
+              <a:t>LEAVE THIS SLIDE UP.</a:t>
+            </a:r>
+          </a:p>
+          <a:p>
+            <a:r>
+              <a:t>At 15 min: "How many tests green? More than 5?"</a:t>
+            </a:r>
+          </a:p>
+          <a:p>
+            <a:r>
+              <a:t>At 25 min: Live-code Issue case if people are stuck.</a:t>
+            </a:r>
+          </a:p>
+          <a:p>
+            <a:r>
+              <a:t>At 28 min: "2 minutes left."</a:t>
             </a:r>
           </a:p>
         </p:txBody>
@@ -1178,22 +1127,17 @@
           </a:p>
           <a:p>
             <a:r>
-              <a:t>Live-code the full solution if needed. Walk through each case.</a:t>
-            </a:r>
-          </a:p>
-          <a:p>
-            <a:r>
-              <a:t>"Notice: no database, no HTTP, no framework setup. Just domain logic."</a:t>
-            </a:r>
-          </a:p>
-          <a:p>
-            <a:r>
-              <a:t>"The test kit runs decide/apply in memory — pure unit tests."</a:t>
-            </a:r>
-          </a:p>
-          <a:p>
-            <a:r>
-              <a:t>Ask: "What surprised you? What felt different from how you usually write this?"</a:t>
+              <a:t>Live-code the solution if needed.</a:t>
+            </a:r>
+          </a:p>
+          <a:p>
+            <a:r>
+              <a:t>"No database, no HTTP, no framework setup. Just domain logic."</a:t>
+            </a:r>
+          </a:p>
+          <a:p>
+            <a:r>
+              <a:t>Ask: "What surprised you?"</a:t>
             </a:r>
           </a:p>
         </p:txBody>
@@ -1268,12 +1212,22 @@
           </a:p>
           <a:p>
             <a:r>
-              <a:t>CRITICAL BREAK. People need to reset before the harder exercise.</a:t>
-            </a:r>
-          </a:p>
-          <a:p>
-            <a:r>
-              <a:t>"When we come back: the fun part — two aggregates communicating."</a:t>
+              <a:t>LIVE DEMO: Run `npm start`, then curl commands.</a:t>
+            </a:r>
+          </a:p>
+          <a:p>
+            <a:r>
+              <a:t>Show: Ok reply → 200, Rejected → 400, ETag header.</a:t>
+            </a:r>
+          </a:p>
+          <a:p>
+            <a:r>
+              <a:t>"Zero wiring code. aggregateRoutes() generates everything from your aggregate."</a:t>
+            </a:r>
+          </a:p>
+          <a:p>
+            <a:r>
+              <a:t>"Your decide() is the API contract."</a:t>
             </a:r>
           </a:p>
         </p:txBody>
@@ -1343,48 +1297,7 @@
           <a:lstStyle/>
           <a:p>
             <a:r>
-              <a:t>TIMING: 1:22–1:30</a:t>
-            </a:r>
-          </a:p>
-          <a:p>
-            <a:r>
-              <a:t>"In Exercise 1, your aggregate was alone. Now: two aggregates collaborate."</a:t>
-            </a:r>
-          </a:p>
-          <a:p>
-            <a:r>
-              <a:t>Walk through the diagram left-to-right:</a:t>
-            </a:r>
-          </a:p>
-          <a:p>
-            <a:r>
-              <a:t>1. Order receives PlaceOrder, persists OrderPlaced, tells Payment to Charge</a:t>
-            </a:r>
-          </a:p>
-          <a:p>
-            <a:r>
-              <a:t>2. Payment receives Charge, calls gateway via ctx.sync()</a:t>
-            </a:r>
-          </a:p>
-          <a:p>
-            <a:r>
-              <a:t>3. Gateway result comes back as a command (ChargeSucceeded/Failed)</a:t>
-            </a:r>
-          </a:p>
-          <a:p>
-            <a:r>
-              <a:t>4. Payment tells Order: ConfirmPayment or RejectPayment</a:t>
-            </a:r>
-          </a:p>
-          <a:p/>
-          <a:p>
-            <a:r>
-              <a:t>KEY INSIGHT: "Commands cross boundaries. Events stay within their aggregate."</a:t>
-            </a:r>
-          </a:p>
-          <a:p>
-            <a:r>
-              <a:t>Ask: "Why not just emit events and let the other aggregate listen?" → Coupling, ordering, boundaries.</a:t>
+              <a:t>TIMING: 1:22–1:27</a:t>
             </a:r>
           </a:p>
         </p:txBody>
@@ -1454,32 +1367,22 @@
           <a:lstStyle/>
           <a:p>
             <a:r>
-              <a:t>TIMING: 1:30–1:35</a:t>
-            </a:r>
-          </a:p>
-          <a:p>
-            <a:r>
-              <a:t>LIVE DEMO: Open order.ts and walk through the code.</a:t>
-            </a:r>
-          </a:p>
-          <a:p>
-            <a:r>
-              <a:t>"This is the pattern. Study PlaceOrder — see how andRun + ctx.tell works."</a:t>
-            </a:r>
-          </a:p>
-          <a:p>
-            <a:r>
-              <a:t>"Your job: implement the Payment side using the same patterns."</a:t>
-            </a:r>
-          </a:p>
-          <a:p>
-            <a:r>
-              <a:t>"The integration tests are the wow moment — two aggregates in one runtime, full flow."</a:t>
-            </a:r>
-          </a:p>
-          <a:p>
-            <a:r>
-              <a:t>Hint: Start with GetStatus (easiest), then Charge, then the callbacks.</a:t>
+              <a:t>TIMING: 1:27–1:32</a:t>
+            </a:r>
+          </a:p>
+          <a:p>
+            <a:r>
+              <a:t>"You already know the pattern — apply and evolve are the same shape."</a:t>
+            </a:r>
+          </a:p>
+          <a:p>
+            <a:r>
+              <a:t>"The difference: evolve builds views optimized for queries, not decisions."</a:t>
+            </a:r>
+          </a:p>
+          <a:p>
+            <a:r>
+              <a:t>"A view can include transactionCount — something the aggregate doesn't track."</a:t>
             </a:r>
           </a:p>
         </p:txBody>
@@ -1554,17 +1457,17 @@
           </a:p>
           <a:p>
             <a:r>
-              <a:t>Frame the workshop outcomes clearly.</a:t>
-            </a:r>
-          </a:p>
-          <a:p>
-            <a:r>
-              <a:t>"By the end of this session, you'll have working code — not just slides."</a:t>
-            </a:r>
-          </a:p>
-          <a:p>
-            <a:r>
-              <a:t>This is the promise. Everything builds toward these three things.</a:t>
+              <a:t>"One domain — gift cards. Four layers of capability."</a:t>
+            </a:r>
+          </a:p>
+          <a:p>
+            <a:r>
+              <a:t>"You'll write code for 1 and 3. I'll demo 2 and 4."</a:t>
+            </a:r>
+          </a:p>
+          <a:p>
+            <a:r>
+              <a:t>"By the end you'll have a running HTTP service with AI integration."</a:t>
             </a:r>
           </a:p>
         </p:txBody>
@@ -1634,43 +1537,17 @@
           <a:lstStyle/>
           <a:p>
             <a:r>
-              <a:t>TIMING: 1:35–2:10 (35 min work time)</a:t>
-            </a:r>
-          </a:p>
-          <a:p>
-            <a:r>
-              <a:t>LEAVE THIS SLIDE UP during exercise.</a:t>
-            </a:r>
-          </a:p>
-          <a:p/>
-          <a:p>
-            <a:r>
-              <a:t>At 10 min: "Who has GetStatus passing?" Show Hint 1 if needed.</a:t>
-            </a:r>
-          </a:p>
-          <a:p>
-            <a:r>
-              <a:t>At 15 min: Show Hint 2 (the Charge case with ctx.sync pattern).</a:t>
-            </a:r>
-          </a:p>
-          <a:p>
-            <a:r>
-              <a:t>At 25 min: If many stuck on callbacks, live-code ChargeSucceeded.</a:t>
-            </a:r>
-          </a:p>
-          <a:p>
-            <a:r>
-              <a:t>At 30 min: "5 minutes left. Focus on getting the unit tests green.</a:t>
-            </a:r>
-          </a:p>
-          <a:p>
-            <a:r>
-              <a:t>            The integration tests are a bonus — we'll demo them together."</a:t>
-            </a:r>
-          </a:p>
-          <a:p>
-            <a:r>
-              <a:t>At 33 min: "Wrapping up in 2 minutes."</a:t>
+              <a:t>TIMING: 1:32–1:35</a:t>
+            </a:r>
+          </a:p>
+          <a:p>
+            <a:r>
+              <a:t>"You already know the pattern from apply(). This is the same thing, for queries."</a:t>
+            </a:r>
+          </a:p>
+          <a:p>
+            <a:r>
+              <a:t>"The key difference: transactionCount. The aggregate doesn't track this — the projection does."</a:t>
             </a:r>
           </a:p>
         </p:txBody>
@@ -1740,32 +1617,27 @@
           <a:lstStyle/>
           <a:p>
             <a:r>
-              <a:t>TIMING: 2:10–2:17</a:t>
-            </a:r>
-          </a:p>
-          <a:p>
-            <a:r>
-              <a:t>LIVE DEMO: Run the integration test on screen. Show it passing.</a:t>
-            </a:r>
-          </a:p>
-          <a:p>
-            <a:r>
-              <a:t>Walk through the 6-step flow on the slide.</a:t>
-            </a:r>
-          </a:p>
-          <a:p>
-            <a:r>
-              <a:t>"All of this happened with fire-and-forget commands. No HTTP, no message broker, no choreography."</a:t>
-            </a:r>
-          </a:p>
-          <a:p>
-            <a:r>
-              <a:t>"The runtime handles delivery. Your code just says ctx.tell()."</a:t>
-            </a:r>
-          </a:p>
-          <a:p>
-            <a:r>
-              <a:t>THIS IS THE WOW MOMENT. Let it land.</a:t>
+              <a:t>TIMING: 1:35–1:55 (20 min)</a:t>
+            </a:r>
+          </a:p>
+          <a:p>
+            <a:r>
+              <a:t>This should go faster — they already know the pattern.</a:t>
+            </a:r>
+          </a:p>
+          <a:p>
+            <a:r>
+              <a:t>At 10 min: Most should have Issued done.</a:t>
+            </a:r>
+          </a:p>
+          <a:p>
+            <a:r>
+              <a:t>At 15 min: Show Hint 3 (Redeemed with transactionCount).</a:t>
+            </a:r>
+          </a:p>
+          <a:p>
+            <a:r>
+              <a:t>At 18 min: "2 minutes left."</a:t>
             </a:r>
           </a:p>
         </p:txBody>
@@ -1835,22 +1707,22 @@
           <a:lstStyle/>
           <a:p>
             <a:r>
-              <a:t>TIMING: 2:17–2:20</a:t>
-            </a:r>
-          </a:p>
-          <a:p>
-            <a:r>
-              <a:t>"You just built the green layer. Everything else is provided."</a:t>
-            </a:r>
-          </a:p>
-          <a:p>
-            <a:r>
-              <a:t>"To go to production: swap InMemoryRuntime → PostgresRuntime, add ServiceTemplate, done."</a:t>
-            </a:r>
-          </a:p>
-          <a:p>
-            <a:r>
-              <a:t>Quick mention of projections and sagas — "that's the next workshop."</a:t>
+              <a:t>TIMING: 1:55–2:00</a:t>
+            </a:r>
+          </a:p>
+          <a:p>
+            <a:r>
+              <a:t>"Three pure functions. That's the entire architecture."</a:t>
+            </a:r>
+          </a:p>
+          <a:p>
+            <a:r>
+              <a:t>"decide for commands, apply for state, evolve for queries."</a:t>
+            </a:r>
+          </a:p>
+          <a:p>
+            <a:r>
+              <a:t>"Now let me show you something exciting..."</a:t>
             </a:r>
           </a:p>
         </p:txBody>
@@ -1920,22 +1792,37 @@
           <a:lstStyle/>
           <a:p>
             <a:r>
-              <a:t>TIMING: 2:20–2:22</a:t>
-            </a:r>
-          </a:p>
-          <a:p>
-            <a:r>
-              <a:t>Credibility slide. Keep it brief.</a:t>
-            </a:r>
-          </a:p>
-          <a:p>
-            <a:r>
-              <a:t>"This isn't a toy framework. The Scala version has been running fintech systems for 10+ years."</a:t>
-            </a:r>
-          </a:p>
-          <a:p>
-            <a:r>
-              <a:t>"The TypeScript port brings the same patterns to a broader ecosystem."</a:t>
+              <a:t>TIMING: 2:00–2:10</a:t>
+            </a:r>
+          </a:p>
+          <a:p>
+            <a:r>
+              <a:t>LIVE DEMO: Run `OPENROUTER_API_KEY=sk-... npm run demo:llm`</a:t>
+            </a:r>
+          </a:p>
+          <a:p>
+            <a:r>
+              <a:t>Issue a card with a name → show the encouragement appearing.</a:t>
+            </a:r>
+          </a:p>
+          <a:p>
+            <a:r>
+              <a:t>"ctx.sync() is the same pattern you'd use for ANY external call."</a:t>
+            </a:r>
+          </a:p>
+          <a:p>
+            <a:r>
+              <a:t>"The LLM result comes back as a command, gets persisted as an event."</a:t>
+            </a:r>
+          </a:p>
+          <a:p>
+            <a:r>
+              <a:t>"Crash? Replay from journal. Debug? Replay specific steps."</a:t>
+            </a:r>
+          </a:p>
+          <a:p>
+            <a:r>
+              <a:t>THIS IS THE WOW MOMENT.</a:t>
             </a:r>
           </a:p>
         </p:txBody>
@@ -2005,17 +1892,17 @@
           <a:lstStyle/>
           <a:p>
             <a:r>
-              <a:t>TIMING: 2:22–2:24 (optional — include if time allows)</a:t>
-            </a:r>
-          </a:p>
-          <a:p>
-            <a:r>
-              <a:t>"The pure functional style means AI assistants can generate aggregate code reliably."</a:t>
-            </a:r>
-          </a:p>
-          <a:p>
-            <a:r>
-              <a:t>"The CLI scaffolds a working aggregate in seconds."</a:t>
+              <a:t>TIMING: 2:10–2:13</a:t>
+            </a:r>
+          </a:p>
+          <a:p>
+            <a:r>
+              <a:t>"You built the green layer. Everything else is provided."</a:t>
+            </a:r>
+          </a:p>
+          <a:p>
+            <a:r>
+              <a:t>"To go to production: swap InMemoryRuntime → PostgresRuntime."</a:t>
             </a:r>
           </a:p>
         </p:txBody>
@@ -2085,27 +1972,12 @@
           <a:lstStyle/>
           <a:p>
             <a:r>
-              <a:t>TIMING: 2:24–2:26 (optional teaser)</a:t>
-            </a:r>
-          </a:p>
-          <a:p>
-            <a:r>
-              <a:t>"Event sourcing gives you time-travel, audit, replay for free.</a:t>
-            </a:r>
-          </a:p>
-          <a:p>
-            <a:r>
-              <a:t> Now imagine your AI agent's entire conversation history, tool calls,</a:t>
-            </a:r>
-          </a:p>
-          <a:p>
-            <a:r>
-              <a:t> and decisions are events. Crash? Replay from journal. Debug? Replay specific steps."</a:t>
-            </a:r>
-          </a:p>
-          <a:p>
-            <a:r>
-              <a:t>Tease — don't go deep. This is a future workshop topic.</a:t>
+              <a:t>TIMING: 2:13–2:15</a:t>
+            </a:r>
+          </a:p>
+          <a:p>
+            <a:r>
+              <a:t>Credibility slide. Keep brief.</a:t>
             </a:r>
           </a:p>
         </p:txBody>
@@ -2175,39 +2047,22 @@
           <a:lstStyle/>
           <a:p>
             <a:r>
-              <a:t>TIMING: 2:26–2:30</a:t>
-            </a:r>
-          </a:p>
-          <a:p>
-            <a:r>
-              <a:t>"You just built two event-sourced aggregates with cross-boundary communication.</a:t>
-            </a:r>
-          </a:p>
-          <a:p>
-            <a:r>
-              <a:t> That's not a demo — that's the real pattern."</a:t>
-            </a:r>
-          </a:p>
-          <a:p/>
-          <a:p>
-            <a:r>
-              <a:t>Go through each CTA. If you have a QR code to the repo, show it now.</a:t>
-            </a:r>
-          </a:p>
-          <a:p>
-            <a:r>
-              <a:t>"Exercise 3 will be in the repo by next week" — gives them a reason to come back.</a:t>
+              <a:t>TIMING: 2:15–2:20</a:t>
+            </a:r>
+          </a:p>
+          <a:p>
+            <a:r>
+              <a:t>"You built an event-sourced service with a read model and AI integration."</a:t>
+            </a:r>
+          </a:p>
+          <a:p>
+            <a:r>
+              <a:t>"Three pure functions. That's the whole architecture."</a:t>
             </a:r>
           </a:p>
           <a:p>
             <a:r>
               <a:t>Open for questions.</a:t>
-            </a:r>
-          </a:p>
-          <a:p/>
-          <a:p>
-            <a:r>
-              <a:t>RECORDING NOTE: This is a good cut point for the video.</a:t>
             </a:r>
           </a:p>
         </p:txBody>
@@ -2282,22 +2137,17 @@
           </a:p>
           <a:p>
             <a:r>
-              <a:t>CRITICAL: This calibrates your depth for the rest of the talk.</a:t>
-            </a:r>
-          </a:p>
-          <a:p>
-            <a:r>
-              <a:t>If most have DDD experience → skip basic aggregate explanation, go deeper on TEOB specifics.</a:t>
-            </a:r>
-          </a:p>
-          <a:p>
-            <a:r>
-              <a:t>If most are new → slow down on decide/apply, give more context.</a:t>
-            </a:r>
-          </a:p>
-          <a:p>
-            <a:r>
-              <a:t>If Akka/Axon users → draw parallels: "ctx is like ActorContext, Effect is like Effect in Akka Persistence"</a:t>
+              <a:t>This calibrates your depth.</a:t>
+            </a:r>
+          </a:p>
+          <a:p>
+            <a:r>
+              <a:t>If most have DDD experience → skip basics, go deeper on TEOB specifics.</a:t>
+            </a:r>
+          </a:p>
+          <a:p>
+            <a:r>
+              <a:t>If Akka/Axon users → draw parallels throughout.</a:t>
             </a:r>
           </a:p>
         </p:txBody>
@@ -2372,17 +2222,12 @@
           </a:p>
           <a:p>
             <a:r>
-              <a:t>Show the map so people know where they are at all times.</a:t>
-            </a:r>
-          </a:p>
-          <a:p>
-            <a:r>
-              <a:t>"We'll alternate between short theory bursts and hands-on coding."</a:t>
-            </a:r>
-          </a:p>
-          <a:p>
-            <a:r>
-              <a:t>"The green blocks are where YOU write code."</a:t>
+              <a:t>"Green blocks = you write code. Blue/purple = I demo live."</a:t>
+            </a:r>
+          </a:p>
+          <a:p>
+            <a:r>
+              <a:t>"One domain all the way through — each layer builds on the last."</a:t>
             </a:r>
           </a:p>
         </p:txBody>
@@ -2465,11 +2310,6 @@
               <a:t>Don't dwell — this is the setup for why ES is different.</a:t>
             </a:r>
           </a:p>
-          <a:p>
-            <a:r>
-              <a:t>Key pain points: in-place mutation, scaling, audit trail.</a:t>
-            </a:r>
-          </a:p>
         </p:txBody>
       </p:sp>
       <p:sp>
@@ -2545,16 +2385,6 @@
               <a:t>"What if we could have ALL of these?"</a:t>
             </a:r>
           </a:p>
-          <a:p>
-            <a:r>
-              <a:t>This is the wish list. Event sourcing gives us most of them.</a:t>
-            </a:r>
-          </a:p>
-          <a:p>
-            <a:r>
-              <a:t>Pause after each — let it sink in.</a:t>
-            </a:r>
-          </a:p>
         </p:txBody>
       </p:sp>
       <p:sp>
@@ -2627,17 +2457,7 @@
           </a:p>
           <a:p>
             <a:r>
-              <a:t>"An entity is a self-contained unit of behavior."</a:t>
-            </a:r>
-          </a:p>
-          <a:p>
-            <a:r>
-              <a:t>This is the DDD aggregate concept — but with a richer protocol.</a:t>
-            </a:r>
-          </a:p>
-          <a:p>
-            <a:r>
-              <a:t>Foreshadow: "You'll implement exactly this pattern in 15 minutes."</a:t>
+              <a:t>"You'll implement exactly this pattern in 15 minutes."</a:t>
             </a:r>
           </a:p>
         </p:txBody>
@@ -2717,17 +2537,7 @@
           </a:p>
           <a:p>
             <a:r>
-              <a:t>The journal IS the source of truth. State is derived by replaying.</a:t>
-            </a:r>
-          </a:p>
-          <a:p>
-            <a:r>
               <a:t>Draw parallel to git: commits are events, working directory is state.</a:t>
-            </a:r>
-          </a:p>
-          <a:p>
-            <a:r>
-              <a:t>"You can always rebuild state by replaying from the beginning."</a:t>
             </a:r>
           </a:p>
         </p:txBody>
@@ -2807,22 +2617,17 @@
           </a:p>
           <a:p>
             <a:r>
-              <a:t>"decide() is WHERE your business logic lives. It looks at state + command and decides what happened."</a:t>
-            </a:r>
-          </a:p>
-          <a:p>
-            <a:r>
-              <a:t>"apply() is a PURE fold — no logic, just state transitions."</a:t>
-            </a:r>
-          </a:p>
-          <a:p>
-            <a:r>
-              <a:t>"This separation is what makes everything testable and replayable."</a:t>
-            </a:r>
-          </a:p>
-          <a:p>
-            <a:r>
-              <a:t>Ask: "Why can't we put business logic in apply?" → Because replay would re-validate.</a:t>
+              <a:t>"decide() is WHERE your business logic lives."</a:t>
+            </a:r>
+          </a:p>
+          <a:p>
+            <a:r>
+              <a:t>"apply() is PURE — no logic, just state transitions."</a:t>
+            </a:r>
+          </a:p>
+          <a:p>
+            <a:r>
+              <a:t>Ask: "Why can't we put logic in apply?" → Because replay would re-validate.</a:t>
             </a:r>
           </a:p>
         </p:txBody>
@@ -6108,7 +5913,7 @@
               </a:defRPr>
             </a:pPr>
             <a:r>
-              <a:t>decide() doesn't just return events — it returns an Effect describing what should happen:</a:t>
+              <a:t>decide() returns an Effect describing what should happen:</a:t>
             </a:r>
           </a:p>
         </p:txBody>
@@ -6455,7 +6260,7 @@
             <a:pPr algn="l">
               <a:defRPr sz="1700" b="1">
                 <a:solidFill>
-                  <a:srgbClr val="2266AA"/>
+                  <a:srgbClr val="FFA726"/>
                 </a:solidFill>
               </a:defRPr>
             </a:pPr>
@@ -6549,39 +6354,6 @@
             </a:pPr>
             <a:r>
               <a:t>No-op — acknowledge without action</a:t>
-            </a:r>
-          </a:p>
-        </p:txBody>
-      </p:sp>
-      <p:sp>
-        <p:nvSpPr>
-          <p:cNvPr id="15" name="TextBox 14"/>
-          <p:cNvSpPr txBox="1"/>
-          <p:nvPr/>
-        </p:nvSpPr>
-        <p:spPr>
-          <a:xfrm>
-            <a:off x="731520" y="5900000"/>
-            <a:ext cx="10728655" cy="400000"/>
-          </a:xfrm>
-          <a:prstGeom prst="rect">
-            <a:avLst/>
-          </a:prstGeom>
-          <a:noFill/>
-        </p:spPr>
-        <p:txBody>
-          <a:bodyPr wrap="square"/>
-          <a:lstStyle/>
-          <a:p>
-            <a:pPr algn="l">
-              <a:defRPr sz="1500" b="0">
-                <a:solidFill>
-                  <a:srgbClr val="888888"/>
-                </a:solidFill>
-              </a:defRPr>
-            </a:pPr>
-            <a:r>
-              <a:t>Fully describes complete behaviour. Synchronous effects, timers, commands to other entities, deferred replies.</a:t>
             </a:r>
           </a:p>
         </p:txBody>
@@ -6835,7 +6607,7 @@
                         </a:defRPr>
                       </a:pPr>
                       <a:r>
-                        <a:t>The consistency boundary. One category = one type.</a:t>
+                        <a:t>The consistency boundary.</a:t>
                       </a:r>
                     </a:p>
                   </a:txBody>
@@ -7075,7 +6847,7 @@
                         </a:defRPr>
                       </a:pPr>
                       <a:r>
-                        <a:t>"Given this state and this command, what happens?"</a:t>
+                        <a:t>"Given state + command, what happens?"</a:t>
                       </a:r>
                     </a:p>
                   </a:txBody>
@@ -7135,7 +6907,7 @@
                         </a:defRPr>
                       </a:pPr>
                       <a:r>
-                        <a:t>Pure left-fold. The event applicator.</a:t>
+                        <a:t>Pure left-fold.</a:t>
                       </a:r>
                     </a:p>
                   </a:txBody>
@@ -7429,7 +7201,7 @@
               </a:defRPr>
             </a:pPr>
             <a:r>
-              <a:t>DDD aggregates return events (or throw). TEOB returns a declarative Effect&lt;Event, Reply&gt; — a program describing what should happen.</a:t>
+              <a:t>Declarative Effect&lt;Event, Reply&gt; — a program describing what should happen.</a:t>
             </a:r>
           </a:p>
         </p:txBody>
@@ -7495,7 +7267,7 @@
               </a:defRPr>
             </a:pPr>
             <a:r>
-              <a:t>DDD aggregates are void or throw. TEOB: persist(...).andReply(...) atomically. CQRS-with-response.</a:t>
+              <a:t>persist(...).andReply(...) atomically. CQRS-with-response.</a:t>
             </a:r>
           </a:p>
         </p:txBody>
@@ -7561,7 +7333,7 @@
               </a:defRPr>
             </a:pPr>
             <a:r>
-              <a:t>In strict DDD, the aggregate is pure. ctx gives access to timers, cross-entity messaging, external effects.</a:t>
+              <a:t>Timers, cross-entity messaging, external effects (ctx.sync, ctx.tell).</a:t>
             </a:r>
           </a:p>
         </p:txBody>
@@ -7594,7 +7366,7 @@
               </a:defRPr>
             </a:pPr>
             <a:r>
-              <a:t>Stash/Unstash</a:t>
+              <a:t>Invariants</a:t>
             </a:r>
           </a:p>
         </p:txBody>
@@ -7627,7 +7399,7 @@
               </a:defRPr>
             </a:pPr>
             <a:r>
-              <a:t>Actor model concept (Akka heritage). Buffers commands during certain states.</a:t>
+              <a:t>Executable and testable — faithful to why the boundary exists.</a:t>
             </a:r>
           </a:p>
         </p:txBody>
@@ -7660,7 +7432,7 @@
               </a:defRPr>
             </a:pPr>
             <a:r>
-              <a:t>Invariants</a:t>
+              <a:t>Projections</a:t>
             </a:r>
           </a:p>
         </p:txBody>
@@ -7693,40 +7465,7 @@
               </a:defRPr>
             </a:pPr>
             <a:r>
-              <a:t>Closer to DDD than most ES frameworks. Executable and testable — faithful to why the boundary exists.</a:t>
-            </a:r>
-          </a:p>
-        </p:txBody>
-      </p:sp>
-      <p:sp>
-        <p:nvSpPr>
-          <p:cNvPr id="14" name="TextBox 13"/>
-          <p:cNvSpPr txBox="1"/>
-          <p:nvPr/>
-        </p:nvSpPr>
-        <p:spPr>
-          <a:xfrm>
-            <a:off x="731520" y="6200000"/>
-            <a:ext cx="10728655" cy="400000"/>
-          </a:xfrm>
-          <a:prstGeom prst="rect">
-            <a:avLst/>
-          </a:prstGeom>
-          <a:noFill/>
-        </p:spPr>
-        <p:txBody>
-          <a:bodyPr wrap="square"/>
-          <a:lstStyle/>
-          <a:p>
-            <a:pPr algn="l">
-              <a:defRPr sz="1600" b="1">
-                <a:solidFill>
-                  <a:srgbClr val="222222"/>
-                </a:solidFill>
-              </a:defRPr>
-            </a:pPr>
-            <a:r>
-              <a:t>Core loop maps 1:1 to DDD. TEOB adds: effect system + actor model + infrastructure.</a:t>
+              <a:t>Event → read model. Same pure fold pattern, optimized for queries.</a:t>
             </a:r>
           </a:p>
         </p:txBody>
@@ -7894,7 +7633,7 @@
               </a:defRPr>
             </a:pPr>
             <a:r>
-              <a:t>• Codecs — serialisable, on-the-wire representation (Command, Reply, Event, State)</a:t>
+              <a:t>• Codecs — serialisable representation (Command, Reply, Event, State)</a:t>
             </a:r>
           </a:p>
         </p:txBody>
@@ -7927,7 +7666,7 @@
               </a:defRPr>
             </a:pPr>
             <a:r>
-              <a:t>• Agnostic to execution and persistence: scalability / durability / integrity</a:t>
+              <a:t>• Agnostic to execution and persistence</a:t>
             </a:r>
           </a:p>
         </p:txBody>
@@ -7960,7 +7699,7 @@
               </a:defRPr>
             </a:pPr>
             <a:r>
-              <a:t>• Multiple runtimes: in-memory, SQLite, PostgreSQL, ... (same aggregate code)</a:t>
+              <a:t>• Multiple runtimes: in-memory, SQLite, PostgreSQL (same aggregate code)</a:t>
             </a:r>
           </a:p>
         </p:txBody>
@@ -8192,7 +7931,7 @@
             </a:r>
             <a:br/>
             <a:r>
-              <a:t>State:     { balance, status }</a:t>
+              <a:t>State:     { balance, status, recipientName }</a:t>
             </a:r>
           </a:p>
         </p:txBody>
@@ -8371,7 +8110,7 @@
         <p:spPr>
           <a:xfrm>
             <a:off x="731520" y="5400000"/>
-            <a:ext cx="8500000" cy="500000"/>
+            <a:ext cx="5500000" cy="500000"/>
           </a:xfrm>
           <a:prstGeom prst="roundRect">
             <a:avLst>
@@ -8412,7 +8151,7 @@
               </a:defRPr>
             </a:pPr>
             <a:r>
-              <a:t>npx vitest run workshop/exercise1-gift-card/gift-card.test.ts</a:t>
+              <a:t>npm run test:aggregate</a:t>
             </a:r>
           </a:p>
         </p:txBody>
@@ -8425,8 +8164,8 @@
         </p:nvSpPr>
         <p:spPr>
           <a:xfrm>
-            <a:off x="9600000" y="5450000"/>
-            <a:ext cx="3000000" cy="500000"/>
+            <a:off x="6500000" y="5450000"/>
+            <a:ext cx="5000000" cy="500000"/>
           </a:xfrm>
           <a:prstGeom prst="rect">
             <a:avLst/>
@@ -8445,44 +8184,7 @@
               </a:defRPr>
             </a:pPr>
             <a:r>
-              <a:t>15 tests.</a:t>
-            </a:r>
-            <a:br/>
-            <a:r>
-              <a:t>Make them green.</a:t>
-            </a:r>
-          </a:p>
-        </p:txBody>
-      </p:sp>
-      <p:sp>
-        <p:nvSpPr>
-          <p:cNvPr id="12" name="TextBox 11"/>
-          <p:cNvSpPr txBox="1"/>
-          <p:nvPr/>
-        </p:nvSpPr>
-        <p:spPr>
-          <a:xfrm>
-            <a:off x="731520" y="6200000"/>
-            <a:ext cx="10728655" cy="400000"/>
-          </a:xfrm>
-          <a:prstGeom prst="rect">
-            <a:avLst/>
-          </a:prstGeom>
-          <a:noFill/>
-        </p:spPr>
-        <p:txBody>
-          <a:bodyPr wrap="square"/>
-          <a:lstStyle/>
-          <a:p>
-            <a:pPr algn="l">
-              <a:defRPr sz="1400" b="0">
-                <a:solidFill>
-                  <a:srgbClr val="888888"/>
-                </a:solidFill>
-              </a:defRPr>
-            </a:pPr>
-            <a:r>
-              <a:t>Start with Issue → GetBalance → Redeem → Cancel → Invariants     |     Stuck? See HINTS.md</a:t>
+              <a:t>15 tests. Make them green.</a:t>
             </a:r>
           </a:p>
         </p:txBody>
@@ -8541,7 +8243,7 @@
               </a:defRPr>
             </a:pPr>
             <a:r>
-              <a:t>EXERCISE 1: GIFT CARD</a:t>
+              <a:t>EXERCISE 1: AGGREGATE</a:t>
             </a:r>
           </a:p>
         </p:txBody>
@@ -8600,7 +8302,7 @@
           <a:lstStyle/>
           <a:p>
             <a:pPr algn="ctr">
-              <a:defRPr sz="1600" b="0">
+              <a:defRPr sz="1800" b="0">
                 <a:solidFill>
                   <a:srgbClr val="66BB6A"/>
                 </a:solidFill>
@@ -8608,7 +8310,7 @@
               </a:defRPr>
             </a:pPr>
             <a:r>
-              <a:t>npx vitest run workshop/exercise1-gift-card/gift-card.test.ts</a:t>
+              <a:t>npm run test:aggregate</a:t>
             </a:r>
           </a:p>
         </p:txBody>
@@ -8724,7 +8426,7 @@
         <p:spPr>
           <a:xfrm>
             <a:off x="731520" y="1700000"/>
-            <a:ext cx="10728655" cy="400000"/>
+            <a:ext cx="10728655" cy="550000"/>
           </a:xfrm>
           <a:prstGeom prst="rect">
             <a:avLst/>
@@ -8736,14 +8438,14 @@
           <a:lstStyle/>
           <a:p>
             <a:pPr algn="l">
-              <a:defRPr sz="2000" b="1">
+              <a:defRPr sz="1700" b="0">
                 <a:solidFill>
                   <a:srgbClr val="222222"/>
                 </a:solidFill>
               </a:defRPr>
             </a:pPr>
             <a:r>
-              <a:t>What you just built:</a:t>
+              <a:t>• decide() — all business logic in one place, pattern-matched on command tag</a:t>
             </a:r>
           </a:p>
         </p:txBody>
@@ -8756,7 +8458,7 @@
         </p:nvSpPr>
         <p:spPr>
           <a:xfrm>
-            <a:off x="731520" y="2300000"/>
+            <a:off x="731520" y="2250000"/>
             <a:ext cx="10728655" cy="550000"/>
           </a:xfrm>
           <a:prstGeom prst="rect">
@@ -8776,7 +8478,7 @@
               </a:defRPr>
             </a:pPr>
             <a:r>
-              <a:t>• decide() — all business logic in one place, pattern-matched on command tag</a:t>
+              <a:t>• apply() — pure state fold, no logic, just data transformation</a:t>
             </a:r>
           </a:p>
         </p:txBody>
@@ -8789,7 +8491,7 @@
         </p:nvSpPr>
         <p:spPr>
           <a:xfrm>
-            <a:off x="731520" y="2850000"/>
+            <a:off x="731520" y="2800000"/>
             <a:ext cx="10728655" cy="550000"/>
           </a:xfrm>
           <a:prstGeom prst="rect">
@@ -8809,7 +8511,7 @@
               </a:defRPr>
             </a:pPr>
             <a:r>
-              <a:t>• apply() — pure state fold, no logic, just data transformation</a:t>
+              <a:t>• invariants[] — executable contracts that guard consistency</a:t>
             </a:r>
           </a:p>
         </p:txBody>
@@ -8822,7 +8524,7 @@
         </p:nvSpPr>
         <p:spPr>
           <a:xfrm>
-            <a:off x="731520" y="3400000"/>
+            <a:off x="731520" y="3350000"/>
             <a:ext cx="10728655" cy="550000"/>
           </a:xfrm>
           <a:prstGeom prst="rect">
@@ -8842,7 +8544,7 @@
               </a:defRPr>
             </a:pPr>
             <a:r>
-              <a:t>• invariants[] — executable contracts that guard your aggregate's consistency</a:t>
+              <a:t>• Effect ADT — persist(), reply(), andReply() — declarative, composable</a:t>
             </a:r>
           </a:p>
         </p:txBody>
@@ -8855,7 +8557,7 @@
         </p:nvSpPr>
         <p:spPr>
           <a:xfrm>
-            <a:off x="731520" y="3950000"/>
+            <a:off x="731520" y="3900000"/>
             <a:ext cx="10728655" cy="550000"/>
           </a:xfrm>
           <a:prstGeom prst="rect">
@@ -8875,53 +8577,20 @@
               </a:defRPr>
             </a:pPr>
             <a:r>
-              <a:t>• Effect ADT — persist(), reply(), andReply() — declarative, composable</a:t>
-            </a:r>
-          </a:p>
-        </p:txBody>
-      </p:sp>
-      <p:sp>
-        <p:nvSpPr>
-          <p:cNvPr id="9" name="TextBox 8"/>
-          <p:cNvSpPr txBox="1"/>
-          <p:nvPr/>
-        </p:nvSpPr>
-        <p:spPr>
-          <a:xfrm>
-            <a:off x="731520" y="4500000"/>
-            <a:ext cx="10728655" cy="550000"/>
-          </a:xfrm>
-          <a:prstGeom prst="rect">
-            <a:avLst/>
-          </a:prstGeom>
-          <a:noFill/>
-        </p:spPr>
-        <p:txBody>
-          <a:bodyPr wrap="square"/>
-          <a:lstStyle/>
-          <a:p>
-            <a:pPr algn="l">
-              <a:defRPr sz="1700" b="0">
-                <a:solidFill>
-                  <a:srgbClr val="222222"/>
-                </a:solidFill>
-              </a:defRPr>
-            </a:pPr>
-            <a:r>
-              <a:t>• AggregateTestKit — test without infrastructure, test the domain directly</a:t>
-            </a:r>
-          </a:p>
-        </p:txBody>
-      </p:sp>
-      <p:sp>
-        <p:nvSpPr>
-          <p:cNvPr id="10" name="Rounded Rectangle 9"/>
+              <a:t>• AggregateTestKit — test the domain directly, no infrastructure</a:t>
+            </a:r>
+          </a:p>
+        </p:txBody>
+      </p:sp>
+      <p:sp>
+        <p:nvSpPr>
+          <p:cNvPr id="9" name="Rounded Rectangle 8"/>
           <p:cNvSpPr/>
           <p:nvPr/>
         </p:nvSpPr>
         <p:spPr>
           <a:xfrm>
-            <a:off x="731520" y="5300000"/>
+            <a:off x="731520" y="5200000"/>
             <a:ext cx="8500000" cy="1000000"/>
           </a:xfrm>
           <a:prstGeom prst="roundRect">
@@ -8963,7 +8632,7 @@
               </a:defRPr>
             </a:pPr>
             <a:r>
-              <a:t>// The core pattern you'll use everywhere:</a:t>
+              <a:t>// The core pattern:</a:t>
             </a:r>
             <a:br/>
             <a:r>
@@ -8985,6 +8654,271 @@
 </file>
 
 <file path=ppt/slides/slide17.xml><?xml version="1.0" encoding="utf-8"?>
+<p:sld xmlns:a="http://schemas.openxmlformats.org/drawingml/2006/main" xmlns:p="http://schemas.openxmlformats.org/presentationml/2006/main" xmlns:r="http://schemas.openxmlformats.org/officeDocument/2006/relationships">
+  <p:cSld>
+    <p:bg>
+      <p:bgPr>
+        <a:solidFill>
+          <a:srgbClr val="ECECEC"/>
+        </a:solidFill>
+        <a:effectLst/>
+      </p:bgPr>
+    </p:bg>
+    <p:spTree>
+      <p:nvGrpSpPr>
+        <p:cNvPr id="1" name=""/>
+        <p:cNvGrpSpPr/>
+        <p:nvPr/>
+      </p:nvGrpSpPr>
+      <p:grpSpPr/>
+      <p:sp>
+        <p:nvSpPr>
+          <p:cNvPr id="2" name="TextBox 1"/>
+          <p:cNvSpPr txBox="1"/>
+          <p:nvPr/>
+        </p:nvSpPr>
+        <p:spPr>
+          <a:xfrm>
+            <a:off x="731520" y="548640"/>
+            <a:ext cx="10728655" cy="800000"/>
+          </a:xfrm>
+          <a:prstGeom prst="rect">
+            <a:avLst/>
+          </a:prstGeom>
+          <a:noFill/>
+        </p:spPr>
+        <p:txBody>
+          <a:bodyPr wrap="square"/>
+          <a:lstStyle/>
+          <a:p>
+            <a:pPr algn="l">
+              <a:defRPr sz="3600" b="1">
+                <a:solidFill>
+                  <a:srgbClr val="2266AA"/>
+                </a:solidFill>
+              </a:defRPr>
+            </a:pPr>
+            <a:r>
+              <a:t>DEMO: YOUR AGGREGATE AS AN API</a:t>
+            </a:r>
+          </a:p>
+        </p:txBody>
+      </p:sp>
+      <p:sp>
+        <p:nvSpPr>
+          <p:cNvPr id="3" name="Rectangle 2"/>
+          <p:cNvSpPr/>
+          <p:nvPr/>
+        </p:nvSpPr>
+        <p:spPr>
+          <a:xfrm>
+            <a:off x="731520" y="1200000"/>
+            <a:ext cx="10728655" cy="36000"/>
+          </a:xfrm>
+          <a:prstGeom prst="rect">
+            <a:avLst/>
+          </a:prstGeom>
+          <a:solidFill>
+            <a:srgbClr val="2266AA"/>
+          </a:solidFill>
+          <a:ln>
+            <a:noFill/>
+          </a:ln>
+        </p:spPr>
+        <p:style>
+          <a:lnRef idx="1">
+            <a:schemeClr val="accent1"/>
+          </a:lnRef>
+          <a:fillRef idx="3">
+            <a:schemeClr val="accent1"/>
+          </a:fillRef>
+          <a:effectRef idx="2">
+            <a:schemeClr val="accent1"/>
+          </a:effectRef>
+          <a:fontRef idx="minor">
+            <a:schemeClr val="lt1"/>
+          </a:fontRef>
+        </p:style>
+        <p:txBody>
+          <a:bodyPr rtlCol="0" anchor="ctr"/>
+          <a:lstStyle/>
+          <a:p>
+            <a:pPr algn="ctr"/>
+          </a:p>
+        </p:txBody>
+      </p:sp>
+      <p:sp>
+        <p:nvSpPr>
+          <p:cNvPr id="4" name="TextBox 3"/>
+          <p:cNvSpPr txBox="1"/>
+          <p:nvPr/>
+        </p:nvSpPr>
+        <p:spPr>
+          <a:xfrm>
+            <a:off x="731520" y="1600000"/>
+            <a:ext cx="10728655" cy="400000"/>
+          </a:xfrm>
+          <a:prstGeom prst="rect">
+            <a:avLst/>
+          </a:prstGeom>
+          <a:noFill/>
+        </p:spPr>
+        <p:txBody>
+          <a:bodyPr wrap="square"/>
+          <a:lstStyle/>
+          <a:p>
+            <a:pPr algn="l">
+              <a:defRPr sz="1900" b="0">
+                <a:solidFill>
+                  <a:srgbClr val="444444"/>
+                </a:solidFill>
+              </a:defRPr>
+            </a:pPr>
+            <a:r>
+              <a:t>Your decide() function is now a live HTTP endpoint:</a:t>
+            </a:r>
+          </a:p>
+        </p:txBody>
+      </p:sp>
+      <p:sp>
+        <p:nvSpPr>
+          <p:cNvPr id="5" name="Rounded Rectangle 4"/>
+          <p:cNvSpPr/>
+          <p:nvPr/>
+        </p:nvSpPr>
+        <p:spPr>
+          <a:xfrm>
+            <a:off x="731520" y="2200000"/>
+            <a:ext cx="8500000" cy="3200000"/>
+          </a:xfrm>
+          <a:prstGeom prst="roundRect">
+            <a:avLst>
+              <a:gd name="adj" fmla="val 2000"/>
+            </a:avLst>
+          </a:prstGeom>
+          <a:solidFill>
+            <a:srgbClr val="2D2D2D"/>
+          </a:solidFill>
+          <a:ln>
+            <a:noFill/>
+          </a:ln>
+        </p:spPr>
+        <p:style>
+          <a:lnRef idx="1">
+            <a:schemeClr val="accent1"/>
+          </a:lnRef>
+          <a:fillRef idx="3">
+            <a:schemeClr val="accent1"/>
+          </a:fillRef>
+          <a:effectRef idx="2">
+            <a:schemeClr val="accent1"/>
+          </a:effectRef>
+          <a:fontRef idx="minor">
+            <a:schemeClr val="lt1"/>
+          </a:fontRef>
+        </p:style>
+        <p:txBody>
+          <a:bodyPr rtlCol="0" anchor="ctr" wrap="square" lIns="203200" tIns="152400" rIns="203200" bIns="152400"/>
+          <a:lstStyle/>
+          <a:p>
+            <a:pPr algn="ctr">
+              <a:defRPr sz="1400">
+                <a:solidFill>
+                  <a:srgbClr val="FFFFFF"/>
+                </a:solidFill>
+                <a:latin typeface="SF Mono"/>
+              </a:defRPr>
+            </a:pPr>
+            <a:r>
+              <a:t># Issue a gift card</a:t>
+            </a:r>
+            <a:br/>
+            <a:r>
+              <a:t>curl -X POST http://localhost:3000/api/gift-card/card-1 \</a:t>
+            </a:r>
+            <a:br/>
+            <a:r>
+              <a:t>  -H 'Content-Type: application/json' \</a:t>
+            </a:r>
+            <a:br/>
+            <a:r>
+              <a:t>  -d '{"tag":"Issue","amount":100,"recipientName":"Alice"}'</a:t>
+            </a:r>
+            <a:br/>
+            <a:r>
+              <a:t>→ {"tag":"Ok"}</a:t>
+            </a:r>
+            <a:br/>
+            <a:br/>
+            <a:r>
+              <a:t># Redeem</a:t>
+            </a:r>
+            <a:br/>
+            <a:r>
+              <a:t>curl -X POST ... -d '{"tag":"Redeem","amount":30}'</a:t>
+            </a:r>
+            <a:br/>
+            <a:r>
+              <a:t>→ {"tag":"Ok"}</a:t>
+            </a:r>
+            <a:br/>
+            <a:br/>
+            <a:r>
+              <a:t># Reject (too much)</a:t>
+            </a:r>
+            <a:br/>
+            <a:r>
+              <a:t>curl -X POST ... -d '{"tag":"Redeem","amount":999}'</a:t>
+            </a:r>
+            <a:br/>
+            <a:r>
+              <a:t>→ 400 {"tag":"Rejected","reason":"Insufficient balance"}</a:t>
+            </a:r>
+          </a:p>
+        </p:txBody>
+      </p:sp>
+      <p:sp>
+        <p:nvSpPr>
+          <p:cNvPr id="6" name="TextBox 5"/>
+          <p:cNvSpPr txBox="1"/>
+          <p:nvPr/>
+        </p:nvSpPr>
+        <p:spPr>
+          <a:xfrm>
+            <a:off x="731520" y="5700000"/>
+            <a:ext cx="10728655" cy="400000"/>
+          </a:xfrm>
+          <a:prstGeom prst="rect">
+            <a:avLst/>
+          </a:prstGeom>
+          <a:noFill/>
+        </p:spPr>
+        <p:txBody>
+          <a:bodyPr wrap="square"/>
+          <a:lstStyle/>
+          <a:p>
+            <a:pPr algn="l">
+              <a:defRPr sz="1500" b="1">
+                <a:solidFill>
+                  <a:srgbClr val="2266AA"/>
+                </a:solidFill>
+              </a:defRPr>
+            </a:pPr>
+            <a:r>
+              <a:t>Reply → HTTP response.  Rejection → 400.  Timeout → 504.  ETag for optimistic concurrency.</a:t>
+            </a:r>
+          </a:p>
+        </p:txBody>
+      </p:sp>
+    </p:spTree>
+  </p:cSld>
+  <p:clrMapOvr>
+    <a:masterClrMapping/>
+  </p:clrMapOvr>
+</p:sld>
+</file>
+
+<file path=ppt/slides/slide18.xml><?xml version="1.0" encoding="utf-8"?>
 <p:sld xmlns:a="http://schemas.openxmlformats.org/drawingml/2006/main" xmlns:p="http://schemas.openxmlformats.org/presentationml/2006/main" xmlns:r="http://schemas.openxmlformats.org/officeDocument/2006/relationships">
   <p:cSld>
     <p:bg>
@@ -9091,794 +9025,12 @@
             <a:pPr algn="ctr">
               <a:defRPr sz="1800" b="0">
                 <a:solidFill>
-                  <a:srgbClr val="2266AA"/>
-                </a:solidFill>
-              </a:defRPr>
-            </a:pPr>
-            <a:r>
-              <a:t>Next up: two aggregates talking to each other</a:t>
-            </a:r>
-          </a:p>
-        </p:txBody>
-      </p:sp>
-    </p:spTree>
-  </p:cSld>
-  <p:clrMapOvr>
-    <a:masterClrMapping/>
-  </p:clrMapOvr>
-</p:sld>
-</file>
-
-<file path=ppt/slides/slide18.xml><?xml version="1.0" encoding="utf-8"?>
-<p:sld xmlns:a="http://schemas.openxmlformats.org/drawingml/2006/main" xmlns:p="http://schemas.openxmlformats.org/presentationml/2006/main" xmlns:r="http://schemas.openxmlformats.org/officeDocument/2006/relationships">
-  <p:cSld>
-    <p:bg>
-      <p:bgPr>
-        <a:solidFill>
-          <a:srgbClr val="ECECEC"/>
-        </a:solidFill>
-        <a:effectLst/>
-      </p:bgPr>
-    </p:bg>
-    <p:spTree>
-      <p:nvGrpSpPr>
-        <p:cNvPr id="1" name=""/>
-        <p:cNvGrpSpPr/>
-        <p:nvPr/>
-      </p:nvGrpSpPr>
-      <p:grpSpPr/>
-      <p:sp>
-        <p:nvSpPr>
-          <p:cNvPr id="2" name="TextBox 1"/>
-          <p:cNvSpPr txBox="1"/>
-          <p:nvPr/>
-        </p:nvSpPr>
-        <p:spPr>
-          <a:xfrm>
-            <a:off x="731520" y="548640"/>
-            <a:ext cx="10728655" cy="800000"/>
-          </a:xfrm>
-          <a:prstGeom prst="rect">
-            <a:avLst/>
-          </a:prstGeom>
-          <a:noFill/>
-        </p:spPr>
-        <p:txBody>
-          <a:bodyPr wrap="square"/>
-          <a:lstStyle/>
-          <a:p>
-            <a:pPr algn="l">
-              <a:defRPr sz="3600" b="1">
-                <a:solidFill>
-                  <a:srgbClr val="222222"/>
-                </a:solidFill>
-              </a:defRPr>
-            </a:pPr>
-            <a:r>
-              <a:t>HOW DO AGGREGATES TALK?</a:t>
-            </a:r>
-          </a:p>
-        </p:txBody>
-      </p:sp>
-      <p:sp>
-        <p:nvSpPr>
-          <p:cNvPr id="3" name="Rectangle 2"/>
-          <p:cNvSpPr/>
-          <p:nvPr/>
-        </p:nvSpPr>
-        <p:spPr>
-          <a:xfrm>
-            <a:off x="731520" y="1200000"/>
-            <a:ext cx="10728655" cy="36000"/>
-          </a:xfrm>
-          <a:prstGeom prst="rect">
-            <a:avLst/>
-          </a:prstGeom>
-          <a:solidFill>
-            <a:srgbClr val="2266AA"/>
-          </a:solidFill>
-          <a:ln>
-            <a:noFill/>
-          </a:ln>
-        </p:spPr>
-        <p:style>
-          <a:lnRef idx="1">
-            <a:schemeClr val="accent1"/>
-          </a:lnRef>
-          <a:fillRef idx="3">
-            <a:schemeClr val="accent1"/>
-          </a:fillRef>
-          <a:effectRef idx="2">
-            <a:schemeClr val="accent1"/>
-          </a:effectRef>
-          <a:fontRef idx="minor">
-            <a:schemeClr val="lt1"/>
-          </a:fontRef>
-        </p:style>
-        <p:txBody>
-          <a:bodyPr rtlCol="0" anchor="ctr"/>
-          <a:lstStyle/>
-          <a:p>
-            <a:pPr algn="ctr"/>
-          </a:p>
-        </p:txBody>
-      </p:sp>
-      <p:sp>
-        <p:nvSpPr>
-          <p:cNvPr id="4" name="Rounded Rectangle 3"/>
-          <p:cNvSpPr/>
-          <p:nvPr/>
-        </p:nvSpPr>
-        <p:spPr>
-          <a:xfrm>
-            <a:off x="800000" y="2000000"/>
-            <a:ext cx="2800000" cy="1200000"/>
-          </a:xfrm>
-          <a:prstGeom prst="roundRect">
-            <a:avLst>
-              <a:gd name="adj" fmla="val 5000"/>
-            </a:avLst>
-          </a:prstGeom>
-          <a:solidFill>
-            <a:srgbClr val="2266AA"/>
-          </a:solidFill>
-          <a:ln>
-            <a:noFill/>
-          </a:ln>
-        </p:spPr>
-        <p:style>
-          <a:lnRef idx="1">
-            <a:schemeClr val="accent1"/>
-          </a:lnRef>
-          <a:fillRef idx="3">
-            <a:schemeClr val="accent1"/>
-          </a:fillRef>
-          <a:effectRef idx="2">
-            <a:schemeClr val="accent1"/>
-          </a:effectRef>
-          <a:fontRef idx="minor">
-            <a:schemeClr val="lt1"/>
-          </a:fontRef>
-        </p:style>
-        <p:txBody>
-          <a:bodyPr rtlCol="0" anchor="ctr" wrap="square"/>
-          <a:lstStyle/>
-          <a:p>
-            <a:pPr algn="ctr">
-              <a:spcBef>
-                <a:spcPts val="0"/>
-              </a:spcBef>
-              <a:spcAft>
-                <a:spcPts val="0"/>
-              </a:spcAft>
-              <a:defRPr sz="2000" b="1">
-                <a:solidFill>
-                  <a:srgbClr val="FFFFFF"/>
-                </a:solidFill>
-              </a:defRPr>
-            </a:pPr>
-            <a:r>
-              <a:t>Order</a:t>
-            </a:r>
-            <a:br/>
-            <a:r>
-              <a:t>Aggregate</a:t>
-            </a:r>
-          </a:p>
-        </p:txBody>
-      </p:sp>
-      <p:sp>
-        <p:nvSpPr>
-          <p:cNvPr id="5" name="Rounded Rectangle 4"/>
-          <p:cNvSpPr/>
-          <p:nvPr/>
-        </p:nvSpPr>
-        <p:spPr>
-          <a:xfrm>
-            <a:off x="5000000" y="2000000"/>
-            <a:ext cx="2800000" cy="1200000"/>
-          </a:xfrm>
-          <a:prstGeom prst="roundRect">
-            <a:avLst>
-              <a:gd name="adj" fmla="val 5000"/>
-            </a:avLst>
-          </a:prstGeom>
-          <a:solidFill>
-            <a:srgbClr val="66BB6A"/>
-          </a:solidFill>
-          <a:ln>
-            <a:noFill/>
-          </a:ln>
-        </p:spPr>
-        <p:style>
-          <a:lnRef idx="1">
-            <a:schemeClr val="accent1"/>
-          </a:lnRef>
-          <a:fillRef idx="3">
-            <a:schemeClr val="accent1"/>
-          </a:fillRef>
-          <a:effectRef idx="2">
-            <a:schemeClr val="accent1"/>
-          </a:effectRef>
-          <a:fontRef idx="minor">
-            <a:schemeClr val="lt1"/>
-          </a:fontRef>
-        </p:style>
-        <p:txBody>
-          <a:bodyPr rtlCol="0" anchor="ctr" wrap="square"/>
-          <a:lstStyle/>
-          <a:p>
-            <a:pPr algn="ctr">
-              <a:spcBef>
-                <a:spcPts val="0"/>
-              </a:spcBef>
-              <a:spcAft>
-                <a:spcPts val="0"/>
-              </a:spcAft>
-              <a:defRPr sz="2000" b="1">
-                <a:solidFill>
-                  <a:srgbClr val="FFFFFF"/>
-                </a:solidFill>
-              </a:defRPr>
-            </a:pPr>
-            <a:r>
-              <a:t>Payment</a:t>
-            </a:r>
-            <a:br/>
-            <a:r>
-              <a:t>Aggregate</a:t>
-            </a:r>
-          </a:p>
-        </p:txBody>
-      </p:sp>
-      <p:sp>
-        <p:nvSpPr>
-          <p:cNvPr id="6" name="Rounded Rectangle 5"/>
-          <p:cNvSpPr/>
-          <p:nvPr/>
-        </p:nvSpPr>
-        <p:spPr>
-          <a:xfrm>
-            <a:off x="9200000" y="2000000"/>
-            <a:ext cx="2200000" cy="1200000"/>
-          </a:xfrm>
-          <a:prstGeom prst="roundRect">
-            <a:avLst>
-              <a:gd name="adj" fmla="val 5000"/>
-            </a:avLst>
-          </a:prstGeom>
-          <a:solidFill>
-            <a:srgbClr val="FFA726"/>
-          </a:solidFill>
-          <a:ln>
-            <a:noFill/>
-          </a:ln>
-        </p:spPr>
-        <p:style>
-          <a:lnRef idx="1">
-            <a:schemeClr val="accent1"/>
-          </a:lnRef>
-          <a:fillRef idx="3">
-            <a:schemeClr val="accent1"/>
-          </a:fillRef>
-          <a:effectRef idx="2">
-            <a:schemeClr val="accent1"/>
-          </a:effectRef>
-          <a:fontRef idx="minor">
-            <a:schemeClr val="lt1"/>
-          </a:fontRef>
-        </p:style>
-        <p:txBody>
-          <a:bodyPr rtlCol="0" anchor="ctr" wrap="square"/>
-          <a:lstStyle/>
-          <a:p>
-            <a:pPr algn="ctr">
-              <a:spcBef>
-                <a:spcPts val="0"/>
-              </a:spcBef>
-              <a:spcAft>
-                <a:spcPts val="0"/>
-              </a:spcAft>
-              <a:defRPr sz="2000" b="1">
-                <a:solidFill>
-                  <a:srgbClr val="FFFFFF"/>
-                </a:solidFill>
-              </a:defRPr>
-            </a:pPr>
-            <a:r>
-              <a:t>Payment</a:t>
-            </a:r>
-            <a:br/>
-            <a:r>
-              <a:t>Gateway</a:t>
-            </a:r>
-          </a:p>
-        </p:txBody>
-      </p:sp>
-      <p:sp>
-        <p:nvSpPr>
-          <p:cNvPr id="7" name="TextBox 6"/>
-          <p:cNvSpPr txBox="1"/>
-          <p:nvPr/>
-        </p:nvSpPr>
-        <p:spPr>
-          <a:xfrm>
-            <a:off x="3300000" y="1600000"/>
-            <a:ext cx="2000000" cy="400000"/>
-          </a:xfrm>
-          <a:prstGeom prst="rect">
-            <a:avLst/>
-          </a:prstGeom>
-          <a:noFill/>
-        </p:spPr>
-        <p:txBody>
-          <a:bodyPr wrap="square"/>
-          <a:lstStyle/>
-          <a:p>
-            <a:pPr algn="ctr">
-              <a:defRPr sz="1400" b="0">
-                <a:solidFill>
-                  <a:srgbClr val="222222"/>
-                </a:solidFill>
-                <a:latin typeface="SF Mono"/>
-              </a:defRPr>
-            </a:pPr>
-            <a:r>
-              <a:t>ctx.tell(Charge)</a:t>
-            </a:r>
-          </a:p>
-        </p:txBody>
-      </p:sp>
-      <p:sp>
-        <p:nvSpPr>
-          <p:cNvPr id="8" name="TextBox 7"/>
-          <p:cNvSpPr txBox="1"/>
-          <p:nvPr/>
-        </p:nvSpPr>
-        <p:spPr>
-          <a:xfrm>
-            <a:off x="3300000" y="3300000"/>
-            <a:ext cx="2000000" cy="400000"/>
-          </a:xfrm>
-          <a:prstGeom prst="rect">
-            <a:avLst/>
-          </a:prstGeom>
-          <a:noFill/>
-        </p:spPr>
-        <p:txBody>
-          <a:bodyPr wrap="square"/>
-          <a:lstStyle/>
-          <a:p>
-            <a:pPr algn="ctr">
-              <a:defRPr sz="1400" b="0">
-                <a:solidFill>
-                  <a:srgbClr val="222222"/>
-                </a:solidFill>
-                <a:latin typeface="SF Mono"/>
-              </a:defRPr>
-            </a:pPr>
-            <a:r>
-              <a:t>ctx.tell(Confirm)</a:t>
-            </a:r>
-          </a:p>
-        </p:txBody>
-      </p:sp>
-      <p:sp>
-        <p:nvSpPr>
-          <p:cNvPr id="9" name="TextBox 8"/>
-          <p:cNvSpPr txBox="1"/>
-          <p:nvPr/>
-        </p:nvSpPr>
-        <p:spPr>
-          <a:xfrm>
-            <a:off x="7500000" y="1600000"/>
-            <a:ext cx="2000000" cy="400000"/>
-          </a:xfrm>
-          <a:prstGeom prst="rect">
-            <a:avLst/>
-          </a:prstGeom>
-          <a:noFill/>
-        </p:spPr>
-        <p:txBody>
-          <a:bodyPr wrap="square"/>
-          <a:lstStyle/>
-          <a:p>
-            <a:pPr algn="ctr">
-              <a:defRPr sz="1400" b="0">
-                <a:solidFill>
-                  <a:srgbClr val="222222"/>
-                </a:solidFill>
-                <a:latin typeface="SF Mono"/>
-              </a:defRPr>
-            </a:pPr>
-            <a:r>
-              <a:t>ctx.sync()</a:t>
-            </a:r>
-          </a:p>
-        </p:txBody>
-      </p:sp>
-      <p:sp>
-        <p:nvSpPr>
-          <p:cNvPr id="10" name="Right Arrow 9"/>
-          <p:cNvSpPr/>
-          <p:nvPr/>
-        </p:nvSpPr>
-        <p:spPr>
-          <a:xfrm>
-            <a:off x="3700000" y="2200000"/>
-            <a:ext cx="1200000" cy="300000"/>
-          </a:xfrm>
-          <a:prstGeom prst="rightArrow">
-            <a:avLst/>
-          </a:prstGeom>
-          <a:solidFill>
-            <a:srgbClr val="888888"/>
-          </a:solidFill>
-          <a:ln>
-            <a:noFill/>
-          </a:ln>
-        </p:spPr>
-        <p:style>
-          <a:lnRef idx="1">
-            <a:schemeClr val="accent1"/>
-          </a:lnRef>
-          <a:fillRef idx="3">
-            <a:schemeClr val="accent1"/>
-          </a:fillRef>
-          <a:effectRef idx="2">
-            <a:schemeClr val="accent1"/>
-          </a:effectRef>
-          <a:fontRef idx="minor">
-            <a:schemeClr val="lt1"/>
-          </a:fontRef>
-        </p:style>
-        <p:txBody>
-          <a:bodyPr rtlCol="0" anchor="ctr"/>
-          <a:lstStyle/>
-          <a:p>
-            <a:pPr algn="ctr"/>
-          </a:p>
-        </p:txBody>
-      </p:sp>
-      <p:sp>
-        <p:nvSpPr>
-          <p:cNvPr id="11" name="TextBox 10"/>
-          <p:cNvSpPr txBox="1"/>
-          <p:nvPr/>
-        </p:nvSpPr>
-        <p:spPr>
-          <a:xfrm>
-            <a:off x="3700000" y="3000000"/>
-            <a:ext cx="1200000" cy="300000"/>
-          </a:xfrm>
-          <a:prstGeom prst="rect">
-            <a:avLst/>
-          </a:prstGeom>
-          <a:noFill/>
-        </p:spPr>
-        <p:txBody>
-          <a:bodyPr wrap="square"/>
-          <a:lstStyle/>
-          <a:p>
-            <a:pPr algn="ctr">
-              <a:defRPr sz="1600" b="0">
-                <a:solidFill>
-                  <a:srgbClr val="888888"/>
-                </a:solidFill>
-              </a:defRPr>
-            </a:pPr>
-            <a:r>
-              <a:t>←←←←←←←←</a:t>
-            </a:r>
-          </a:p>
-        </p:txBody>
-      </p:sp>
-      <p:sp>
-        <p:nvSpPr>
-          <p:cNvPr id="12" name="Right Arrow 11"/>
-          <p:cNvSpPr/>
-          <p:nvPr/>
-        </p:nvSpPr>
-        <p:spPr>
-          <a:xfrm>
-            <a:off x="7900000" y="2200000"/>
-            <a:ext cx="1200000" cy="300000"/>
-          </a:xfrm>
-          <a:prstGeom prst="rightArrow">
-            <a:avLst/>
-          </a:prstGeom>
-          <a:solidFill>
-            <a:srgbClr val="888888"/>
-          </a:solidFill>
-          <a:ln>
-            <a:noFill/>
-          </a:ln>
-        </p:spPr>
-        <p:style>
-          <a:lnRef idx="1">
-            <a:schemeClr val="accent1"/>
-          </a:lnRef>
-          <a:fillRef idx="3">
-            <a:schemeClr val="accent1"/>
-          </a:fillRef>
-          <a:effectRef idx="2">
-            <a:schemeClr val="accent1"/>
-          </a:effectRef>
-          <a:fontRef idx="minor">
-            <a:schemeClr val="lt1"/>
-          </a:fontRef>
-        </p:style>
-        <p:txBody>
-          <a:bodyPr rtlCol="0" anchor="ctr"/>
-          <a:lstStyle/>
-          <a:p>
-            <a:pPr algn="ctr"/>
-          </a:p>
-        </p:txBody>
-      </p:sp>
-      <p:sp>
-        <p:nvSpPr>
-          <p:cNvPr id="13" name="TextBox 12"/>
-          <p:cNvSpPr txBox="1"/>
-          <p:nvPr/>
-        </p:nvSpPr>
-        <p:spPr>
-          <a:xfrm>
-            <a:off x="731520" y="4000000"/>
-            <a:ext cx="2800000" cy="400000"/>
-          </a:xfrm>
-          <a:prstGeom prst="rect">
-            <a:avLst/>
-          </a:prstGeom>
-          <a:noFill/>
-        </p:spPr>
-        <p:txBody>
-          <a:bodyPr wrap="square"/>
-          <a:lstStyle/>
-          <a:p>
-            <a:pPr algn="l">
-              <a:defRPr sz="1700" b="1">
-                <a:solidFill>
-                  <a:srgbClr val="2266AA"/>
-                </a:solidFill>
-                <a:latin typeface="SF Mono"/>
-              </a:defRPr>
-            </a:pPr>
-            <a:r>
-              <a:t>CategoryRegistration</a:t>
-            </a:r>
-          </a:p>
-        </p:txBody>
-      </p:sp>
-      <p:sp>
-        <p:nvSpPr>
-          <p:cNvPr id="14" name="TextBox 13"/>
-          <p:cNvSpPr txBox="1"/>
-          <p:nvPr/>
-        </p:nvSpPr>
-        <p:spPr>
-          <a:xfrm>
-            <a:off x="3700000" y="4000000"/>
-            <a:ext cx="8000000" cy="400000"/>
-          </a:xfrm>
-          <a:prstGeom prst="rect">
-            <a:avLst/>
-          </a:prstGeom>
-          <a:noFill/>
-        </p:spPr>
-        <p:txBody>
-          <a:bodyPr wrap="square"/>
-          <a:lstStyle/>
-          <a:p>
-            <a:pPr algn="l">
-              <a:defRPr sz="1700" b="0">
-                <a:solidFill>
-                  <a:srgbClr val="444444"/>
-                </a:solidFill>
-              </a:defRPr>
-            </a:pPr>
-            <a:r>
-              <a:t>— type-safe cross-entity contract (compile-time checked)</a:t>
-            </a:r>
-          </a:p>
-        </p:txBody>
-      </p:sp>
-      <p:sp>
-        <p:nvSpPr>
-          <p:cNvPr id="15" name="TextBox 14"/>
-          <p:cNvSpPr txBox="1"/>
-          <p:nvPr/>
-        </p:nvSpPr>
-        <p:spPr>
-          <a:xfrm>
-            <a:off x="731520" y="4550000"/>
-            <a:ext cx="2800000" cy="400000"/>
-          </a:xfrm>
-          <a:prstGeom prst="rect">
-            <a:avLst/>
-          </a:prstGeom>
-          <a:noFill/>
-        </p:spPr>
-        <p:txBody>
-          <a:bodyPr wrap="square"/>
-          <a:lstStyle/>
-          <a:p>
-            <a:pPr algn="l">
-              <a:defRPr sz="1700" b="1">
-                <a:solidFill>
-                  <a:srgbClr val="2266AA"/>
-                </a:solidFill>
-                <a:latin typeface="SF Mono"/>
-              </a:defRPr>
-            </a:pPr>
-            <a:r>
-              <a:t>ctx.tell()</a:t>
-            </a:r>
-          </a:p>
-        </p:txBody>
-      </p:sp>
-      <p:sp>
-        <p:nvSpPr>
-          <p:cNvPr id="16" name="TextBox 15"/>
-          <p:cNvSpPr txBox="1"/>
-          <p:nvPr/>
-        </p:nvSpPr>
-        <p:spPr>
-          <a:xfrm>
-            <a:off x="3700000" y="4550000"/>
-            <a:ext cx="8000000" cy="400000"/>
-          </a:xfrm>
-          <a:prstGeom prst="rect">
-            <a:avLst/>
-          </a:prstGeom>
-          <a:noFill/>
-        </p:spPr>
-        <p:txBody>
-          <a:bodyPr wrap="square"/>
-          <a:lstStyle/>
-          <a:p>
-            <a:pPr algn="l">
-              <a:defRPr sz="1700" b="0">
-                <a:solidFill>
-                  <a:srgbClr val="444444"/>
-                </a:solidFill>
-              </a:defRPr>
-            </a:pPr>
-            <a:r>
-              <a:t>— fire-and-forget command across aggregate boundaries</a:t>
-            </a:r>
-          </a:p>
-        </p:txBody>
-      </p:sp>
-      <p:sp>
-        <p:nvSpPr>
-          <p:cNvPr id="17" name="TextBox 16"/>
-          <p:cNvSpPr txBox="1"/>
-          <p:nvPr/>
-        </p:nvSpPr>
-        <p:spPr>
-          <a:xfrm>
-            <a:off x="731520" y="5100000"/>
-            <a:ext cx="2800000" cy="400000"/>
-          </a:xfrm>
-          <a:prstGeom prst="rect">
-            <a:avLst/>
-          </a:prstGeom>
-          <a:noFill/>
-        </p:spPr>
-        <p:txBody>
-          <a:bodyPr wrap="square"/>
-          <a:lstStyle/>
-          <a:p>
-            <a:pPr algn="l">
-              <a:defRPr sz="1700" b="1">
-                <a:solidFill>
-                  <a:srgbClr val="2266AA"/>
-                </a:solidFill>
-                <a:latin typeface="SF Mono"/>
-              </a:defRPr>
-            </a:pPr>
-            <a:r>
-              <a:t>ctx.sync()</a:t>
-            </a:r>
-          </a:p>
-        </p:txBody>
-      </p:sp>
-      <p:sp>
-        <p:nvSpPr>
-          <p:cNvPr id="18" name="TextBox 17"/>
-          <p:cNvSpPr txBox="1"/>
-          <p:nvPr/>
-        </p:nvSpPr>
-        <p:spPr>
-          <a:xfrm>
-            <a:off x="3700000" y="5100000"/>
-            <a:ext cx="8000000" cy="400000"/>
-          </a:xfrm>
-          <a:prstGeom prst="rect">
-            <a:avLst/>
-          </a:prstGeom>
-          <a:noFill/>
-        </p:spPr>
-        <p:txBody>
-          <a:bodyPr wrap="square"/>
-          <a:lstStyle/>
-          <a:p>
-            <a:pPr algn="l">
-              <a:defRPr sz="1700" b="0">
-                <a:solidFill>
-                  <a:srgbClr val="444444"/>
-                </a:solidFill>
-              </a:defRPr>
-            </a:pPr>
-            <a:r>
-              <a:t>— call external system, result comes back as a command (callback pattern)</a:t>
-            </a:r>
-          </a:p>
-        </p:txBody>
-      </p:sp>
-      <p:sp>
-        <p:nvSpPr>
-          <p:cNvPr id="19" name="TextBox 18"/>
-          <p:cNvSpPr txBox="1"/>
-          <p:nvPr/>
-        </p:nvSpPr>
-        <p:spPr>
-          <a:xfrm>
-            <a:off x="731520" y="5650000"/>
-            <a:ext cx="2800000" cy="400000"/>
-          </a:xfrm>
-          <a:prstGeom prst="rect">
-            <a:avLst/>
-          </a:prstGeom>
-          <a:noFill/>
-        </p:spPr>
-        <p:txBody>
-          <a:bodyPr wrap="square"/>
-          <a:lstStyle/>
-          <a:p>
-            <a:pPr algn="l">
-              <a:defRPr sz="1700" b="1">
-                <a:solidFill>
-                  <a:srgbClr val="2266AA"/>
-                </a:solidFill>
-              </a:defRPr>
-            </a:pPr>
-            <a:r>
-              <a:t>Key principle:</a:t>
-            </a:r>
-          </a:p>
-        </p:txBody>
-      </p:sp>
-      <p:sp>
-        <p:nvSpPr>
-          <p:cNvPr id="20" name="TextBox 19"/>
-          <p:cNvSpPr txBox="1"/>
-          <p:nvPr/>
-        </p:nvSpPr>
-        <p:spPr>
-          <a:xfrm>
-            <a:off x="3700000" y="5650000"/>
-            <a:ext cx="8000000" cy="400000"/>
-          </a:xfrm>
-          <a:prstGeom prst="rect">
-            <a:avLst/>
-          </a:prstGeom>
-          <a:noFill/>
-        </p:spPr>
-        <p:txBody>
-          <a:bodyPr wrap="square"/>
-          <a:lstStyle/>
-          <a:p>
-            <a:pPr algn="l">
-              <a:defRPr sz="1700" b="0">
-                <a:solidFill>
-                  <a:srgbClr val="444444"/>
-                </a:solidFill>
-              </a:defRPr>
-            </a:pPr>
-            <a:r>
-              <a:t>— commands cross boundaries, events stay within</a:t>
+                  <a:srgbClr val="66BB6A"/>
+                </a:solidFill>
+              </a:defRPr>
+            </a:pPr>
+            <a:r>
+              <a:t>Next up: the read side — projections</a:t>
             </a:r>
           </a:p>
         </p:txBody>
@@ -9930,14 +9082,14 @@
           <a:lstStyle/>
           <a:p>
             <a:pPr algn="l">
-              <a:defRPr sz="3400" b="1">
-                <a:solidFill>
-                  <a:srgbClr val="66BB6A"/>
-                </a:solidFill>
-              </a:defRPr>
-            </a:pPr>
-            <a:r>
-              <a:t>EXERCISE 2: ORDER + PAYMENT</a:t>
+              <a:defRPr sz="3600" b="1">
+                <a:solidFill>
+                  <a:srgbClr val="222222"/>
+                </a:solidFill>
+              </a:defRPr>
+            </a:pPr>
+            <a:r>
+              <a:t>WRITE SIDE VS READ SIDE</a:t>
             </a:r>
           </a:p>
         </p:txBody>
@@ -9955,6 +9107,267 @@
           </a:xfrm>
           <a:prstGeom prst="rect">
             <a:avLst/>
+          </a:prstGeom>
+          <a:solidFill>
+            <a:srgbClr val="2266AA"/>
+          </a:solidFill>
+          <a:ln>
+            <a:noFill/>
+          </a:ln>
+        </p:spPr>
+        <p:style>
+          <a:lnRef idx="1">
+            <a:schemeClr val="accent1"/>
+          </a:lnRef>
+          <a:fillRef idx="3">
+            <a:schemeClr val="accent1"/>
+          </a:fillRef>
+          <a:effectRef idx="2">
+            <a:schemeClr val="accent1"/>
+          </a:effectRef>
+          <a:fontRef idx="minor">
+            <a:schemeClr val="lt1"/>
+          </a:fontRef>
+        </p:style>
+        <p:txBody>
+          <a:bodyPr rtlCol="0" anchor="ctr"/>
+          <a:lstStyle/>
+          <a:p>
+            <a:pPr algn="ctr"/>
+          </a:p>
+        </p:txBody>
+      </p:sp>
+      <p:sp>
+        <p:nvSpPr>
+          <p:cNvPr id="4" name="Rounded Rectangle 3"/>
+          <p:cNvSpPr/>
+          <p:nvPr/>
+        </p:nvSpPr>
+        <p:spPr>
+          <a:xfrm>
+            <a:off x="731520" y="1800000"/>
+            <a:ext cx="4800000" cy="2500000"/>
+          </a:xfrm>
+          <a:prstGeom prst="roundRect">
+            <a:avLst>
+              <a:gd name="adj" fmla="val 5000"/>
+            </a:avLst>
+          </a:prstGeom>
+          <a:solidFill>
+            <a:srgbClr val="2266AA"/>
+          </a:solidFill>
+          <a:ln>
+            <a:noFill/>
+          </a:ln>
+        </p:spPr>
+        <p:style>
+          <a:lnRef idx="1">
+            <a:schemeClr val="accent1"/>
+          </a:lnRef>
+          <a:fillRef idx="3">
+            <a:schemeClr val="accent1"/>
+          </a:fillRef>
+          <a:effectRef idx="2">
+            <a:schemeClr val="accent1"/>
+          </a:effectRef>
+          <a:fontRef idx="minor">
+            <a:schemeClr val="lt1"/>
+          </a:fontRef>
+        </p:style>
+        <p:txBody>
+          <a:bodyPr rtlCol="0" anchor="ctr" wrap="square"/>
+          <a:lstStyle/>
+          <a:p>
+            <a:pPr algn="ctr">
+              <a:defRPr sz="1400" b="1">
+                <a:solidFill>
+                  <a:srgbClr val="FFFFFF"/>
+                </a:solidFill>
+              </a:defRPr>
+            </a:pPr>
+          </a:p>
+        </p:txBody>
+      </p:sp>
+      <p:sp>
+        <p:nvSpPr>
+          <p:cNvPr id="5" name="TextBox 4"/>
+          <p:cNvSpPr txBox="1"/>
+          <p:nvPr/>
+        </p:nvSpPr>
+        <p:spPr>
+          <a:xfrm>
+            <a:off x="900000" y="1900000"/>
+            <a:ext cx="4400000" cy="400000"/>
+          </a:xfrm>
+          <a:prstGeom prst="rect">
+            <a:avLst/>
+          </a:prstGeom>
+          <a:noFill/>
+        </p:spPr>
+        <p:txBody>
+          <a:bodyPr wrap="square"/>
+          <a:lstStyle/>
+          <a:p>
+            <a:pPr algn="l">
+              <a:defRPr sz="1800" b="1">
+                <a:solidFill>
+                  <a:srgbClr val="FFFFFF"/>
+                </a:solidFill>
+              </a:defRPr>
+            </a:pPr>
+            <a:r>
+              <a:t>WRITE SIDE (aggregate)</a:t>
+            </a:r>
+          </a:p>
+        </p:txBody>
+      </p:sp>
+      <p:sp>
+        <p:nvSpPr>
+          <p:cNvPr id="6" name="TextBox 5"/>
+          <p:cNvSpPr txBox="1"/>
+          <p:nvPr/>
+        </p:nvSpPr>
+        <p:spPr>
+          <a:xfrm>
+            <a:off x="900000" y="2400000"/>
+            <a:ext cx="4400000" cy="350000"/>
+          </a:xfrm>
+          <a:prstGeom prst="rect">
+            <a:avLst/>
+          </a:prstGeom>
+          <a:noFill/>
+        </p:spPr>
+        <p:txBody>
+          <a:bodyPr wrap="square"/>
+          <a:lstStyle/>
+          <a:p>
+            <a:pPr algn="l">
+              <a:defRPr sz="1400" b="0">
+                <a:solidFill>
+                  <a:srgbClr val="FFFFFF"/>
+                </a:solidFill>
+              </a:defRPr>
+            </a:pPr>
+            <a:r>
+              <a:t>• decide() — validates, produces events</a:t>
+            </a:r>
+          </a:p>
+        </p:txBody>
+      </p:sp>
+      <p:sp>
+        <p:nvSpPr>
+          <p:cNvPr id="7" name="TextBox 6"/>
+          <p:cNvSpPr txBox="1"/>
+          <p:nvPr/>
+        </p:nvSpPr>
+        <p:spPr>
+          <a:xfrm>
+            <a:off x="900000" y="2800000"/>
+            <a:ext cx="4400000" cy="350000"/>
+          </a:xfrm>
+          <a:prstGeom prst="rect">
+            <a:avLst/>
+          </a:prstGeom>
+          <a:noFill/>
+        </p:spPr>
+        <p:txBody>
+          <a:bodyPr wrap="square"/>
+          <a:lstStyle/>
+          <a:p>
+            <a:pPr algn="l">
+              <a:defRPr sz="1400" b="0">
+                <a:solidFill>
+                  <a:srgbClr val="FFFFFF"/>
+                </a:solidFill>
+              </a:defRPr>
+            </a:pPr>
+            <a:r>
+              <a:t>• apply() — state for decisions</a:t>
+            </a:r>
+          </a:p>
+        </p:txBody>
+      </p:sp>
+      <p:sp>
+        <p:nvSpPr>
+          <p:cNvPr id="8" name="TextBox 7"/>
+          <p:cNvSpPr txBox="1"/>
+          <p:nvPr/>
+        </p:nvSpPr>
+        <p:spPr>
+          <a:xfrm>
+            <a:off x="900000" y="3200000"/>
+            <a:ext cx="4400000" cy="350000"/>
+          </a:xfrm>
+          <a:prstGeom prst="rect">
+            <a:avLst/>
+          </a:prstGeom>
+          <a:noFill/>
+        </p:spPr>
+        <p:txBody>
+          <a:bodyPr wrap="square"/>
+          <a:lstStyle/>
+          <a:p>
+            <a:pPr algn="l">
+              <a:defRPr sz="1400" b="0">
+                <a:solidFill>
+                  <a:srgbClr val="FFFFFF"/>
+                </a:solidFill>
+              </a:defRPr>
+            </a:pPr>
+            <a:r>
+              <a:t>• Optimized for consistency</a:t>
+            </a:r>
+          </a:p>
+        </p:txBody>
+      </p:sp>
+      <p:sp>
+        <p:nvSpPr>
+          <p:cNvPr id="9" name="TextBox 8"/>
+          <p:cNvSpPr txBox="1"/>
+          <p:nvPr/>
+        </p:nvSpPr>
+        <p:spPr>
+          <a:xfrm>
+            <a:off x="900000" y="3600000"/>
+            <a:ext cx="4400000" cy="350000"/>
+          </a:xfrm>
+          <a:prstGeom prst="rect">
+            <a:avLst/>
+          </a:prstGeom>
+          <a:noFill/>
+        </p:spPr>
+        <p:txBody>
+          <a:bodyPr wrap="square"/>
+          <a:lstStyle/>
+          <a:p>
+            <a:pPr algn="l">
+              <a:defRPr sz="1400" b="0">
+                <a:solidFill>
+                  <a:srgbClr val="FFFFFF"/>
+                </a:solidFill>
+              </a:defRPr>
+            </a:pPr>
+            <a:r>
+              <a:t>• One entity at a time</a:t>
+            </a:r>
+          </a:p>
+        </p:txBody>
+      </p:sp>
+      <p:sp>
+        <p:nvSpPr>
+          <p:cNvPr id="10" name="Rounded Rectangle 9"/>
+          <p:cNvSpPr/>
+          <p:nvPr/>
+        </p:nvSpPr>
+        <p:spPr>
+          <a:xfrm>
+            <a:off x="6200000" y="1800000"/>
+            <a:ext cx="4800000" cy="2500000"/>
+          </a:xfrm>
+          <a:prstGeom prst="roundRect">
+            <a:avLst>
+              <a:gd name="adj" fmla="val 5000"/>
+            </a:avLst>
           </a:prstGeom>
           <a:solidFill>
             <a:srgbClr val="66BB6A"/>
@@ -9978,241 +9391,16 @@
           </a:fontRef>
         </p:style>
         <p:txBody>
-          <a:bodyPr rtlCol="0" anchor="ctr"/>
-          <a:lstStyle/>
-          <a:p>
-            <a:pPr algn="ctr"/>
-          </a:p>
-        </p:txBody>
-      </p:sp>
-      <p:sp>
-        <p:nvSpPr>
-          <p:cNvPr id="4" name="TextBox 3"/>
-          <p:cNvSpPr txBox="1"/>
-          <p:nvPr/>
-        </p:nvSpPr>
-        <p:spPr>
-          <a:xfrm>
-            <a:off x="731520" y="1600000"/>
-            <a:ext cx="5000000" cy="400000"/>
-          </a:xfrm>
-          <a:prstGeom prst="rect">
-            <a:avLst/>
-          </a:prstGeom>
-          <a:noFill/>
-        </p:spPr>
-        <p:txBody>
-          <a:bodyPr wrap="square"/>
-          <a:lstStyle/>
-          <a:p>
-            <a:pPr algn="l">
-              <a:defRPr sz="2000" b="1">
-                <a:solidFill>
-                  <a:srgbClr val="66BB6A"/>
-                </a:solidFill>
-              </a:defRPr>
-            </a:pPr>
-            <a:r>
-              <a:t>Order (given — study this first)</a:t>
-            </a:r>
-          </a:p>
-        </p:txBody>
-      </p:sp>
-      <p:sp>
-        <p:nvSpPr>
-          <p:cNvPr id="5" name="TextBox 4"/>
-          <p:cNvSpPr txBox="1"/>
-          <p:nvPr/>
-        </p:nvSpPr>
-        <p:spPr>
-          <a:xfrm>
-            <a:off x="731520" y="2100000"/>
-            <a:ext cx="10728655" cy="380000"/>
-          </a:xfrm>
-          <a:prstGeom prst="rect">
-            <a:avLst/>
-          </a:prstGeom>
-          <a:noFill/>
-        </p:spPr>
-        <p:txBody>
-          <a:bodyPr wrap="square"/>
-          <a:lstStyle/>
-          <a:p>
-            <a:pPr algn="l">
-              <a:defRPr sz="1600" b="0">
-                <a:solidFill>
-                  <a:srgbClr val="222222"/>
-                </a:solidFill>
-              </a:defRPr>
-            </a:pPr>
-            <a:r>
-              <a:t>• PlaceOrder → persists OrderPlaced</a:t>
-            </a:r>
-          </a:p>
-        </p:txBody>
-      </p:sp>
-      <p:sp>
-        <p:nvSpPr>
-          <p:cNvPr id="6" name="TextBox 5"/>
-          <p:cNvSpPr txBox="1"/>
-          <p:nvPr/>
-        </p:nvSpPr>
-        <p:spPr>
-          <a:xfrm>
-            <a:off x="731520" y="2480000"/>
-            <a:ext cx="10728655" cy="380000"/>
-          </a:xfrm>
-          <a:prstGeom prst="rect">
-            <a:avLst/>
-          </a:prstGeom>
-          <a:noFill/>
-        </p:spPr>
-        <p:txBody>
-          <a:bodyPr wrap="square"/>
-          <a:lstStyle/>
-          <a:p>
-            <a:pPr algn="l">
-              <a:defRPr sz="1600" b="0">
-                <a:solidFill>
-                  <a:srgbClr val="222222"/>
-                </a:solidFill>
-              </a:defRPr>
-            </a:pPr>
-            <a:r>
-              <a:t>→ tells Payment to Charge</a:t>
-            </a:r>
-          </a:p>
-        </p:txBody>
-      </p:sp>
-      <p:sp>
-        <p:nvSpPr>
-          <p:cNvPr id="7" name="TextBox 6"/>
-          <p:cNvSpPr txBox="1"/>
-          <p:nvPr/>
-        </p:nvSpPr>
-        <p:spPr>
-          <a:xfrm>
-            <a:off x="731520" y="2860000"/>
-            <a:ext cx="10728655" cy="380000"/>
-          </a:xfrm>
-          <a:prstGeom prst="rect">
-            <a:avLst/>
-          </a:prstGeom>
-          <a:noFill/>
-        </p:spPr>
-        <p:txBody>
-          <a:bodyPr wrap="square"/>
-          <a:lstStyle/>
-          <a:p>
-            <a:pPr algn="l">
-              <a:defRPr sz="1600" b="0">
-                <a:solidFill>
-                  <a:srgbClr val="222222"/>
-                </a:solidFill>
-              </a:defRPr>
-            </a:pPr>
-            <a:r>
-              <a:t>→ waits for ConfirmPayment / RejectPayment callback</a:t>
-            </a:r>
-          </a:p>
-        </p:txBody>
-      </p:sp>
-      <p:sp>
-        <p:nvSpPr>
-          <p:cNvPr id="8" name="TextBox 7"/>
-          <p:cNvSpPr txBox="1"/>
-          <p:nvPr/>
-        </p:nvSpPr>
-        <p:spPr>
-          <a:xfrm>
-            <a:off x="731520" y="3400000"/>
-            <a:ext cx="5000000" cy="400000"/>
-          </a:xfrm>
-          <a:prstGeom prst="rect">
-            <a:avLst/>
-          </a:prstGeom>
-          <a:noFill/>
-        </p:spPr>
-        <p:txBody>
-          <a:bodyPr wrap="square"/>
-          <a:lstStyle/>
-          <a:p>
-            <a:pPr algn="l">
-              <a:defRPr sz="2000" b="1">
-                <a:solidFill>
-                  <a:srgbClr val="2266AA"/>
-                </a:solidFill>
-              </a:defRPr>
-            </a:pPr>
-            <a:r>
-              <a:t>Payment (you build)</a:t>
-            </a:r>
-          </a:p>
-        </p:txBody>
-      </p:sp>
-      <p:sp>
-        <p:nvSpPr>
-          <p:cNvPr id="9" name="TextBox 8"/>
-          <p:cNvSpPr txBox="1"/>
-          <p:nvPr/>
-        </p:nvSpPr>
-        <p:spPr>
-          <a:xfrm>
-            <a:off x="731520" y="3900000"/>
-            <a:ext cx="10728655" cy="380000"/>
-          </a:xfrm>
-          <a:prstGeom prst="rect">
-            <a:avLst/>
-          </a:prstGeom>
-          <a:noFill/>
-        </p:spPr>
-        <p:txBody>
-          <a:bodyPr wrap="square"/>
-          <a:lstStyle/>
-          <a:p>
-            <a:pPr algn="l">
-              <a:defRPr sz="1600" b="0">
-                <a:solidFill>
-                  <a:srgbClr val="222222"/>
-                </a:solidFill>
-              </a:defRPr>
-            </a:pPr>
-            <a:r>
-              <a:t>• Charge → persist ChargeRequested → ctx.sync(gateway)</a:t>
-            </a:r>
-          </a:p>
-        </p:txBody>
-      </p:sp>
-      <p:sp>
-        <p:nvSpPr>
-          <p:cNvPr id="10" name="TextBox 9"/>
-          <p:cNvSpPr txBox="1"/>
-          <p:nvPr/>
-        </p:nvSpPr>
-        <p:spPr>
-          <a:xfrm>
-            <a:off x="731520" y="4280000"/>
-            <a:ext cx="10728655" cy="380000"/>
-          </a:xfrm>
-          <a:prstGeom prst="rect">
-            <a:avLst/>
-          </a:prstGeom>
-          <a:noFill/>
-        </p:spPr>
-        <p:txBody>
-          <a:bodyPr wrap="square"/>
-          <a:lstStyle/>
-          <a:p>
-            <a:pPr algn="l">
-              <a:defRPr sz="1600" b="0">
-                <a:solidFill>
-                  <a:srgbClr val="222222"/>
-                </a:solidFill>
-              </a:defRPr>
-            </a:pPr>
-            <a:r>
-              <a:t>• ChargeSucceeded → persist + ctx.tell(Order, ConfirmPayment)</a:t>
-            </a:r>
+          <a:bodyPr rtlCol="0" anchor="ctr" wrap="square"/>
+          <a:lstStyle/>
+          <a:p>
+            <a:pPr algn="ctr">
+              <a:defRPr sz="1400" b="1">
+                <a:solidFill>
+                  <a:srgbClr val="FFFFFF"/>
+                </a:solidFill>
+              </a:defRPr>
+            </a:pPr>
           </a:p>
         </p:txBody>
       </p:sp>
@@ -10224,8 +9412,8 @@
         </p:nvSpPr>
         <p:spPr>
           <a:xfrm>
-            <a:off x="731520" y="4660000"/>
-            <a:ext cx="10728655" cy="380000"/>
+            <a:off x="6400000" y="1900000"/>
+            <a:ext cx="4400000" cy="400000"/>
           </a:xfrm>
           <a:prstGeom prst="rect">
             <a:avLst/>
@@ -10237,14 +9425,14 @@
           <a:lstStyle/>
           <a:p>
             <a:pPr algn="l">
-              <a:defRPr sz="1600" b="0">
-                <a:solidFill>
-                  <a:srgbClr val="222222"/>
-                </a:solidFill>
-              </a:defRPr>
-            </a:pPr>
-            <a:r>
-              <a:t>• ChargeFailed → persist + ctx.tell(Order, RejectPayment)</a:t>
+              <a:defRPr sz="1800" b="1">
+                <a:solidFill>
+                  <a:srgbClr val="FFFFFF"/>
+                </a:solidFill>
+              </a:defRPr>
+            </a:pPr>
+            <a:r>
+              <a:t>READ SIDE (projection)</a:t>
             </a:r>
           </a:p>
         </p:txBody>
@@ -10257,8 +9445,8 @@
         </p:nvSpPr>
         <p:spPr>
           <a:xfrm>
-            <a:off x="731520" y="5040000"/>
-            <a:ext cx="10728655" cy="380000"/>
+            <a:off x="6400000" y="2400000"/>
+            <a:ext cx="4400000" cy="350000"/>
           </a:xfrm>
           <a:prstGeom prst="rect">
             <a:avLst/>
@@ -10270,28 +9458,193 @@
           <a:lstStyle/>
           <a:p>
             <a:pPr algn="l">
-              <a:defRPr sz="1600" b="0">
+              <a:defRPr sz="1400" b="0">
+                <a:solidFill>
+                  <a:srgbClr val="FFFFFF"/>
+                </a:solidFill>
+              </a:defRPr>
+            </a:pPr>
+            <a:r>
+              <a:t>• evolve() — builds query-optimized views</a:t>
+            </a:r>
+          </a:p>
+        </p:txBody>
+      </p:sp>
+      <p:sp>
+        <p:nvSpPr>
+          <p:cNvPr id="13" name="TextBox 12"/>
+          <p:cNvSpPr txBox="1"/>
+          <p:nvPr/>
+        </p:nvSpPr>
+        <p:spPr>
+          <a:xfrm>
+            <a:off x="6400000" y="2800000"/>
+            <a:ext cx="4400000" cy="350000"/>
+          </a:xfrm>
+          <a:prstGeom prst="rect">
+            <a:avLst/>
+          </a:prstGeom>
+          <a:noFill/>
+        </p:spPr>
+        <p:txBody>
+          <a:bodyPr wrap="square"/>
+          <a:lstStyle/>
+          <a:p>
+            <a:pPr algn="l">
+              <a:defRPr sz="1400" b="0">
+                <a:solidFill>
+                  <a:srgbClr val="FFFFFF"/>
+                </a:solidFill>
+              </a:defRPr>
+            </a:pPr>
+            <a:r>
+              <a:t>• Can include derived data (counts, aggregations)</a:t>
+            </a:r>
+          </a:p>
+        </p:txBody>
+      </p:sp>
+      <p:sp>
+        <p:nvSpPr>
+          <p:cNvPr id="14" name="TextBox 13"/>
+          <p:cNvSpPr txBox="1"/>
+          <p:nvPr/>
+        </p:nvSpPr>
+        <p:spPr>
+          <a:xfrm>
+            <a:off x="6400000" y="3200000"/>
+            <a:ext cx="4400000" cy="350000"/>
+          </a:xfrm>
+          <a:prstGeom prst="rect">
+            <a:avLst/>
+          </a:prstGeom>
+          <a:noFill/>
+        </p:spPr>
+        <p:txBody>
+          <a:bodyPr wrap="square"/>
+          <a:lstStyle/>
+          <a:p>
+            <a:pPr algn="l">
+              <a:defRPr sz="1400" b="0">
+                <a:solidFill>
+                  <a:srgbClr val="FFFFFF"/>
+                </a:solidFill>
+              </a:defRPr>
+            </a:pPr>
+            <a:r>
+              <a:t>• Optimized for queries</a:t>
+            </a:r>
+          </a:p>
+        </p:txBody>
+      </p:sp>
+      <p:sp>
+        <p:nvSpPr>
+          <p:cNvPr id="15" name="TextBox 14"/>
+          <p:cNvSpPr txBox="1"/>
+          <p:nvPr/>
+        </p:nvSpPr>
+        <p:spPr>
+          <a:xfrm>
+            <a:off x="6400000" y="3600000"/>
+            <a:ext cx="4400000" cy="350000"/>
+          </a:xfrm>
+          <a:prstGeom prst="rect">
+            <a:avLst/>
+          </a:prstGeom>
+          <a:noFill/>
+        </p:spPr>
+        <p:txBody>
+          <a:bodyPr wrap="square"/>
+          <a:lstStyle/>
+          <a:p>
+            <a:pPr algn="l">
+              <a:defRPr sz="1400" b="0">
+                <a:solidFill>
+                  <a:srgbClr val="FFFFFF"/>
+                </a:solidFill>
+              </a:defRPr>
+            </a:pPr>
+            <a:r>
+              <a:t>• Can span multiple entities</a:t>
+            </a:r>
+          </a:p>
+        </p:txBody>
+      </p:sp>
+      <p:sp>
+        <p:nvSpPr>
+          <p:cNvPr id="16" name="TextBox 15"/>
+          <p:cNvSpPr txBox="1"/>
+          <p:nvPr/>
+        </p:nvSpPr>
+        <p:spPr>
+          <a:xfrm>
+            <a:off x="5100000" y="2700000"/>
+            <a:ext cx="1000000" cy="400000"/>
+          </a:xfrm>
+          <a:prstGeom prst="rect">
+            <a:avLst/>
+          </a:prstGeom>
+          <a:noFill/>
+        </p:spPr>
+        <p:txBody>
+          <a:bodyPr wrap="square"/>
+          <a:lstStyle/>
+          <a:p>
+            <a:pPr algn="ctr">
+              <a:defRPr sz="3600" b="1">
+                <a:solidFill>
+                  <a:srgbClr val="FFA726"/>
+                </a:solidFill>
+              </a:defRPr>
+            </a:pPr>
+            <a:r>
+              <a:t>→</a:t>
+            </a:r>
+          </a:p>
+        </p:txBody>
+      </p:sp>
+      <p:sp>
+        <p:nvSpPr>
+          <p:cNvPr id="17" name="TextBox 16"/>
+          <p:cNvSpPr txBox="1"/>
+          <p:nvPr/>
+        </p:nvSpPr>
+        <p:spPr>
+          <a:xfrm>
+            <a:off x="731520" y="4800000"/>
+            <a:ext cx="10728655" cy="400000"/>
+          </a:xfrm>
+          <a:prstGeom prst="rect">
+            <a:avLst/>
+          </a:prstGeom>
+          <a:noFill/>
+        </p:spPr>
+        <p:txBody>
+          <a:bodyPr wrap="square"/>
+          <a:lstStyle/>
+          <a:p>
+            <a:pPr algn="ctr">
+              <a:defRPr sz="2000" b="1">
                 <a:solidFill>
                   <a:srgbClr val="222222"/>
                 </a:solidFill>
               </a:defRPr>
             </a:pPr>
             <a:r>
-              <a:t>• GetStatus → reply with current status</a:t>
-            </a:r>
-          </a:p>
-        </p:txBody>
-      </p:sp>
-      <p:sp>
-        <p:nvSpPr>
-          <p:cNvPr id="13" name="Rounded Rectangle 12"/>
+              <a:t>Same pattern: pure function, event in → new state out</a:t>
+            </a:r>
+          </a:p>
+        </p:txBody>
+      </p:sp>
+      <p:sp>
+        <p:nvSpPr>
+          <p:cNvPr id="18" name="Rounded Rectangle 17"/>
           <p:cNvSpPr/>
           <p:nvPr/>
         </p:nvSpPr>
         <p:spPr>
           <a:xfrm>
-            <a:off x="731520" y="5600000"/>
-            <a:ext cx="8500000" cy="500000"/>
+            <a:off x="731520" y="5400000"/>
+            <a:ext cx="10728655" cy="600000"/>
           </a:xfrm>
           <a:prstGeom prst="roundRect">
             <a:avLst>
@@ -10332,44 +9685,11 @@
               </a:defRPr>
             </a:pPr>
             <a:r>
-              <a:t>npx vitest run workshop/exercise2-order-payment/payment.test.ts</a:t>
-            </a:r>
-          </a:p>
-        </p:txBody>
-      </p:sp>
-      <p:sp>
-        <p:nvSpPr>
-          <p:cNvPr id="14" name="TextBox 13"/>
-          <p:cNvSpPr txBox="1"/>
-          <p:nvPr/>
-        </p:nvSpPr>
-        <p:spPr>
-          <a:xfrm>
-            <a:off x="9600000" y="5650000"/>
-            <a:ext cx="3000000" cy="500000"/>
-          </a:xfrm>
-          <a:prstGeom prst="rect">
-            <a:avLst/>
-          </a:prstGeom>
-          <a:noFill/>
-        </p:spPr>
-        <p:txBody>
-          <a:bodyPr wrap="square"/>
-          <a:lstStyle/>
-          <a:p>
-            <a:pPr algn="l">
-              <a:defRPr sz="2000" b="1">
-                <a:solidFill>
-                  <a:srgbClr val="66BB6A"/>
-                </a:solidFill>
-              </a:defRPr>
-            </a:pPr>
-            <a:r>
-              <a:t>7 tests: 5 unit</a:t>
+              <a:t>// Write side                          // Read side</a:t>
             </a:r>
             <a:br/>
             <a:r>
-              <a:t>+ 2 integration</a:t>
+              <a:t>apply(state, event) → State           evolve(view, event) → View</a:t>
             </a:r>
           </a:p>
         </p:txBody>
@@ -10484,7 +9804,7 @@
         </p:nvSpPr>
         <p:spPr>
           <a:xfrm>
-            <a:off x="731520" y="1700000"/>
+            <a:off x="731520" y="1600000"/>
             <a:ext cx="700000" cy="700000"/>
           </a:xfrm>
           <a:prstGeom prst="roundRect">
@@ -10518,12 +9838,6 @@
           <a:lstStyle/>
           <a:p>
             <a:pPr algn="ctr">
-              <a:spcBef>
-                <a:spcPts val="0"/>
-              </a:spcBef>
-              <a:spcAft>
-                <a:spcPts val="0"/>
-              </a:spcAft>
               <a:defRPr sz="3200" b="1">
                 <a:solidFill>
                   <a:srgbClr val="FFFFFF"/>
@@ -10544,7 +9858,7 @@
         </p:nvSpPr>
         <p:spPr>
           <a:xfrm>
-            <a:off x="1700000" y="1750000"/>
+            <a:off x="1700000" y="1650000"/>
             <a:ext cx="9000000" cy="400000"/>
           </a:xfrm>
           <a:prstGeom prst="rect">
@@ -10564,7 +9878,7 @@
               </a:defRPr>
             </a:pPr>
             <a:r>
-              <a:t>Model a DDD aggregate</a:t>
+              <a:t>A DDD aggregate</a:t>
             </a:r>
           </a:p>
         </p:txBody>
@@ -10577,7 +9891,7 @@
         </p:nvSpPr>
         <p:spPr>
           <a:xfrm>
-            <a:off x="1700000" y="2100000"/>
+            <a:off x="1700000" y="2000000"/>
             <a:ext cx="9000000" cy="300000"/>
           </a:xfrm>
           <a:prstGeom prst="rect">
@@ -10597,7 +9911,7 @@
               </a:defRPr>
             </a:pPr>
             <a:r>
-              <a:t>with commands, events, state, and invariants</a:t>
+              <a:t>commands, events, state, invariants — pure functions</a:t>
             </a:r>
           </a:p>
         </p:txBody>
@@ -10610,7 +9924,7 @@
         </p:nvSpPr>
         <p:spPr>
           <a:xfrm>
-            <a:off x="731520" y="3200000"/>
+            <a:off x="731520" y="2850000"/>
             <a:ext cx="700000" cy="700000"/>
           </a:xfrm>
           <a:prstGeom prst="roundRect">
@@ -10644,12 +9958,6 @@
           <a:lstStyle/>
           <a:p>
             <a:pPr algn="ctr">
-              <a:spcBef>
-                <a:spcPts val="0"/>
-              </a:spcBef>
-              <a:spcAft>
-                <a:spcPts val="0"/>
-              </a:spcAft>
               <a:defRPr sz="3200" b="1">
                 <a:solidFill>
                   <a:srgbClr val="FFFFFF"/>
@@ -10670,7 +9978,7 @@
         </p:nvSpPr>
         <p:spPr>
           <a:xfrm>
-            <a:off x="1700000" y="3250000"/>
+            <a:off x="1700000" y="2900000"/>
             <a:ext cx="9000000" cy="400000"/>
           </a:xfrm>
           <a:prstGeom prst="rect">
@@ -10690,7 +9998,7 @@
               </a:defRPr>
             </a:pPr>
             <a:r>
-              <a:t>Test it with a dedicated test kit</a:t>
+              <a:t>An HTTP service</a:t>
             </a:r>
           </a:p>
         </p:txBody>
@@ -10703,7 +10011,7 @@
         </p:nvSpPr>
         <p:spPr>
           <a:xfrm>
-            <a:off x="1700000" y="3600000"/>
+            <a:off x="1700000" y="3250000"/>
             <a:ext cx="9000000" cy="300000"/>
           </a:xfrm>
           <a:prstGeom prst="rect">
@@ -10723,7 +10031,7 @@
               </a:defRPr>
             </a:pPr>
             <a:r>
-              <a:t>— 15 tests from red to green</a:t>
+              <a:t>your aggregate becomes a live API in one line</a:t>
             </a:r>
           </a:p>
         </p:txBody>
@@ -10736,7 +10044,7 @@
         </p:nvSpPr>
         <p:spPr>
           <a:xfrm>
-            <a:off x="731520" y="4700000"/>
+            <a:off x="731520" y="4100000"/>
             <a:ext cx="700000" cy="700000"/>
           </a:xfrm>
           <a:prstGeom prst="roundRect">
@@ -10745,7 +10053,7 @@
             </a:avLst>
           </a:prstGeom>
           <a:solidFill>
-            <a:srgbClr val="2266AA"/>
+            <a:srgbClr val="66BB6A"/>
           </a:solidFill>
           <a:ln>
             <a:noFill/>
@@ -10770,12 +10078,6 @@
           <a:lstStyle/>
           <a:p>
             <a:pPr algn="ctr">
-              <a:spcBef>
-                <a:spcPts val="0"/>
-              </a:spcBef>
-              <a:spcAft>
-                <a:spcPts val="0"/>
-              </a:spcAft>
               <a:defRPr sz="3200" b="1">
                 <a:solidFill>
                   <a:srgbClr val="FFFFFF"/>
@@ -10796,7 +10098,7 @@
         </p:nvSpPr>
         <p:spPr>
           <a:xfrm>
-            <a:off x="1700000" y="4750000"/>
+            <a:off x="1700000" y="4150000"/>
             <a:ext cx="9000000" cy="400000"/>
           </a:xfrm>
           <a:prstGeom prst="rect">
@@ -10816,7 +10118,7 @@
               </a:defRPr>
             </a:pPr>
             <a:r>
-              <a:t>Connect two aggregates across boundaries</a:t>
+              <a:t>A read model</a:t>
             </a:r>
           </a:p>
         </p:txBody>
@@ -10829,7 +10131,7 @@
         </p:nvSpPr>
         <p:spPr>
           <a:xfrm>
-            <a:off x="1700000" y="5100000"/>
+            <a:off x="1700000" y="4500000"/>
             <a:ext cx="9000000" cy="300000"/>
           </a:xfrm>
           <a:prstGeom prst="rect">
@@ -10849,7 +10151,127 @@
               </a:defRPr>
             </a:pPr>
             <a:r>
-              <a:t>with ctx.tell() and ctx.sync()</a:t>
+              <a:t>project events into query-optimized views</a:t>
+            </a:r>
+          </a:p>
+        </p:txBody>
+      </p:sp>
+      <p:sp>
+        <p:nvSpPr>
+          <p:cNvPr id="13" name="Rounded Rectangle 12"/>
+          <p:cNvSpPr/>
+          <p:nvPr/>
+        </p:nvSpPr>
+        <p:spPr>
+          <a:xfrm>
+            <a:off x="731520" y="5350000"/>
+            <a:ext cx="700000" cy="700000"/>
+          </a:xfrm>
+          <a:prstGeom prst="roundRect">
+            <a:avLst>
+              <a:gd name="adj" fmla="val 5000"/>
+            </a:avLst>
+          </a:prstGeom>
+          <a:solidFill>
+            <a:srgbClr val="9C27B0"/>
+          </a:solidFill>
+          <a:ln>
+            <a:noFill/>
+          </a:ln>
+        </p:spPr>
+        <p:style>
+          <a:lnRef idx="1">
+            <a:schemeClr val="accent1"/>
+          </a:lnRef>
+          <a:fillRef idx="3">
+            <a:schemeClr val="accent1"/>
+          </a:fillRef>
+          <a:effectRef idx="2">
+            <a:schemeClr val="accent1"/>
+          </a:effectRef>
+          <a:fontRef idx="minor">
+            <a:schemeClr val="lt1"/>
+          </a:fontRef>
+        </p:style>
+        <p:txBody>
+          <a:bodyPr rtlCol="0" anchor="ctr" wrap="square"/>
+          <a:lstStyle/>
+          <a:p>
+            <a:pPr algn="ctr">
+              <a:defRPr sz="3200" b="1">
+                <a:solidFill>
+                  <a:srgbClr val="FFFFFF"/>
+                </a:solidFill>
+              </a:defRPr>
+            </a:pPr>
+            <a:r>
+              <a:t>4</a:t>
+            </a:r>
+          </a:p>
+        </p:txBody>
+      </p:sp>
+      <p:sp>
+        <p:nvSpPr>
+          <p:cNvPr id="14" name="TextBox 13"/>
+          <p:cNvSpPr txBox="1"/>
+          <p:nvPr/>
+        </p:nvSpPr>
+        <p:spPr>
+          <a:xfrm>
+            <a:off x="1700000" y="5400000"/>
+            <a:ext cx="9000000" cy="400000"/>
+          </a:xfrm>
+          <a:prstGeom prst="rect">
+            <a:avLst/>
+          </a:prstGeom>
+          <a:noFill/>
+        </p:spPr>
+        <p:txBody>
+          <a:bodyPr wrap="square"/>
+          <a:lstStyle/>
+          <a:p>
+            <a:pPr algn="l">
+              <a:defRPr sz="2400" b="1">
+                <a:solidFill>
+                  <a:srgbClr val="222222"/>
+                </a:solidFill>
+              </a:defRPr>
+            </a:pPr>
+            <a:r>
+              <a:t>LLM integration</a:t>
+            </a:r>
+          </a:p>
+        </p:txBody>
+      </p:sp>
+      <p:sp>
+        <p:nvSpPr>
+          <p:cNvPr id="15" name="TextBox 14"/>
+          <p:cNvSpPr txBox="1"/>
+          <p:nvPr/>
+        </p:nvSpPr>
+        <p:spPr>
+          <a:xfrm>
+            <a:off x="1700000" y="5750000"/>
+            <a:ext cx="9000000" cy="300000"/>
+          </a:xfrm>
+          <a:prstGeom prst="rect">
+            <a:avLst/>
+          </a:prstGeom>
+          <a:noFill/>
+        </p:spPr>
+        <p:txBody>
+          <a:bodyPr wrap="square"/>
+          <a:lstStyle/>
+          <a:p>
+            <a:pPr algn="l">
+              <a:defRPr sz="1600" b="0">
+                <a:solidFill>
+                  <a:srgbClr val="444444"/>
+                </a:solidFill>
+              </a:defRPr>
+            </a:pPr>
+            <a:r>
+              <a:t>ctx.sync() calls OpenRouter — same pattern as any external API</a:t>
             </a:r>
           </a:p>
         </p:txBody>
@@ -10863,6 +10285,465 @@
 </file>
 
 <file path=ppt/slides/slide20.xml><?xml version="1.0" encoding="utf-8"?>
+<p:sld xmlns:a="http://schemas.openxmlformats.org/drawingml/2006/main" xmlns:p="http://schemas.openxmlformats.org/presentationml/2006/main" xmlns:r="http://schemas.openxmlformats.org/officeDocument/2006/relationships">
+  <p:cSld>
+    <p:bg>
+      <p:bgPr>
+        <a:solidFill>
+          <a:srgbClr val="ECECEC"/>
+        </a:solidFill>
+        <a:effectLst/>
+      </p:bgPr>
+    </p:bg>
+    <p:spTree>
+      <p:nvGrpSpPr>
+        <p:cNvPr id="1" name=""/>
+        <p:cNvGrpSpPr/>
+        <p:nvPr/>
+      </p:nvGrpSpPr>
+      <p:grpSpPr/>
+      <p:sp>
+        <p:nvSpPr>
+          <p:cNvPr id="2" name="TextBox 1"/>
+          <p:cNvSpPr txBox="1"/>
+          <p:nvPr/>
+        </p:nvSpPr>
+        <p:spPr>
+          <a:xfrm>
+            <a:off x="731520" y="548640"/>
+            <a:ext cx="10728655" cy="800000"/>
+          </a:xfrm>
+          <a:prstGeom prst="rect">
+            <a:avLst/>
+          </a:prstGeom>
+          <a:noFill/>
+        </p:spPr>
+        <p:txBody>
+          <a:bodyPr wrap="square"/>
+          <a:lstStyle/>
+          <a:p>
+            <a:pPr algn="l">
+              <a:defRPr sz="3400" b="1">
+                <a:solidFill>
+                  <a:srgbClr val="66BB6A"/>
+                </a:solidFill>
+              </a:defRPr>
+            </a:pPr>
+            <a:r>
+              <a:t>EXERCISE 2: GIFT CARD PROJECTION</a:t>
+            </a:r>
+          </a:p>
+        </p:txBody>
+      </p:sp>
+      <p:sp>
+        <p:nvSpPr>
+          <p:cNvPr id="3" name="Rectangle 2"/>
+          <p:cNvSpPr/>
+          <p:nvPr/>
+        </p:nvSpPr>
+        <p:spPr>
+          <a:xfrm>
+            <a:off x="731520" y="1200000"/>
+            <a:ext cx="10728655" cy="36000"/>
+          </a:xfrm>
+          <a:prstGeom prst="rect">
+            <a:avLst/>
+          </a:prstGeom>
+          <a:solidFill>
+            <a:srgbClr val="66BB6A"/>
+          </a:solidFill>
+          <a:ln>
+            <a:noFill/>
+          </a:ln>
+        </p:spPr>
+        <p:style>
+          <a:lnRef idx="1">
+            <a:schemeClr val="accent1"/>
+          </a:lnRef>
+          <a:fillRef idx="3">
+            <a:schemeClr val="accent1"/>
+          </a:fillRef>
+          <a:effectRef idx="2">
+            <a:schemeClr val="accent1"/>
+          </a:effectRef>
+          <a:fontRef idx="minor">
+            <a:schemeClr val="lt1"/>
+          </a:fontRef>
+        </p:style>
+        <p:txBody>
+          <a:bodyPr rtlCol="0" anchor="ctr"/>
+          <a:lstStyle/>
+          <a:p>
+            <a:pPr algn="ctr"/>
+          </a:p>
+        </p:txBody>
+      </p:sp>
+      <p:sp>
+        <p:nvSpPr>
+          <p:cNvPr id="4" name="TextBox 3"/>
+          <p:cNvSpPr txBox="1"/>
+          <p:nvPr/>
+        </p:nvSpPr>
+        <p:spPr>
+          <a:xfrm>
+            <a:off x="731520" y="1600000"/>
+            <a:ext cx="10728655" cy="400000"/>
+          </a:xfrm>
+          <a:prstGeom prst="rect">
+            <a:avLst/>
+          </a:prstGeom>
+          <a:noFill/>
+        </p:spPr>
+        <p:txBody>
+          <a:bodyPr wrap="square"/>
+          <a:lstStyle/>
+          <a:p>
+            <a:pPr algn="l">
+              <a:defRPr sz="1900" b="0">
+                <a:solidFill>
+                  <a:srgbClr val="444444"/>
+                </a:solidFill>
+              </a:defRPr>
+            </a:pPr>
+            <a:r>
+              <a:t>Build a read model from gift card events:</a:t>
+            </a:r>
+          </a:p>
+        </p:txBody>
+      </p:sp>
+      <p:sp>
+        <p:nvSpPr>
+          <p:cNvPr id="5" name="Rounded Rectangle 4"/>
+          <p:cNvSpPr/>
+          <p:nvPr/>
+        </p:nvSpPr>
+        <p:spPr>
+          <a:xfrm>
+            <a:off x="731520" y="2200000"/>
+            <a:ext cx="6500000" cy="1400000"/>
+          </a:xfrm>
+          <a:prstGeom prst="roundRect">
+            <a:avLst>
+              <a:gd name="adj" fmla="val 2000"/>
+            </a:avLst>
+          </a:prstGeom>
+          <a:solidFill>
+            <a:srgbClr val="2D2D2D"/>
+          </a:solidFill>
+          <a:ln>
+            <a:noFill/>
+          </a:ln>
+        </p:spPr>
+        <p:style>
+          <a:lnRef idx="1">
+            <a:schemeClr val="accent1"/>
+          </a:lnRef>
+          <a:fillRef idx="3">
+            <a:schemeClr val="accent1"/>
+          </a:fillRef>
+          <a:effectRef idx="2">
+            <a:schemeClr val="accent1"/>
+          </a:effectRef>
+          <a:fontRef idx="minor">
+            <a:schemeClr val="lt1"/>
+          </a:fontRef>
+        </p:style>
+        <p:txBody>
+          <a:bodyPr rtlCol="0" anchor="ctr" wrap="square" lIns="203200" tIns="152400" rIns="203200" bIns="152400"/>
+          <a:lstStyle/>
+          <a:p>
+            <a:pPr algn="ctr">
+              <a:defRPr sz="1600">
+                <a:solidFill>
+                  <a:srgbClr val="FFFFFF"/>
+                </a:solidFill>
+                <a:latin typeface="SF Mono"/>
+              </a:defRPr>
+            </a:pPr>
+            <a:r>
+              <a:t>GiftCardView {</a:t>
+            </a:r>
+            <a:br/>
+            <a:r>
+              <a:t>  balance, status, recipientName,</a:t>
+            </a:r>
+            <a:br/>
+            <a:r>
+              <a:t>  encouragement,        // from LLM (demo)</a:t>
+            </a:r>
+            <a:br/>
+            <a:r>
+              <a:t>  transactionCount      // derived — aggregate doesn't track this!</a:t>
+            </a:r>
+            <a:br/>
+            <a:r>
+              <a:t>}</a:t>
+            </a:r>
+          </a:p>
+        </p:txBody>
+      </p:sp>
+      <p:sp>
+        <p:nvSpPr>
+          <p:cNvPr id="6" name="TextBox 5"/>
+          <p:cNvSpPr txBox="1"/>
+          <p:nvPr/>
+        </p:nvSpPr>
+        <p:spPr>
+          <a:xfrm>
+            <a:off x="731520" y="3900000"/>
+            <a:ext cx="6000000" cy="400000"/>
+          </a:xfrm>
+          <a:prstGeom prst="rect">
+            <a:avLst/>
+          </a:prstGeom>
+          <a:noFill/>
+        </p:spPr>
+        <p:txBody>
+          <a:bodyPr wrap="square"/>
+          <a:lstStyle/>
+          <a:p>
+            <a:pPr algn="l">
+              <a:defRPr sz="1800" b="1">
+                <a:solidFill>
+                  <a:srgbClr val="222222"/>
+                </a:solidFill>
+              </a:defRPr>
+            </a:pPr>
+            <a:r>
+              <a:t>Implement evolve() — same pattern as apply():</a:t>
+            </a:r>
+          </a:p>
+        </p:txBody>
+      </p:sp>
+      <p:sp>
+        <p:nvSpPr>
+          <p:cNvPr id="7" name="TextBox 6"/>
+          <p:cNvSpPr txBox="1"/>
+          <p:nvPr/>
+        </p:nvSpPr>
+        <p:spPr>
+          <a:xfrm>
+            <a:off x="731520" y="4400000"/>
+            <a:ext cx="10728655" cy="380000"/>
+          </a:xfrm>
+          <a:prstGeom prst="rect">
+            <a:avLst/>
+          </a:prstGeom>
+          <a:noFill/>
+        </p:spPr>
+        <p:txBody>
+          <a:bodyPr wrap="square"/>
+          <a:lstStyle/>
+          <a:p>
+            <a:pPr algn="l">
+              <a:defRPr sz="1600" b="0">
+                <a:solidFill>
+                  <a:srgbClr val="222222"/>
+                </a:solidFill>
+              </a:defRPr>
+            </a:pPr>
+            <a:r>
+              <a:t>• Issued → set balance, status, recipientName</a:t>
+            </a:r>
+          </a:p>
+        </p:txBody>
+      </p:sp>
+      <p:sp>
+        <p:nvSpPr>
+          <p:cNvPr id="8" name="TextBox 7"/>
+          <p:cNvSpPr txBox="1"/>
+          <p:nvPr/>
+        </p:nvSpPr>
+        <p:spPr>
+          <a:xfrm>
+            <a:off x="731520" y="4780000"/>
+            <a:ext cx="10728655" cy="380000"/>
+          </a:xfrm>
+          <a:prstGeom prst="rect">
+            <a:avLst/>
+          </a:prstGeom>
+          <a:noFill/>
+        </p:spPr>
+        <p:txBody>
+          <a:bodyPr wrap="square"/>
+          <a:lstStyle/>
+          <a:p>
+            <a:pPr algn="l">
+              <a:defRPr sz="1600" b="0">
+                <a:solidFill>
+                  <a:srgbClr val="222222"/>
+                </a:solidFill>
+              </a:defRPr>
+            </a:pPr>
+            <a:r>
+              <a:t>• Redeemed → subtract amount, increment transactionCount</a:t>
+            </a:r>
+          </a:p>
+        </p:txBody>
+      </p:sp>
+      <p:sp>
+        <p:nvSpPr>
+          <p:cNvPr id="9" name="TextBox 8"/>
+          <p:cNvSpPr txBox="1"/>
+          <p:nvPr/>
+        </p:nvSpPr>
+        <p:spPr>
+          <a:xfrm>
+            <a:off x="731520" y="5160000"/>
+            <a:ext cx="10728655" cy="380000"/>
+          </a:xfrm>
+          <a:prstGeom prst="rect">
+            <a:avLst/>
+          </a:prstGeom>
+          <a:noFill/>
+        </p:spPr>
+        <p:txBody>
+          <a:bodyPr wrap="square"/>
+          <a:lstStyle/>
+          <a:p>
+            <a:pPr algn="l">
+              <a:defRPr sz="1600" b="0">
+                <a:solidFill>
+                  <a:srgbClr val="222222"/>
+                </a:solidFill>
+              </a:defRPr>
+            </a:pPr>
+            <a:r>
+              <a:t>• Cancelled → zero balance, set status</a:t>
+            </a:r>
+          </a:p>
+        </p:txBody>
+      </p:sp>
+      <p:sp>
+        <p:nvSpPr>
+          <p:cNvPr id="10" name="TextBox 9"/>
+          <p:cNvSpPr txBox="1"/>
+          <p:nvPr/>
+        </p:nvSpPr>
+        <p:spPr>
+          <a:xfrm>
+            <a:off x="731520" y="5540000"/>
+            <a:ext cx="10728655" cy="380000"/>
+          </a:xfrm>
+          <a:prstGeom prst="rect">
+            <a:avLst/>
+          </a:prstGeom>
+          <a:noFill/>
+        </p:spPr>
+        <p:txBody>
+          <a:bodyPr wrap="square"/>
+          <a:lstStyle/>
+          <a:p>
+            <a:pPr algn="l">
+              <a:defRPr sz="1600" b="0">
+                <a:solidFill>
+                  <a:srgbClr val="222222"/>
+                </a:solidFill>
+              </a:defRPr>
+            </a:pPr>
+            <a:r>
+              <a:t>• EncouragementSet → set encouragement text</a:t>
+            </a:r>
+          </a:p>
+        </p:txBody>
+      </p:sp>
+      <p:sp>
+        <p:nvSpPr>
+          <p:cNvPr id="11" name="Rounded Rectangle 10"/>
+          <p:cNvSpPr/>
+          <p:nvPr/>
+        </p:nvSpPr>
+        <p:spPr>
+          <a:xfrm>
+            <a:off x="731520" y="5900000"/>
+            <a:ext cx="5500000" cy="500000"/>
+          </a:xfrm>
+          <a:prstGeom prst="roundRect">
+            <a:avLst>
+              <a:gd name="adj" fmla="val 2000"/>
+            </a:avLst>
+          </a:prstGeom>
+          <a:solidFill>
+            <a:srgbClr val="2D2D2D"/>
+          </a:solidFill>
+          <a:ln>
+            <a:noFill/>
+          </a:ln>
+        </p:spPr>
+        <p:style>
+          <a:lnRef idx="1">
+            <a:schemeClr val="accent1"/>
+          </a:lnRef>
+          <a:fillRef idx="3">
+            <a:schemeClr val="accent1"/>
+          </a:fillRef>
+          <a:effectRef idx="2">
+            <a:schemeClr val="accent1"/>
+          </a:effectRef>
+          <a:fontRef idx="minor">
+            <a:schemeClr val="lt1"/>
+          </a:fontRef>
+        </p:style>
+        <p:txBody>
+          <a:bodyPr rtlCol="0" anchor="ctr" wrap="square" lIns="203200" tIns="152400" rIns="203200" bIns="152400"/>
+          <a:lstStyle/>
+          <a:p>
+            <a:pPr algn="ctr">
+              <a:defRPr sz="1600">
+                <a:solidFill>
+                  <a:srgbClr val="FFFFFF"/>
+                </a:solidFill>
+                <a:latin typeface="SF Mono"/>
+              </a:defRPr>
+            </a:pPr>
+            <a:r>
+              <a:t>npm run test:projection</a:t>
+            </a:r>
+          </a:p>
+        </p:txBody>
+      </p:sp>
+      <p:sp>
+        <p:nvSpPr>
+          <p:cNvPr id="12" name="TextBox 11"/>
+          <p:cNvSpPr txBox="1"/>
+          <p:nvPr/>
+        </p:nvSpPr>
+        <p:spPr>
+          <a:xfrm>
+            <a:off x="6500000" y="5950000"/>
+            <a:ext cx="5000000" cy="500000"/>
+          </a:xfrm>
+          <a:prstGeom prst="rect">
+            <a:avLst/>
+          </a:prstGeom>
+          <a:noFill/>
+        </p:spPr>
+        <p:txBody>
+          <a:bodyPr wrap="square"/>
+          <a:lstStyle/>
+          <a:p>
+            <a:pPr algn="l">
+              <a:defRPr sz="2200" b="1">
+                <a:solidFill>
+                  <a:srgbClr val="66BB6A"/>
+                </a:solidFill>
+              </a:defRPr>
+            </a:pPr>
+            <a:r>
+              <a:t>8 tests. Make them green.</a:t>
+            </a:r>
+          </a:p>
+        </p:txBody>
+      </p:sp>
+    </p:spTree>
+  </p:cSld>
+  <p:clrMapOvr>
+    <a:masterClrMapping/>
+  </p:clrMapOvr>
+</p:sld>
+</file>
+
+<file path=ppt/slides/slide21.xml><?xml version="1.0" encoding="utf-8"?>
 <p:sld xmlns:a="http://schemas.openxmlformats.org/drawingml/2006/main" xmlns:p="http://schemas.openxmlformats.org/presentationml/2006/main" xmlns:r="http://schemas.openxmlformats.org/officeDocument/2006/relationships">
   <p:cSld>
     <p:bg>
@@ -10901,14 +10782,14 @@
           <a:lstStyle/>
           <a:p>
             <a:pPr algn="ctr">
-              <a:defRPr sz="4400" b="1">
+              <a:defRPr sz="4800" b="1">
                 <a:solidFill>
                   <a:srgbClr val="66BB6A"/>
                 </a:solidFill>
               </a:defRPr>
             </a:pPr>
             <a:r>
-              <a:t>EXERCISE 2: ORDER + PAYMENT</a:t>
+              <a:t>EXERCISE 2: PROJECTION</a:t>
             </a:r>
           </a:p>
         </p:txBody>
@@ -10941,7 +10822,7 @@
               </a:defRPr>
             </a:pPr>
             <a:r>
-              <a:t>35 minutes  •  7 tests  •  implement Payment decide()</a:t>
+              <a:t>20 minutes  •  8 tests  •  implement evolve()</a:t>
             </a:r>
           </a:p>
         </p:txBody>
@@ -10967,7 +10848,7 @@
           <a:lstStyle/>
           <a:p>
             <a:pPr algn="ctr">
-              <a:defRPr sz="1600" b="0">
+              <a:defRPr sz="1800" b="0">
                 <a:solidFill>
                   <a:srgbClr val="66BB6A"/>
                 </a:solidFill>
@@ -10975,7 +10856,7 @@
               </a:defRPr>
             </a:pPr>
             <a:r>
-              <a:t>npx vitest run workshop/exercise2-order-payment/payment.test.ts</a:t>
+              <a:t>npm run test:projection</a:t>
             </a:r>
           </a:p>
         </p:txBody>
@@ -11008,379 +10889,7 @@
               </a:defRPr>
             </a:pPr>
             <a:r>
-              <a:t>Study order.ts first  •  Start with GetStatus  •  HINTS.md if stuck</a:t>
-            </a:r>
-          </a:p>
-        </p:txBody>
-      </p:sp>
-    </p:spTree>
-  </p:cSld>
-  <p:clrMapOvr>
-    <a:masterClrMapping/>
-  </p:clrMapOvr>
-</p:sld>
-</file>
-
-<file path=ppt/slides/slide21.xml><?xml version="1.0" encoding="utf-8"?>
-<p:sld xmlns:a="http://schemas.openxmlformats.org/drawingml/2006/main" xmlns:p="http://schemas.openxmlformats.org/presentationml/2006/main" xmlns:r="http://schemas.openxmlformats.org/officeDocument/2006/relationships">
-  <p:cSld>
-    <p:bg>
-      <p:bgPr>
-        <a:solidFill>
-          <a:srgbClr val="ECECEC"/>
-        </a:solidFill>
-        <a:effectLst/>
-      </p:bgPr>
-    </p:bg>
-    <p:spTree>
-      <p:nvGrpSpPr>
-        <p:cNvPr id="1" name=""/>
-        <p:cNvGrpSpPr/>
-        <p:nvPr/>
-      </p:nvGrpSpPr>
-      <p:grpSpPr/>
-      <p:sp>
-        <p:nvSpPr>
-          <p:cNvPr id="2" name="TextBox 1"/>
-          <p:cNvSpPr txBox="1"/>
-          <p:nvPr/>
-        </p:nvSpPr>
-        <p:spPr>
-          <a:xfrm>
-            <a:off x="731520" y="548640"/>
-            <a:ext cx="10728655" cy="800000"/>
-          </a:xfrm>
-          <a:prstGeom prst="rect">
-            <a:avLst/>
-          </a:prstGeom>
-          <a:noFill/>
-        </p:spPr>
-        <p:txBody>
-          <a:bodyPr wrap="square"/>
-          <a:lstStyle/>
-          <a:p>
-            <a:pPr algn="l">
-              <a:defRPr sz="3600" b="1">
-                <a:solidFill>
-                  <a:srgbClr val="222222"/>
-                </a:solidFill>
-              </a:defRPr>
-            </a:pPr>
-            <a:r>
-              <a:t>EXERCISE 2: DEBRIEF</a:t>
-            </a:r>
-          </a:p>
-        </p:txBody>
-      </p:sp>
-      <p:sp>
-        <p:nvSpPr>
-          <p:cNvPr id="3" name="Rectangle 2"/>
-          <p:cNvSpPr/>
-          <p:nvPr/>
-        </p:nvSpPr>
-        <p:spPr>
-          <a:xfrm>
-            <a:off x="731520" y="1200000"/>
-            <a:ext cx="10728655" cy="36000"/>
-          </a:xfrm>
-          <a:prstGeom prst="rect">
-            <a:avLst/>
-          </a:prstGeom>
-          <a:solidFill>
-            <a:srgbClr val="2266AA"/>
-          </a:solidFill>
-          <a:ln>
-            <a:noFill/>
-          </a:ln>
-        </p:spPr>
-        <p:style>
-          <a:lnRef idx="1">
-            <a:schemeClr val="accent1"/>
-          </a:lnRef>
-          <a:fillRef idx="3">
-            <a:schemeClr val="accent1"/>
-          </a:fillRef>
-          <a:effectRef idx="2">
-            <a:schemeClr val="accent1"/>
-          </a:effectRef>
-          <a:fontRef idx="minor">
-            <a:schemeClr val="lt1"/>
-          </a:fontRef>
-        </p:style>
-        <p:txBody>
-          <a:bodyPr rtlCol="0" anchor="ctr"/>
-          <a:lstStyle/>
-          <a:p>
-            <a:pPr algn="ctr"/>
-          </a:p>
-        </p:txBody>
-      </p:sp>
-      <p:sp>
-        <p:nvSpPr>
-          <p:cNvPr id="4" name="TextBox 3"/>
-          <p:cNvSpPr txBox="1"/>
-          <p:nvPr/>
-        </p:nvSpPr>
-        <p:spPr>
-          <a:xfrm>
-            <a:off x="731520" y="1600000"/>
-            <a:ext cx="10728655" cy="400000"/>
-          </a:xfrm>
-          <a:prstGeom prst="rect">
-            <a:avLst/>
-          </a:prstGeom>
-          <a:noFill/>
-        </p:spPr>
-        <p:txBody>
-          <a:bodyPr wrap="square"/>
-          <a:lstStyle/>
-          <a:p>
-            <a:pPr algn="l">
-              <a:defRPr sz="2000" b="1">
-                <a:solidFill>
-                  <a:srgbClr val="222222"/>
-                </a:solidFill>
-              </a:defRPr>
-            </a:pPr>
-            <a:r>
-              <a:t>What just happened in the integration test:</a:t>
-            </a:r>
-          </a:p>
-        </p:txBody>
-      </p:sp>
-      <p:sp>
-        <p:nvSpPr>
-          <p:cNvPr id="5" name="TextBox 4"/>
-          <p:cNvSpPr txBox="1"/>
-          <p:nvPr/>
-        </p:nvSpPr>
-        <p:spPr>
-          <a:xfrm>
-            <a:off x="731520" y="2200000"/>
-            <a:ext cx="10728655" cy="400000"/>
-          </a:xfrm>
-          <a:prstGeom prst="rect">
-            <a:avLst/>
-          </a:prstGeom>
-          <a:noFill/>
-        </p:spPr>
-        <p:txBody>
-          <a:bodyPr wrap="square"/>
-          <a:lstStyle/>
-          <a:p>
-            <a:pPr algn="l">
-              <a:defRPr sz="1500" b="0">
-                <a:solidFill>
-                  <a:srgbClr val="2266AA"/>
-                </a:solidFill>
-                <a:latin typeface="SF Mono"/>
-              </a:defRPr>
-            </a:pPr>
-            <a:r>
-              <a:t>1.  runtime.ask(order, PlaceOrder)  →  OrderPlaced persisted</a:t>
-            </a:r>
-          </a:p>
-        </p:txBody>
-      </p:sp>
-      <p:sp>
-        <p:nvSpPr>
-          <p:cNvPr id="6" name="TextBox 5"/>
-          <p:cNvSpPr txBox="1"/>
-          <p:nvPr/>
-        </p:nvSpPr>
-        <p:spPr>
-          <a:xfrm>
-            <a:off x="731520" y="2730000"/>
-            <a:ext cx="10728655" cy="400000"/>
-          </a:xfrm>
-          <a:prstGeom prst="rect">
-            <a:avLst/>
-          </a:prstGeom>
-          <a:noFill/>
-        </p:spPr>
-        <p:txBody>
-          <a:bodyPr wrap="square"/>
-          <a:lstStyle/>
-          <a:p>
-            <a:pPr algn="l">
-              <a:defRPr sz="1500" b="0">
-                <a:solidFill>
-                  <a:srgbClr val="66BB6A"/>
-                </a:solidFill>
-                <a:latin typeface="SF Mono"/>
-              </a:defRPr>
-            </a:pPr>
-            <a:r>
-              <a:t>2.  Order.andRun()  →  ctx.tell(Payment, Charge)</a:t>
-            </a:r>
-          </a:p>
-        </p:txBody>
-      </p:sp>
-      <p:sp>
-        <p:nvSpPr>
-          <p:cNvPr id="7" name="TextBox 6"/>
-          <p:cNvSpPr txBox="1"/>
-          <p:nvPr/>
-        </p:nvSpPr>
-        <p:spPr>
-          <a:xfrm>
-            <a:off x="731520" y="3260000"/>
-            <a:ext cx="10728655" cy="400000"/>
-          </a:xfrm>
-          <a:prstGeom prst="rect">
-            <a:avLst/>
-          </a:prstGeom>
-          <a:noFill/>
-        </p:spPr>
-        <p:txBody>
-          <a:bodyPr wrap="square"/>
-          <a:lstStyle/>
-          <a:p>
-            <a:pPr algn="l">
-              <a:defRPr sz="1500" b="0">
-                <a:solidFill>
-                  <a:srgbClr val="2266AA"/>
-                </a:solidFill>
-                <a:latin typeface="SF Mono"/>
-              </a:defRPr>
-            </a:pPr>
-            <a:r>
-              <a:t>3.  Payment.decide(Charge)  →  ChargeRequested persisted  →  ctx.sync(gateway)</a:t>
-            </a:r>
-          </a:p>
-        </p:txBody>
-      </p:sp>
-      <p:sp>
-        <p:nvSpPr>
-          <p:cNvPr id="8" name="TextBox 7"/>
-          <p:cNvSpPr txBox="1"/>
-          <p:nvPr/>
-        </p:nvSpPr>
-        <p:spPr>
-          <a:xfrm>
-            <a:off x="731520" y="3790000"/>
-            <a:ext cx="10728655" cy="400000"/>
-          </a:xfrm>
-          <a:prstGeom prst="rect">
-            <a:avLst/>
-          </a:prstGeom>
-          <a:noFill/>
-        </p:spPr>
-        <p:txBody>
-          <a:bodyPr wrap="square"/>
-          <a:lstStyle/>
-          <a:p>
-            <a:pPr algn="l">
-              <a:defRPr sz="1500" b="0">
-                <a:solidFill>
-                  <a:srgbClr val="66BB6A"/>
-                </a:solidFill>
-                <a:latin typeface="SF Mono"/>
-              </a:defRPr>
-            </a:pPr>
-            <a:r>
-              <a:t>4.  Gateway returns  →  ChargeSucceeded command delivered to Payment</a:t>
-            </a:r>
-          </a:p>
-        </p:txBody>
-      </p:sp>
-      <p:sp>
-        <p:nvSpPr>
-          <p:cNvPr id="9" name="TextBox 8"/>
-          <p:cNvSpPr txBox="1"/>
-          <p:nvPr/>
-        </p:nvSpPr>
-        <p:spPr>
-          <a:xfrm>
-            <a:off x="731520" y="4320000"/>
-            <a:ext cx="10728655" cy="400000"/>
-          </a:xfrm>
-          <a:prstGeom prst="rect">
-            <a:avLst/>
-          </a:prstGeom>
-          <a:noFill/>
-        </p:spPr>
-        <p:txBody>
-          <a:bodyPr wrap="square"/>
-          <a:lstStyle/>
-          <a:p>
-            <a:pPr algn="l">
-              <a:defRPr sz="1500" b="0">
-                <a:solidFill>
-                  <a:srgbClr val="2266AA"/>
-                </a:solidFill>
-                <a:latin typeface="SF Mono"/>
-              </a:defRPr>
-            </a:pPr>
-            <a:r>
-              <a:t>5.  Payment.decide(ChargeSucceeded)  →  ChargeCompleted persisted  →  ctx.tell(Order, ConfirmPayment)</a:t>
-            </a:r>
-          </a:p>
-        </p:txBody>
-      </p:sp>
-      <p:sp>
-        <p:nvSpPr>
-          <p:cNvPr id="10" name="TextBox 9"/>
-          <p:cNvSpPr txBox="1"/>
-          <p:nvPr/>
-        </p:nvSpPr>
-        <p:spPr>
-          <a:xfrm>
-            <a:off x="731520" y="4850000"/>
-            <a:ext cx="10728655" cy="400000"/>
-          </a:xfrm>
-          <a:prstGeom prst="rect">
-            <a:avLst/>
-          </a:prstGeom>
-          <a:noFill/>
-        </p:spPr>
-        <p:txBody>
-          <a:bodyPr wrap="square"/>
-          <a:lstStyle/>
-          <a:p>
-            <a:pPr algn="l">
-              <a:defRPr sz="1500" b="0">
-                <a:solidFill>
-                  <a:srgbClr val="66BB6A"/>
-                </a:solidFill>
-                <a:latin typeface="SF Mono"/>
-              </a:defRPr>
-            </a:pPr>
-            <a:r>
-              <a:t>6.  Order.decide(ConfirmPayment)  →  PaymentConfirmed persisted  →  status: Confirmed</a:t>
-            </a:r>
-          </a:p>
-        </p:txBody>
-      </p:sp>
-      <p:sp>
-        <p:nvSpPr>
-          <p:cNvPr id="11" name="TextBox 10"/>
-          <p:cNvSpPr txBox="1"/>
-          <p:nvPr/>
-        </p:nvSpPr>
-        <p:spPr>
-          <a:xfrm>
-            <a:off x="731520" y="5700000"/>
-            <a:ext cx="10728655" cy="400000"/>
-          </a:xfrm>
-          <a:prstGeom prst="rect">
-            <a:avLst/>
-          </a:prstGeom>
-          <a:noFill/>
-        </p:spPr>
-        <p:txBody>
-          <a:bodyPr wrap="square"/>
-          <a:lstStyle/>
-          <a:p>
-            <a:pPr algn="l">
-              <a:defRPr sz="1700" b="1">
-                <a:solidFill>
-                  <a:srgbClr val="222222"/>
-                </a:solidFill>
-              </a:defRPr>
-            </a:pPr>
-            <a:r>
-              <a:t>Two aggregates, one runtime, full async flow — zero infrastructure code in your domain.</a:t>
+              <a:t>Same pattern as apply()  •  HINTS-projection.md if stuck</a:t>
             </a:r>
           </a:p>
         </p:txBody>
@@ -11439,7 +10948,7 @@
               </a:defRPr>
             </a:pPr>
             <a:r>
-              <a:t>THE FULL PICTURE: BACKEND SERVICE</a:t>
+              <a:t>EXERCISE 2: DEBRIEF</a:t>
             </a:r>
           </a:p>
         </p:txBody>
@@ -11489,22 +10998,55 @@
       </p:sp>
       <p:sp>
         <p:nvSpPr>
-          <p:cNvPr id="4" name="Rounded Rectangle 3"/>
+          <p:cNvPr id="4" name="TextBox 3"/>
+          <p:cNvSpPr txBox="1"/>
+          <p:nvPr/>
+        </p:nvSpPr>
+        <p:spPr>
+          <a:xfrm>
+            <a:off x="731520" y="1600000"/>
+            <a:ext cx="10728655" cy="400000"/>
+          </a:xfrm>
+          <a:prstGeom prst="rect">
+            <a:avLst/>
+          </a:prstGeom>
+          <a:noFill/>
+        </p:spPr>
+        <p:txBody>
+          <a:bodyPr wrap="square"/>
+          <a:lstStyle/>
+          <a:p>
+            <a:pPr algn="l">
+              <a:defRPr sz="2000" b="1">
+                <a:solidFill>
+                  <a:srgbClr val="222222"/>
+                </a:solidFill>
+              </a:defRPr>
+            </a:pPr>
+            <a:r>
+              <a:t>Three pure functions — that's the whole model:</a:t>
+            </a:r>
+          </a:p>
+        </p:txBody>
+      </p:sp>
+      <p:sp>
+        <p:nvSpPr>
+          <p:cNvPr id="5" name="Rounded Rectangle 4"/>
           <p:cNvSpPr/>
           <p:nvPr/>
         </p:nvSpPr>
         <p:spPr>
           <a:xfrm>
-            <a:off x="731520" y="1700000"/>
-            <a:ext cx="2500000" cy="800000"/>
+            <a:off x="731520" y="2200000"/>
+            <a:ext cx="8000000" cy="1000000"/>
           </a:xfrm>
           <a:prstGeom prst="roundRect">
             <a:avLst>
-              <a:gd name="adj" fmla="val 5000"/>
+              <a:gd name="adj" fmla="val 2000"/>
             </a:avLst>
           </a:prstGeom>
           <a:solidFill>
-            <a:srgbClr val="66BB6A"/>
+            <a:srgbClr val="2D2D2D"/>
           </a:solidFill>
           <a:ln>
             <a:noFill/>
@@ -11525,38 +11067,74 @@
           </a:fontRef>
         </p:style>
         <p:txBody>
-          <a:bodyPr rtlCol="0" anchor="ctr" wrap="square"/>
+          <a:bodyPr rtlCol="0" anchor="ctr" wrap="square" lIns="203200" tIns="152400" rIns="203200" bIns="152400"/>
           <a:lstStyle/>
           <a:p>
             <a:pPr algn="ctr">
-              <a:spcBef>
-                <a:spcPts val="0"/>
-              </a:spcBef>
-              <a:spcAft>
-                <a:spcPts val="0"/>
-              </a:spcAft>
+              <a:defRPr sz="1800">
+                <a:solidFill>
+                  <a:srgbClr val="FFFFFF"/>
+                </a:solidFill>
+                <a:latin typeface="SF Mono"/>
+              </a:defRPr>
+            </a:pPr>
+            <a:r>
+              <a:t>decide(state, command)  → Effect     // business logic</a:t>
+            </a:r>
+            <a:br/>
+            <a:r>
+              <a:t>apply(state, event)     → State      // write-side fold</a:t>
+            </a:r>
+            <a:br/>
+            <a:r>
+              <a:t>evolve(view, event)     → View       // read-side fold</a:t>
+            </a:r>
+          </a:p>
+        </p:txBody>
+      </p:sp>
+      <p:sp>
+        <p:nvSpPr>
+          <p:cNvPr id="6" name="TextBox 5"/>
+          <p:cNvSpPr txBox="1"/>
+          <p:nvPr/>
+        </p:nvSpPr>
+        <p:spPr>
+          <a:xfrm>
+            <a:off x="731520" y="3600000"/>
+            <a:ext cx="10728655" cy="400000"/>
+          </a:xfrm>
+          <a:prstGeom prst="rect">
+            <a:avLst/>
+          </a:prstGeom>
+          <a:noFill/>
+        </p:spPr>
+        <p:txBody>
+          <a:bodyPr wrap="square"/>
+          <a:lstStyle/>
+          <a:p>
+            <a:pPr algn="l">
               <a:defRPr sz="1800" b="1">
                 <a:solidFill>
-                  <a:srgbClr val="FFFFFF"/>
-                </a:solidFill>
-              </a:defRPr>
-            </a:pPr>
-            <a:r>
-              <a:t>Your code</a:t>
-            </a:r>
-          </a:p>
-        </p:txBody>
-      </p:sp>
-      <p:sp>
-        <p:nvSpPr>
-          <p:cNvPr id="5" name="TextBox 4"/>
+                  <a:srgbClr val="222222"/>
+                </a:solidFill>
+              </a:defRPr>
+            </a:pPr>
+            <a:r>
+              <a:t>What the projection gave you that the aggregate doesn't:</a:t>
+            </a:r>
+          </a:p>
+        </p:txBody>
+      </p:sp>
+      <p:sp>
+        <p:nvSpPr>
+          <p:cNvPr id="7" name="TextBox 6"/>
           <p:cNvSpPr txBox="1"/>
           <p:nvPr/>
         </p:nvSpPr>
         <p:spPr>
           <a:xfrm>
-            <a:off x="3700000" y="1900000"/>
-            <a:ext cx="8000000" cy="500000"/>
+            <a:off x="731520" y="4100000"/>
+            <a:ext cx="10728655" cy="500000"/>
           </a:xfrm>
           <a:prstGeom prst="rect">
             <a:avLst/>
@@ -11570,86 +11148,26 @@
             <a:pPr algn="l">
               <a:defRPr sz="1700" b="0">
                 <a:solidFill>
-                  <a:srgbClr val="222222"/>
-                </a:solidFill>
-              </a:defRPr>
-            </a:pPr>
-            <a:r>
-              <a:t>Aggregates (decide + apply), Projections, Sagas</a:t>
-            </a:r>
-          </a:p>
-        </p:txBody>
-      </p:sp>
-      <p:sp>
-        <p:nvSpPr>
-          <p:cNvPr id="6" name="Rounded Rectangle 5"/>
-          <p:cNvSpPr/>
-          <p:nvPr/>
-        </p:nvSpPr>
-        <p:spPr>
-          <a:xfrm>
-            <a:off x="731520" y="2800000"/>
-            <a:ext cx="2500000" cy="800000"/>
-          </a:xfrm>
-          <a:prstGeom prst="roundRect">
-            <a:avLst>
-              <a:gd name="adj" fmla="val 5000"/>
-            </a:avLst>
-          </a:prstGeom>
-          <a:solidFill>
-            <a:srgbClr val="2266AA"/>
-          </a:solidFill>
-          <a:ln>
-            <a:noFill/>
-          </a:ln>
-        </p:spPr>
-        <p:style>
-          <a:lnRef idx="1">
-            <a:schemeClr val="accent1"/>
-          </a:lnRef>
-          <a:fillRef idx="3">
-            <a:schemeClr val="accent1"/>
-          </a:fillRef>
-          <a:effectRef idx="2">
-            <a:schemeClr val="accent1"/>
-          </a:effectRef>
-          <a:fontRef idx="minor">
-            <a:schemeClr val="lt1"/>
-          </a:fontRef>
-        </p:style>
-        <p:txBody>
-          <a:bodyPr rtlCol="0" anchor="ctr" wrap="square"/>
-          <a:lstStyle/>
-          <a:p>
-            <a:pPr algn="ctr">
-              <a:spcBef>
-                <a:spcPts val="0"/>
-              </a:spcBef>
-              <a:spcAft>
-                <a:spcPts val="0"/>
-              </a:spcAft>
-              <a:defRPr sz="1800" b="1">
-                <a:solidFill>
-                  <a:srgbClr val="FFFFFF"/>
-                </a:solidFill>
-              </a:defRPr>
-            </a:pPr>
-            <a:r>
-              <a:t>TEOB framework</a:t>
-            </a:r>
-          </a:p>
-        </p:txBody>
-      </p:sp>
-      <p:sp>
-        <p:nvSpPr>
-          <p:cNvPr id="7" name="TextBox 6"/>
+                  <a:srgbClr val="2266AA"/>
+                </a:solidFill>
+              </a:defRPr>
+            </a:pPr>
+            <a:r>
+              <a:t>• transactionCount — derived data, computed from event stream</a:t>
+            </a:r>
+          </a:p>
+        </p:txBody>
+      </p:sp>
+      <p:sp>
+        <p:nvSpPr>
+          <p:cNvPr id="8" name="TextBox 7"/>
           <p:cNvSpPr txBox="1"/>
           <p:nvPr/>
         </p:nvSpPr>
         <p:spPr>
           <a:xfrm>
-            <a:off x="3700000" y="3000000"/>
-            <a:ext cx="8000000" cy="500000"/>
+            <a:off x="731520" y="4600000"/>
+            <a:ext cx="10728655" cy="500000"/>
           </a:xfrm>
           <a:prstGeom prst="rect">
             <a:avLst/>
@@ -11663,72 +11181,12 @@
             <a:pPr algn="l">
               <a:defRPr sz="1700" b="0">
                 <a:solidFill>
-                  <a:srgbClr val="222222"/>
-                </a:solidFill>
-              </a:defRPr>
-            </a:pPr>
-            <a:r>
-              <a:t>Effect system, Runtime, Codecs, TestKit, CLI scaffolding</a:t>
-            </a:r>
-          </a:p>
-        </p:txBody>
-      </p:sp>
-      <p:sp>
-        <p:nvSpPr>
-          <p:cNvPr id="8" name="Rounded Rectangle 7"/>
-          <p:cNvSpPr/>
-          <p:nvPr/>
-        </p:nvSpPr>
-        <p:spPr>
-          <a:xfrm>
-            <a:off x="731520" y="3900000"/>
-            <a:ext cx="2500000" cy="800000"/>
-          </a:xfrm>
-          <a:prstGeom prst="roundRect">
-            <a:avLst>
-              <a:gd name="adj" fmla="val 5000"/>
-            </a:avLst>
-          </a:prstGeom>
-          <a:solidFill>
-            <a:srgbClr val="FFA726"/>
-          </a:solidFill>
-          <a:ln>
-            <a:noFill/>
-          </a:ln>
-        </p:spPr>
-        <p:style>
-          <a:lnRef idx="1">
-            <a:schemeClr val="accent1"/>
-          </a:lnRef>
-          <a:fillRef idx="3">
-            <a:schemeClr val="accent1"/>
-          </a:fillRef>
-          <a:effectRef idx="2">
-            <a:schemeClr val="accent1"/>
-          </a:effectRef>
-          <a:fontRef idx="minor">
-            <a:schemeClr val="lt1"/>
-          </a:fontRef>
-        </p:style>
-        <p:txBody>
-          <a:bodyPr rtlCol="0" anchor="ctr" wrap="square"/>
-          <a:lstStyle/>
-          <a:p>
-            <a:pPr algn="ctr">
-              <a:spcBef>
-                <a:spcPts val="0"/>
-              </a:spcBef>
-              <a:spcAft>
-                <a:spcPts val="0"/>
-              </a:spcAft>
-              <a:defRPr sz="1800" b="1">
-                <a:solidFill>
-                  <a:srgbClr val="FFFFFF"/>
-                </a:solidFill>
-              </a:defRPr>
-            </a:pPr>
-            <a:r>
-              <a:t>Persistence</a:t>
+                  <a:srgbClr val="2266AA"/>
+                </a:solidFill>
+              </a:defRPr>
+            </a:pPr>
+            <a:r>
+              <a:t>• encouragement — data from a different event (LLM callback)</a:t>
             </a:r>
           </a:p>
         </p:txBody>
@@ -11741,8 +11199,8 @@
         </p:nvSpPr>
         <p:spPr>
           <a:xfrm>
-            <a:off x="3700000" y="4100000"/>
-            <a:ext cx="8000000" cy="500000"/>
+            <a:off x="731520" y="5100000"/>
+            <a:ext cx="10728655" cy="500000"/>
           </a:xfrm>
           <a:prstGeom prst="rect">
             <a:avLst/>
@@ -11756,86 +11214,26 @@
             <a:pPr algn="l">
               <a:defRPr sz="1700" b="0">
                 <a:solidFill>
-                  <a:srgbClr val="222222"/>
-                </a:solidFill>
-              </a:defRPr>
-            </a:pPr>
-            <a:r>
-              <a:t>In-memory → SQLite → PostgreSQL (swap without code changes)</a:t>
-            </a:r>
-          </a:p>
-        </p:txBody>
-      </p:sp>
-      <p:sp>
-        <p:nvSpPr>
-          <p:cNvPr id="10" name="Rounded Rectangle 9"/>
-          <p:cNvSpPr/>
-          <p:nvPr/>
-        </p:nvSpPr>
-        <p:spPr>
-          <a:xfrm>
-            <a:off x="731520" y="5000000"/>
-            <a:ext cx="2500000" cy="800000"/>
-          </a:xfrm>
-          <a:prstGeom prst="roundRect">
-            <a:avLst>
-              <a:gd name="adj" fmla="val 5000"/>
-            </a:avLst>
-          </a:prstGeom>
-          <a:solidFill>
-            <a:srgbClr val="888888"/>
-          </a:solidFill>
-          <a:ln>
-            <a:noFill/>
-          </a:ln>
-        </p:spPr>
-        <p:style>
-          <a:lnRef idx="1">
-            <a:schemeClr val="accent1"/>
-          </a:lnRef>
-          <a:fillRef idx="3">
-            <a:schemeClr val="accent1"/>
-          </a:fillRef>
-          <a:effectRef idx="2">
-            <a:schemeClr val="accent1"/>
-          </a:effectRef>
-          <a:fontRef idx="minor">
-            <a:schemeClr val="lt1"/>
-          </a:fontRef>
-        </p:style>
-        <p:txBody>
-          <a:bodyPr rtlCol="0" anchor="ctr" wrap="square"/>
-          <a:lstStyle/>
-          <a:p>
-            <a:pPr algn="ctr">
-              <a:spcBef>
-                <a:spcPts val="0"/>
-              </a:spcBef>
-              <a:spcAft>
-                <a:spcPts val="0"/>
-              </a:spcAft>
-              <a:defRPr sz="1800" b="1">
-                <a:solidFill>
-                  <a:srgbClr val="FFFFFF"/>
-                </a:solidFill>
-              </a:defRPr>
-            </a:pPr>
-            <a:r>
-              <a:t>Infrastructure</a:t>
-            </a:r>
-          </a:p>
-        </p:txBody>
-      </p:sp>
-      <p:sp>
-        <p:nvSpPr>
-          <p:cNvPr id="11" name="TextBox 10"/>
+                  <a:srgbClr val="2266AA"/>
+                </a:solidFill>
+              </a:defRPr>
+            </a:pPr>
+            <a:r>
+              <a:t>• Optimized for queries — flat shape, no business rules</a:t>
+            </a:r>
+          </a:p>
+        </p:txBody>
+      </p:sp>
+      <p:sp>
+        <p:nvSpPr>
+          <p:cNvPr id="10" name="TextBox 9"/>
           <p:cNvSpPr txBox="1"/>
           <p:nvPr/>
         </p:nvSpPr>
         <p:spPr>
           <a:xfrm>
-            <a:off x="3700000" y="5200000"/>
-            <a:ext cx="8000000" cy="500000"/>
+            <a:off x="731520" y="5600000"/>
+            <a:ext cx="10728655" cy="500000"/>
           </a:xfrm>
           <a:prstGeom prst="rect">
             <a:avLst/>
@@ -11849,12 +11247,12 @@
             <a:pPr algn="l">
               <a:defRPr sz="1700" b="0">
                 <a:solidFill>
-                  <a:srgbClr val="222222"/>
-                </a:solidFill>
-              </a:defRPr>
-            </a:pPr>
-            <a:r>
-              <a:t>Health checks, OpenTelemetry, auto-generated REST/OpenAPI</a:t>
+                  <a:srgbClr val="2266AA"/>
+                </a:solidFill>
+              </a:defRPr>
+            </a:pPr>
+            <a:r>
+              <a:t>• Can be rebuilt anytime from the event journal</a:t>
             </a:r>
           </a:p>
         </p:txBody>
@@ -11908,12 +11306,12 @@
             <a:pPr algn="l">
               <a:defRPr sz="3600" b="1">
                 <a:solidFill>
-                  <a:srgbClr val="222222"/>
-                </a:solidFill>
-              </a:defRPr>
-            </a:pPr>
-            <a:r>
-              <a:t>BATTLE TESTED</a:t>
+                  <a:srgbClr val="9C27B0"/>
+                </a:solidFill>
+              </a:defRPr>
+            </a:pPr>
+            <a:r>
+              <a:t>DEMO: LLM INTEGRATION</a:t>
             </a:r>
           </a:p>
         </p:txBody>
@@ -11933,7 +11331,7 @@
             <a:avLst/>
           </a:prstGeom>
           <a:solidFill>
-            <a:srgbClr val="2266AA"/>
+            <a:srgbClr val="9C27B0"/>
           </a:solidFill>
           <a:ln>
             <a:noFill/>
@@ -11969,8 +11367,8 @@
         </p:nvSpPr>
         <p:spPr>
           <a:xfrm>
-            <a:off x="731520" y="1800000"/>
-            <a:ext cx="10728655" cy="900000"/>
+            <a:off x="731520" y="1600000"/>
+            <a:ext cx="10728655" cy="400000"/>
           </a:xfrm>
           <a:prstGeom prst="rect">
             <a:avLst/>
@@ -11982,47 +11380,125 @@
           <a:lstStyle/>
           <a:p>
             <a:pPr algn="l">
-              <a:defRPr sz="2100" b="1">
-                <a:solidFill>
-                  <a:srgbClr val="222222"/>
-                </a:solidFill>
-              </a:defRPr>
-            </a:pPr>
-            <a:r>
-              <a:t>• Natively CQS — for (almost) infinite scaling</a:t>
-            </a:r>
-          </a:p>
-        </p:txBody>
-      </p:sp>
-      <p:sp>
-        <p:nvSpPr>
-          <p:cNvPr id="5" name="TextBox 4"/>
-          <p:cNvSpPr txBox="1"/>
-          <p:nvPr/>
-        </p:nvSpPr>
-        <p:spPr>
-          <a:xfrm>
-            <a:off x="731520" y="2700000"/>
-            <a:ext cx="10728655" cy="900000"/>
-          </a:xfrm>
-          <a:prstGeom prst="rect">
-            <a:avLst/>
-          </a:prstGeom>
-          <a:noFill/>
-        </p:spPr>
-        <p:txBody>
-          <a:bodyPr wrap="square"/>
-          <a:lstStyle/>
-          <a:p>
-            <a:pPr algn="l">
-              <a:defRPr sz="2100" b="1">
-                <a:solidFill>
-                  <a:srgbClr val="222222"/>
-                </a:solidFill>
-              </a:defRPr>
-            </a:pPr>
-            <a:r>
-              <a:t>• FP and DDD — to express intrinsically complex data and rules</a:t>
+              <a:defRPr sz="1800" b="0">
+                <a:solidFill>
+                  <a:srgbClr val="444444"/>
+                </a:solidFill>
+              </a:defRPr>
+            </a:pPr>
+            <a:r>
+              <a:t>When a gift card is issued, ask an LLM to write a personal encouragement:</a:t>
+            </a:r>
+          </a:p>
+        </p:txBody>
+      </p:sp>
+      <p:sp>
+        <p:nvSpPr>
+          <p:cNvPr id="5" name="Rounded Rectangle 4"/>
+          <p:cNvSpPr/>
+          <p:nvPr/>
+        </p:nvSpPr>
+        <p:spPr>
+          <a:xfrm>
+            <a:off x="731520" y="2200000"/>
+            <a:ext cx="9000000" cy="3200000"/>
+          </a:xfrm>
+          <a:prstGeom prst="roundRect">
+            <a:avLst>
+              <a:gd name="adj" fmla="val 2000"/>
+            </a:avLst>
+          </a:prstGeom>
+          <a:solidFill>
+            <a:srgbClr val="2D2D2D"/>
+          </a:solidFill>
+          <a:ln>
+            <a:noFill/>
+          </a:ln>
+        </p:spPr>
+        <p:style>
+          <a:lnRef idx="1">
+            <a:schemeClr val="accent1"/>
+          </a:lnRef>
+          <a:fillRef idx="3">
+            <a:schemeClr val="accent1"/>
+          </a:fillRef>
+          <a:effectRef idx="2">
+            <a:schemeClr val="accent1"/>
+          </a:effectRef>
+          <a:fontRef idx="minor">
+            <a:schemeClr val="lt1"/>
+          </a:fontRef>
+        </p:style>
+        <p:txBody>
+          <a:bodyPr rtlCol="0" anchor="ctr" wrap="square" lIns="203200" tIns="152400" rIns="203200" bIns="152400"/>
+          <a:lstStyle/>
+          <a:p>
+            <a:pPr algn="ctr">
+              <a:defRPr sz="1400">
+                <a:solidFill>
+                  <a:srgbClr val="FFFFFF"/>
+                </a:solidFill>
+                <a:latin typeface="SF Mono"/>
+              </a:defRPr>
+            </a:pPr>
+            <a:r>
+              <a:t>case "Issue": {</a:t>
+            </a:r>
+            <a:br/>
+            <a:r>
+              <a:t>  return andReply(</a:t>
+            </a:r>
+            <a:br/>
+            <a:r>
+              <a:t>    andRun(</a:t>
+            </a:r>
+            <a:br/>
+            <a:r>
+              <a:t>      persist({ tag: "Issued", ... }),</a:t>
+            </a:r>
+            <a:br/>
+            <a:r>
+              <a:t>      async () =&gt; {</a:t>
+            </a:r>
+            <a:br/>
+            <a:r>
+              <a:t>        await ctx.sync({                        // ← same pattern!</a:t>
+            </a:r>
+            <a:br/>
+            <a:r>
+              <a:t>          effect: () =&gt; generateEncouragement(name, amount),</a:t>
+            </a:r>
+            <a:br/>
+            <a:r>
+              <a:t>          onSuccess: (r) =&gt; ({ tag: "SetEncouragement", text: r.text }),</a:t>
+            </a:r>
+            <a:br/>
+            <a:r>
+              <a:t>          onFailure: (_) =&gt; ({ tag: "SetEncouragement", text: fallback }),</a:t>
+            </a:r>
+            <a:br/>
+            <a:r>
+              <a:t>        });</a:t>
+            </a:r>
+            <a:br/>
+            <a:r>
+              <a:t>      },</a:t>
+            </a:r>
+            <a:br/>
+            <a:r>
+              <a:t>    ),</a:t>
+            </a:r>
+            <a:br/>
+            <a:r>
+              <a:t>    { tag: "Ok" },</a:t>
+            </a:r>
+            <a:br/>
+            <a:r>
+              <a:t>  );</a:t>
+            </a:r>
+            <a:br/>
+            <a:r>
+              <a:t>}</a:t>
             </a:r>
           </a:p>
         </p:txBody>
@@ -12035,8 +11511,8 @@
         </p:nvSpPr>
         <p:spPr>
           <a:xfrm>
-            <a:off x="731520" y="3600000"/>
-            <a:ext cx="10728655" cy="900000"/>
+            <a:off x="731520" y="5700000"/>
+            <a:ext cx="10728655" cy="400000"/>
           </a:xfrm>
           <a:prstGeom prst="rect">
             <a:avLst/>
@@ -12048,47 +11524,14 @@
           <a:lstStyle/>
           <a:p>
             <a:pPr algn="l">
-              <a:defRPr sz="2100" b="1">
-                <a:solidFill>
-                  <a:srgbClr val="222222"/>
-                </a:solidFill>
-              </a:defRPr>
-            </a:pPr>
-            <a:r>
-              <a:t>• Everything is executed deterministically</a:t>
-            </a:r>
-          </a:p>
-        </p:txBody>
-      </p:sp>
-      <p:sp>
-        <p:nvSpPr>
-          <p:cNvPr id="7" name="TextBox 6"/>
-          <p:cNvSpPr txBox="1"/>
-          <p:nvPr/>
-        </p:nvSpPr>
-        <p:spPr>
-          <a:xfrm>
-            <a:off x="731520" y="4500000"/>
-            <a:ext cx="10728655" cy="900000"/>
-          </a:xfrm>
-          <a:prstGeom prst="rect">
-            <a:avLst/>
-          </a:prstGeom>
-          <a:noFill/>
-        </p:spPr>
-        <p:txBody>
-          <a:bodyPr wrap="square"/>
-          <a:lstStyle/>
-          <a:p>
-            <a:pPr algn="l">
-              <a:defRPr sz="2100" b="1">
-                <a:solidFill>
-                  <a:srgbClr val="222222"/>
-                </a:solidFill>
-              </a:defRPr>
-            </a:pPr>
-            <a:r>
-              <a:t>• 10+ years of real production (fintech) experience</a:t>
+              <a:defRPr sz="1600" b="1">
+                <a:solidFill>
+                  <a:srgbClr val="9C27B0"/>
+                </a:solidFill>
+              </a:defRPr>
+            </a:pPr>
+            <a:r>
+              <a:t>ctx.sync() — same pattern for LLM, payment gateway, shipping API. Event sourcing gives you retry, replay, audit — for free.</a:t>
             </a:r>
           </a:p>
         </p:txBody>
@@ -12147,7 +11590,7 @@
               </a:defRPr>
             </a:pPr>
             <a:r>
-              <a:t>DSL- AND AI-FRIENDLY</a:t>
+              <a:t>THE FULL PICTURE</a:t>
             </a:r>
           </a:p>
         </p:txBody>
@@ -12197,33 +11640,54 @@
       </p:sp>
       <p:sp>
         <p:nvSpPr>
-          <p:cNvPr id="4" name="TextBox 3"/>
-          <p:cNvSpPr txBox="1"/>
-          <p:nvPr/>
-        </p:nvSpPr>
-        <p:spPr>
-          <a:xfrm>
-            <a:off x="731520" y="1800000"/>
-            <a:ext cx="10728655" cy="700000"/>
-          </a:xfrm>
-          <a:prstGeom prst="rect">
-            <a:avLst/>
-          </a:prstGeom>
-          <a:noFill/>
-        </p:spPr>
-        <p:txBody>
-          <a:bodyPr wrap="square"/>
-          <a:lstStyle/>
-          <a:p>
-            <a:pPr algn="l">
-              <a:defRPr sz="1900" b="0">
-                <a:solidFill>
-                  <a:srgbClr val="222222"/>
-                </a:solidFill>
-              </a:defRPr>
-            </a:pPr>
-            <a:r>
-              <a:t>• Native DSLs built on top (e.g. Petri Net flow modeling)</a:t>
+          <p:cNvPr id="4" name="Rounded Rectangle 3"/>
+          <p:cNvSpPr/>
+          <p:nvPr/>
+        </p:nvSpPr>
+        <p:spPr>
+          <a:xfrm>
+            <a:off x="731520" y="1700000"/>
+            <a:ext cx="2500000" cy="800000"/>
+          </a:xfrm>
+          <a:prstGeom prst="roundRect">
+            <a:avLst>
+              <a:gd name="adj" fmla="val 5000"/>
+            </a:avLst>
+          </a:prstGeom>
+          <a:solidFill>
+            <a:srgbClr val="66BB6A"/>
+          </a:solidFill>
+          <a:ln>
+            <a:noFill/>
+          </a:ln>
+        </p:spPr>
+        <p:style>
+          <a:lnRef idx="1">
+            <a:schemeClr val="accent1"/>
+          </a:lnRef>
+          <a:fillRef idx="3">
+            <a:schemeClr val="accent1"/>
+          </a:fillRef>
+          <a:effectRef idx="2">
+            <a:schemeClr val="accent1"/>
+          </a:effectRef>
+          <a:fontRef idx="minor">
+            <a:schemeClr val="lt1"/>
+          </a:fontRef>
+        </p:style>
+        <p:txBody>
+          <a:bodyPr rtlCol="0" anchor="ctr" wrap="square"/>
+          <a:lstStyle/>
+          <a:p>
+            <a:pPr algn="ctr">
+              <a:defRPr sz="1800" b="1">
+                <a:solidFill>
+                  <a:srgbClr val="FFFFFF"/>
+                </a:solidFill>
+              </a:defRPr>
+            </a:pPr>
+            <a:r>
+              <a:t>Your code</a:t>
             </a:r>
           </a:p>
         </p:txBody>
@@ -12236,8 +11700,8 @@
         </p:nvSpPr>
         <p:spPr>
           <a:xfrm>
-            <a:off x="731520" y="2500000"/>
-            <a:ext cx="10728655" cy="700000"/>
+            <a:off x="3700000" y="1900000"/>
+            <a:ext cx="8000000" cy="500000"/>
           </a:xfrm>
           <a:prstGeom prst="rect">
             <a:avLst/>
@@ -12249,47 +11713,68 @@
           <a:lstStyle/>
           <a:p>
             <a:pPr algn="l">
-              <a:defRPr sz="1900" b="0">
+              <a:defRPr sz="1700" b="0">
                 <a:solidFill>
                   <a:srgbClr val="222222"/>
                 </a:solidFill>
               </a:defRPr>
             </a:pPr>
             <a:r>
-              <a:t>• Pure, concise, testable logics — ideal for AI code generation</a:t>
-            </a:r>
-          </a:p>
-        </p:txBody>
-      </p:sp>
-      <p:sp>
-        <p:nvSpPr>
-          <p:cNvPr id="6" name="TextBox 5"/>
-          <p:cNvSpPr txBox="1"/>
-          <p:nvPr/>
-        </p:nvSpPr>
-        <p:spPr>
-          <a:xfrm>
-            <a:off x="731520" y="3200000"/>
-            <a:ext cx="10728655" cy="700000"/>
-          </a:xfrm>
-          <a:prstGeom prst="rect">
-            <a:avLst/>
-          </a:prstGeom>
-          <a:noFill/>
-        </p:spPr>
-        <p:txBody>
-          <a:bodyPr wrap="square"/>
-          <a:lstStyle/>
-          <a:p>
-            <a:pPr algn="l">
-              <a:defRPr sz="1900" b="0">
-                <a:solidFill>
-                  <a:srgbClr val="222222"/>
-                </a:solidFill>
-              </a:defRPr>
-            </a:pPr>
-            <a:r>
-              <a:t>• Zero boilerplate, no ORM</a:t>
+              <a:t>Aggregates, Projections, Sagas — pure functions</a:t>
+            </a:r>
+          </a:p>
+        </p:txBody>
+      </p:sp>
+      <p:sp>
+        <p:nvSpPr>
+          <p:cNvPr id="6" name="Rounded Rectangle 5"/>
+          <p:cNvSpPr/>
+          <p:nvPr/>
+        </p:nvSpPr>
+        <p:spPr>
+          <a:xfrm>
+            <a:off x="731520" y="2800000"/>
+            <a:ext cx="2500000" cy="800000"/>
+          </a:xfrm>
+          <a:prstGeom prst="roundRect">
+            <a:avLst>
+              <a:gd name="adj" fmla="val 5000"/>
+            </a:avLst>
+          </a:prstGeom>
+          <a:solidFill>
+            <a:srgbClr val="2266AA"/>
+          </a:solidFill>
+          <a:ln>
+            <a:noFill/>
+          </a:ln>
+        </p:spPr>
+        <p:style>
+          <a:lnRef idx="1">
+            <a:schemeClr val="accent1"/>
+          </a:lnRef>
+          <a:fillRef idx="3">
+            <a:schemeClr val="accent1"/>
+          </a:fillRef>
+          <a:effectRef idx="2">
+            <a:schemeClr val="accent1"/>
+          </a:effectRef>
+          <a:fontRef idx="minor">
+            <a:schemeClr val="lt1"/>
+          </a:fontRef>
+        </p:style>
+        <p:txBody>
+          <a:bodyPr rtlCol="0" anchor="ctr" wrap="square"/>
+          <a:lstStyle/>
+          <a:p>
+            <a:pPr algn="ctr">
+              <a:defRPr sz="1800" b="1">
+                <a:solidFill>
+                  <a:srgbClr val="FFFFFF"/>
+                </a:solidFill>
+              </a:defRPr>
+            </a:pPr>
+            <a:r>
+              <a:t>TEOB framework</a:t>
             </a:r>
           </a:p>
         </p:txBody>
@@ -12302,8 +11787,95 @@
         </p:nvSpPr>
         <p:spPr>
           <a:xfrm>
+            <a:off x="3700000" y="3000000"/>
+            <a:ext cx="8000000" cy="500000"/>
+          </a:xfrm>
+          <a:prstGeom prst="rect">
+            <a:avLst/>
+          </a:prstGeom>
+          <a:noFill/>
+        </p:spPr>
+        <p:txBody>
+          <a:bodyPr wrap="square"/>
+          <a:lstStyle/>
+          <a:p>
+            <a:pPr algn="l">
+              <a:defRPr sz="1700" b="0">
+                <a:solidFill>
+                  <a:srgbClr val="222222"/>
+                </a:solidFill>
+              </a:defRPr>
+            </a:pPr>
+            <a:r>
+              <a:t>Effect system, Runtime, Codecs, TestKit, HTTP routes</a:t>
+            </a:r>
+          </a:p>
+        </p:txBody>
+      </p:sp>
+      <p:sp>
+        <p:nvSpPr>
+          <p:cNvPr id="8" name="Rounded Rectangle 7"/>
+          <p:cNvSpPr/>
+          <p:nvPr/>
+        </p:nvSpPr>
+        <p:spPr>
+          <a:xfrm>
             <a:off x="731520" y="3900000"/>
-            <a:ext cx="10728655" cy="700000"/>
+            <a:ext cx="2500000" cy="800000"/>
+          </a:xfrm>
+          <a:prstGeom prst="roundRect">
+            <a:avLst>
+              <a:gd name="adj" fmla="val 5000"/>
+            </a:avLst>
+          </a:prstGeom>
+          <a:solidFill>
+            <a:srgbClr val="FFA726"/>
+          </a:solidFill>
+          <a:ln>
+            <a:noFill/>
+          </a:ln>
+        </p:spPr>
+        <p:style>
+          <a:lnRef idx="1">
+            <a:schemeClr val="accent1"/>
+          </a:lnRef>
+          <a:fillRef idx="3">
+            <a:schemeClr val="accent1"/>
+          </a:fillRef>
+          <a:effectRef idx="2">
+            <a:schemeClr val="accent1"/>
+          </a:effectRef>
+          <a:fontRef idx="minor">
+            <a:schemeClr val="lt1"/>
+          </a:fontRef>
+        </p:style>
+        <p:txBody>
+          <a:bodyPr rtlCol="0" anchor="ctr" wrap="square"/>
+          <a:lstStyle/>
+          <a:p>
+            <a:pPr algn="ctr">
+              <a:defRPr sz="1800" b="1">
+                <a:solidFill>
+                  <a:srgbClr val="FFFFFF"/>
+                </a:solidFill>
+              </a:defRPr>
+            </a:pPr>
+            <a:r>
+              <a:t>Persistence</a:t>
+            </a:r>
+          </a:p>
+        </p:txBody>
+      </p:sp>
+      <p:sp>
+        <p:nvSpPr>
+          <p:cNvPr id="9" name="TextBox 8"/>
+          <p:cNvSpPr txBox="1"/>
+          <p:nvPr/>
+        </p:nvSpPr>
+        <p:spPr>
+          <a:xfrm>
+            <a:off x="3700000" y="4100000"/>
+            <a:ext cx="8000000" cy="500000"/>
           </a:xfrm>
           <a:prstGeom prst="rect">
             <a:avLst/>
@@ -12315,28 +11887,82 @@
           <a:lstStyle/>
           <a:p>
             <a:pPr algn="l">
-              <a:defRPr sz="1900" b="0">
+              <a:defRPr sz="1700" b="0">
                 <a:solidFill>
                   <a:srgbClr val="222222"/>
                 </a:solidFill>
               </a:defRPr>
             </a:pPr>
             <a:r>
-              <a:t>• Small, manageable contexts digestible by LLMs</a:t>
-            </a:r>
-          </a:p>
-        </p:txBody>
-      </p:sp>
-      <p:sp>
-        <p:nvSpPr>
-          <p:cNvPr id="8" name="TextBox 7"/>
+              <a:t>In-memory → SQLite → PostgreSQL (zero code changes)</a:t>
+            </a:r>
+          </a:p>
+        </p:txBody>
+      </p:sp>
+      <p:sp>
+        <p:nvSpPr>
+          <p:cNvPr id="10" name="Rounded Rectangle 9"/>
+          <p:cNvSpPr/>
+          <p:nvPr/>
+        </p:nvSpPr>
+        <p:spPr>
+          <a:xfrm>
+            <a:off x="731520" y="5000000"/>
+            <a:ext cx="2500000" cy="800000"/>
+          </a:xfrm>
+          <a:prstGeom prst="roundRect">
+            <a:avLst>
+              <a:gd name="adj" fmla="val 5000"/>
+            </a:avLst>
+          </a:prstGeom>
+          <a:solidFill>
+            <a:srgbClr val="888888"/>
+          </a:solidFill>
+          <a:ln>
+            <a:noFill/>
+          </a:ln>
+        </p:spPr>
+        <p:style>
+          <a:lnRef idx="1">
+            <a:schemeClr val="accent1"/>
+          </a:lnRef>
+          <a:fillRef idx="3">
+            <a:schemeClr val="accent1"/>
+          </a:fillRef>
+          <a:effectRef idx="2">
+            <a:schemeClr val="accent1"/>
+          </a:effectRef>
+          <a:fontRef idx="minor">
+            <a:schemeClr val="lt1"/>
+          </a:fontRef>
+        </p:style>
+        <p:txBody>
+          <a:bodyPr rtlCol="0" anchor="ctr" wrap="square"/>
+          <a:lstStyle/>
+          <a:p>
+            <a:pPr algn="ctr">
+              <a:defRPr sz="1800" b="1">
+                <a:solidFill>
+                  <a:srgbClr val="FFFFFF"/>
+                </a:solidFill>
+              </a:defRPr>
+            </a:pPr>
+            <a:r>
+              <a:t>Infrastructure</a:t>
+            </a:r>
+          </a:p>
+        </p:txBody>
+      </p:sp>
+      <p:sp>
+        <p:nvSpPr>
+          <p:cNvPr id="11" name="TextBox 10"/>
           <p:cNvSpPr txBox="1"/>
           <p:nvPr/>
         </p:nvSpPr>
         <p:spPr>
           <a:xfrm>
-            <a:off x="731520" y="4600000"/>
-            <a:ext cx="10728655" cy="700000"/>
+            <a:off x="3700000" y="5200000"/>
+            <a:ext cx="8000000" cy="500000"/>
           </a:xfrm>
           <a:prstGeom prst="rect">
             <a:avLst/>
@@ -12348,14 +11974,14 @@
           <a:lstStyle/>
           <a:p>
             <a:pPr algn="l">
-              <a:defRPr sz="1900" b="0">
+              <a:defRPr sz="1700" b="0">
                 <a:solidFill>
                   <a:srgbClr val="222222"/>
                 </a:solidFill>
               </a:defRPr>
             </a:pPr>
             <a:r>
-              <a:t>• CLI scaffolding: teob new aggregate / projection / flow</a:t>
+              <a:t>Health checks, OpenTelemetry, OpenAPI generation</a:t>
             </a:r>
           </a:p>
         </p:txBody>
@@ -12414,7 +12040,7 @@
               </a:defRPr>
             </a:pPr>
             <a:r>
-              <a:t>TEOB AGENTIC PLATFORM</a:t>
+              <a:t>BATTLE TESTED</a:t>
             </a:r>
           </a:p>
         </p:txBody>
@@ -12470,8 +12096,8 @@
         </p:nvSpPr>
         <p:spPr>
           <a:xfrm>
-            <a:off x="731520" y="1700000"/>
-            <a:ext cx="10728655" cy="500000"/>
+            <a:off x="731520" y="1800000"/>
+            <a:ext cx="10728655" cy="900000"/>
           </a:xfrm>
           <a:prstGeom prst="rect">
             <a:avLst/>
@@ -12483,14 +12109,14 @@
           <a:lstStyle/>
           <a:p>
             <a:pPr algn="l">
-              <a:defRPr sz="2200" b="0">
-                <a:solidFill>
-                  <a:srgbClr val="444444"/>
-                </a:solidFill>
-              </a:defRPr>
-            </a:pPr>
-            <a:r>
-              <a:t>What happens when your aggregate IS an AI agent?</a:t>
+              <a:defRPr sz="2100" b="1">
+                <a:solidFill>
+                  <a:srgbClr val="222222"/>
+                </a:solidFill>
+              </a:defRPr>
+            </a:pPr>
+            <a:r>
+              <a:t>• Natively CQS — for (almost) infinite scaling</a:t>
             </a:r>
           </a:p>
         </p:txBody>
@@ -12503,8 +12129,8 @@
         </p:nvSpPr>
         <p:spPr>
           <a:xfrm>
-            <a:off x="731520" y="2500000"/>
-            <a:ext cx="10728655" cy="650000"/>
+            <a:off x="731520" y="2700000"/>
+            <a:ext cx="10728655" cy="900000"/>
           </a:xfrm>
           <a:prstGeom prst="rect">
             <a:avLst/>
@@ -12516,14 +12142,14 @@
           <a:lstStyle/>
           <a:p>
             <a:pPr algn="l">
-              <a:defRPr sz="1800" b="0">
+              <a:defRPr sz="2100" b="1">
                 <a:solidFill>
                   <a:srgbClr val="222222"/>
                 </a:solidFill>
               </a:defRPr>
             </a:pPr>
             <a:r>
-              <a:t>• LLM integration — OpenAI, OpenRouter, any provider</a:t>
+              <a:t>• FP and DDD — to express intrinsically complex data and rules</a:t>
             </a:r>
           </a:p>
         </p:txBody>
@@ -12536,8 +12162,8 @@
         </p:nvSpPr>
         <p:spPr>
           <a:xfrm>
-            <a:off x="731520" y="3150000"/>
-            <a:ext cx="10728655" cy="650000"/>
+            <a:off x="731520" y="3600000"/>
+            <a:ext cx="10728655" cy="900000"/>
           </a:xfrm>
           <a:prstGeom prst="rect">
             <a:avLst/>
@@ -12549,14 +12175,14 @@
           <a:lstStyle/>
           <a:p>
             <a:pPr algn="l">
-              <a:defRPr sz="1800" b="0">
+              <a:defRPr sz="2100" b="1">
                 <a:solidFill>
                   <a:srgbClr val="222222"/>
                 </a:solidFill>
               </a:defRPr>
             </a:pPr>
             <a:r>
-              <a:t>• MCP tool registry with permission model</a:t>
+              <a:t>• Everything is executed deterministically</a:t>
             </a:r>
           </a:p>
         </p:txBody>
@@ -12569,8 +12195,8 @@
         </p:nvSpPr>
         <p:spPr>
           <a:xfrm>
-            <a:off x="731520" y="3800000"/>
-            <a:ext cx="10728655" cy="650000"/>
+            <a:off x="731520" y="4500000"/>
+            <a:ext cx="10728655" cy="900000"/>
           </a:xfrm>
           <a:prstGeom prst="rect">
             <a:avLst/>
@@ -12582,80 +12208,14 @@
           <a:lstStyle/>
           <a:p>
             <a:pPr algn="l">
-              <a:defRPr sz="1800" b="0">
+              <a:defRPr sz="2100" b="1">
                 <a:solidFill>
                   <a:srgbClr val="222222"/>
                 </a:solidFill>
               </a:defRPr>
             </a:pPr>
             <a:r>
-              <a:t>• RAG knowledge search (pgvector)</a:t>
-            </a:r>
-          </a:p>
-        </p:txBody>
-      </p:sp>
-      <p:sp>
-        <p:nvSpPr>
-          <p:cNvPr id="8" name="TextBox 7"/>
-          <p:cNvSpPr txBox="1"/>
-          <p:nvPr/>
-        </p:nvSpPr>
-        <p:spPr>
-          <a:xfrm>
-            <a:off x="731520" y="4450000"/>
-            <a:ext cx="10728655" cy="650000"/>
-          </a:xfrm>
-          <a:prstGeom prst="rect">
-            <a:avLst/>
-          </a:prstGeom>
-          <a:noFill/>
-        </p:spPr>
-        <p:txBody>
-          <a:bodyPr wrap="square"/>
-          <a:lstStyle/>
-          <a:p>
-            <a:pPr algn="l">
-              <a:defRPr sz="1800" b="0">
-                <a:solidFill>
-                  <a:srgbClr val="222222"/>
-                </a:solidFill>
-              </a:defRPr>
-            </a:pPr>
-            <a:r>
-              <a:t>• Cross-session agent memory (event-sourced, naturally)</a:t>
-            </a:r>
-          </a:p>
-        </p:txBody>
-      </p:sp>
-      <p:sp>
-        <p:nvSpPr>
-          <p:cNvPr id="9" name="TextBox 8"/>
-          <p:cNvSpPr txBox="1"/>
-          <p:nvPr/>
-        </p:nvSpPr>
-        <p:spPr>
-          <a:xfrm>
-            <a:off x="731520" y="5100000"/>
-            <a:ext cx="10728655" cy="650000"/>
-          </a:xfrm>
-          <a:prstGeom prst="rect">
-            <a:avLst/>
-          </a:prstGeom>
-          <a:noFill/>
-        </p:spPr>
-        <p:txBody>
-          <a:bodyPr wrap="square"/>
-          <a:lstStyle/>
-          <a:p>
-            <a:pPr algn="l">
-              <a:defRPr sz="1800" b="0">
-                <a:solidFill>
-                  <a:srgbClr val="222222"/>
-                </a:solidFill>
-              </a:defRPr>
-            </a:pPr>
-            <a:r>
-              <a:t>• Crash-resilient: agent state survives restarts — it's just events</a:t>
+              <a:t>• 10+ years of real production (fintech) experience</a:t>
             </a:r>
           </a:p>
         </p:txBody>
@@ -12804,12 +12364,6 @@
           <a:lstStyle/>
           <a:p>
             <a:pPr algn="ctr">
-              <a:spcBef>
-                <a:spcPts val="0"/>
-              </a:spcBef>
-              <a:spcAft>
-                <a:spcPts val="0"/>
-              </a:spcAft>
               <a:defRPr sz="2000" b="1">
                 <a:solidFill>
                   <a:srgbClr val="FFFFFF"/>
@@ -12883,7 +12437,7 @@
               </a:defRPr>
             </a:pPr>
             <a:r>
-              <a:t>github.com/timur/teob-ts  (npm install &amp;&amp; npm test)</a:t>
+              <a:t>github.com/lambda-house/teob-ts-workshop-gift-card</a:t>
             </a:r>
           </a:p>
         </p:txBody>
@@ -12930,12 +12484,6 @@
           <a:lstStyle/>
           <a:p>
             <a:pPr algn="ctr">
-              <a:spcBef>
-                <a:spcPts val="0"/>
-              </a:spcBef>
-              <a:spcAft>
-                <a:spcPts val="0"/>
-              </a:spcAft>
               <a:defRPr sz="2000" b="1">
                 <a:solidFill>
                   <a:srgbClr val="FFFFFF"/>
@@ -12976,7 +12524,7 @@
               </a:defRPr>
             </a:pPr>
             <a:r>
-              <a:t>Try Exercise 3 at home</a:t>
+              <a:t>Try at home</a:t>
             </a:r>
           </a:p>
         </p:txBody>
@@ -13009,7 +12557,7 @@
               </a:defRPr>
             </a:pPr>
             <a:r>
-              <a:t>Projections — build a read model from gift card events</a:t>
+              <a:t>Add Freeze/Unfreeze commands, transaction history in the view</a:t>
             </a:r>
           </a:p>
         </p:txBody>
@@ -13056,12 +12604,6 @@
           <a:lstStyle/>
           <a:p>
             <a:pPr algn="ctr">
-              <a:spcBef>
-                <a:spcPts val="0"/>
-              </a:spcBef>
-              <a:spcAft>
-                <a:spcPts val="0"/>
-              </a:spcAft>
               <a:defRPr sz="2000" b="1">
                 <a:solidFill>
                   <a:srgbClr val="FFFFFF"/>
@@ -13102,7 +12644,7 @@
               </a:defRPr>
             </a:pPr>
             <a:r>
-              <a:t>Scaffold your own aggregate</a:t>
+              <a:t>Scaffold your own</a:t>
             </a:r>
           </a:p>
         </p:txBody>
@@ -13135,7 +12677,7 @@
               </a:defRPr>
             </a:pPr>
             <a:r>
-              <a:t>npx teob new aggregate  — working code in seconds</a:t>
+              <a:t>npx teob new aggregate — working code in seconds</a:t>
             </a:r>
           </a:p>
         </p:txBody>
@@ -13182,12 +12724,6 @@
           <a:lstStyle/>
           <a:p>
             <a:pPr algn="ctr">
-              <a:spcBef>
-                <a:spcPts val="0"/>
-              </a:spcBef>
-              <a:spcAft>
-                <a:spcPts val="0"/>
-              </a:spcAft>
               <a:defRPr sz="2000" b="1">
                 <a:solidFill>
                   <a:srgbClr val="FFFFFF"/>
@@ -13261,7 +12797,7 @@
               </a:defRPr>
             </a:pPr>
             <a:r>
-              <a:t>Link will be shared — includes solution walkthroughs</a:t>
+              <a:t>Solution walkthroughs with chapter markers</a:t>
             </a:r>
           </a:p>
         </p:txBody>
@@ -13283,7 +12819,7 @@
             </a:avLst>
           </a:prstGeom>
           <a:solidFill>
-            <a:srgbClr val="888888"/>
+            <a:srgbClr val="9C27B0"/>
           </a:solidFill>
           <a:ln>
             <a:noFill/>
@@ -13308,12 +12844,6 @@
           <a:lstStyle/>
           <a:p>
             <a:pPr algn="ctr">
-              <a:spcBef>
-                <a:spcPts val="0"/>
-              </a:spcBef>
-              <a:spcAft>
-                <a:spcPts val="0"/>
-              </a:spcAft>
               <a:defRPr sz="2000" b="1">
                 <a:solidFill>
                   <a:srgbClr val="FFFFFF"/>
@@ -13354,7 +12884,7 @@
               </a:defRPr>
             </a:pPr>
             <a:r>
-              <a:t>Join the community</a:t>
+              <a:t>Next workshop</a:t>
             </a:r>
           </a:p>
         </p:txBody>
@@ -13387,7 +12917,7 @@
               </a:defRPr>
             </a:pPr>
             <a:r>
-              <a:t>Questions, feedback, next workshop announcements</a:t>
+              <a:t>Episode 2: Sagas &amp; Cross-Aggregate Communication</a:t>
             </a:r>
           </a:p>
         </p:txBody>
@@ -13763,46 +13293,13 @@
       </p:sp>
       <p:sp>
         <p:nvSpPr>
-          <p:cNvPr id="4" name="TextBox 3"/>
-          <p:cNvSpPr txBox="1"/>
-          <p:nvPr/>
-        </p:nvSpPr>
-        <p:spPr>
-          <a:xfrm>
-            <a:off x="731520" y="1500000"/>
-            <a:ext cx="10728655" cy="600000"/>
-          </a:xfrm>
-          <a:prstGeom prst="rect">
-            <a:avLst/>
-          </a:prstGeom>
-          <a:noFill/>
-        </p:spPr>
-        <p:txBody>
-          <a:bodyPr wrap="square"/>
-          <a:lstStyle/>
-          <a:p>
-            <a:pPr algn="l">
-              <a:defRPr sz="1800" b="0">
-                <a:solidFill>
-                  <a:srgbClr val="444444"/>
-                </a:solidFill>
-              </a:defRPr>
-            </a:pPr>
-            <a:r>
-              <a:t>Backend Architectures: Traditional → Latency-Critical → Event-Sourced</a:t>
-            </a:r>
-          </a:p>
-        </p:txBody>
-      </p:sp>
-      <p:sp>
-        <p:nvSpPr>
-          <p:cNvPr id="5" name="Rounded Rectangle 4"/>
+          <p:cNvPr id="4" name="Rounded Rectangle 3"/>
           <p:cNvSpPr/>
           <p:nvPr/>
         </p:nvSpPr>
         <p:spPr>
           <a:xfrm>
-            <a:off x="400000" y="2400000"/>
+            <a:off x="400000" y="2200000"/>
             <a:ext cx="1400000" cy="1800000"/>
           </a:xfrm>
           <a:prstGeom prst="roundRect">
@@ -13836,37 +13333,35 @@
           <a:lstStyle/>
           <a:p>
             <a:pPr algn="ctr">
-              <a:spcBef>
-                <a:spcPts val="0"/>
-              </a:spcBef>
-              <a:spcAft>
-                <a:spcPts val="0"/>
-              </a:spcAft>
-              <a:defRPr sz="1300" b="1">
+              <a:defRPr sz="1200" b="1">
                 <a:solidFill>
                   <a:srgbClr val="FFFFFF"/>
                 </a:solidFill>
               </a:defRPr>
             </a:pPr>
             <a:r>
-              <a:t>Traditional</a:t>
+              <a:t>Theory:</a:t>
             </a:r>
             <a:br/>
             <a:r>
               <a:t>Architecture</a:t>
             </a:r>
-          </a:p>
-        </p:txBody>
-      </p:sp>
-      <p:sp>
-        <p:nvSpPr>
-          <p:cNvPr id="6" name="TextBox 5"/>
+            <a:br/>
+            <a:r>
+              <a:t>→ ES</a:t>
+            </a:r>
+          </a:p>
+        </p:txBody>
+      </p:sp>
+      <p:sp>
+        <p:nvSpPr>
+          <p:cNvPr id="5" name="TextBox 4"/>
           <p:cNvSpPr txBox="1"/>
           <p:nvPr/>
         </p:nvSpPr>
         <p:spPr>
           <a:xfrm>
-            <a:off x="400000" y="4400000"/>
+            <a:off x="400000" y="4200000"/>
             <a:ext cx="1400000" cy="400000"/>
           </a:xfrm>
           <a:prstGeom prst="rect">
@@ -13886,20 +13381,20 @@
               </a:defRPr>
             </a:pPr>
             <a:r>
-              <a:t>10 min</a:t>
-            </a:r>
-          </a:p>
-        </p:txBody>
-      </p:sp>
-      <p:sp>
-        <p:nvSpPr>
-          <p:cNvPr id="7" name="Rounded Rectangle 6"/>
+              <a:t>20 min</a:t>
+            </a:r>
+          </a:p>
+        </p:txBody>
+      </p:sp>
+      <p:sp>
+        <p:nvSpPr>
+          <p:cNvPr id="6" name="Rounded Rectangle 5"/>
           <p:cNvSpPr/>
           <p:nvPr/>
         </p:nvSpPr>
         <p:spPr>
           <a:xfrm>
-            <a:off x="1900000" y="2400000"/>
+            <a:off x="1900000" y="2200000"/>
             <a:ext cx="1400000" cy="1800000"/>
           </a:xfrm>
           <a:prstGeom prst="roundRect">
@@ -13933,37 +13428,31 @@
           <a:lstStyle/>
           <a:p>
             <a:pPr algn="ctr">
-              <a:spcBef>
-                <a:spcPts val="0"/>
-              </a:spcBef>
-              <a:spcAft>
-                <a:spcPts val="0"/>
-              </a:spcAft>
-              <a:defRPr sz="1300" b="1">
+              <a:defRPr sz="1200" b="1">
                 <a:solidFill>
                   <a:srgbClr val="FFFFFF"/>
                 </a:solidFill>
               </a:defRPr>
             </a:pPr>
             <a:r>
-              <a:t>Event Sourcing</a:t>
+              <a:t>DDD ↔ TEOB</a:t>
             </a:r>
             <a:br/>
             <a:r>
-              <a:t>&amp; Effects</a:t>
-            </a:r>
-          </a:p>
-        </p:txBody>
-      </p:sp>
-      <p:sp>
-        <p:nvSpPr>
-          <p:cNvPr id="8" name="TextBox 7"/>
+              <a:t>Mapping</a:t>
+            </a:r>
+          </a:p>
+        </p:txBody>
+      </p:sp>
+      <p:sp>
+        <p:nvSpPr>
+          <p:cNvPr id="7" name="TextBox 6"/>
           <p:cNvSpPr txBox="1"/>
           <p:nvPr/>
         </p:nvSpPr>
         <p:spPr>
           <a:xfrm>
-            <a:off x="1900000" y="4400000"/>
+            <a:off x="1900000" y="4200000"/>
             <a:ext cx="1400000" cy="400000"/>
           </a:xfrm>
           <a:prstGeom prst="rect">
@@ -13983,20 +13472,111 @@
               </a:defRPr>
             </a:pPr>
             <a:r>
-              <a:t>15 min</a:t>
-            </a:r>
-          </a:p>
-        </p:txBody>
-      </p:sp>
-      <p:sp>
-        <p:nvSpPr>
-          <p:cNvPr id="9" name="Rounded Rectangle 8"/>
+              <a:t>10 min</a:t>
+            </a:r>
+          </a:p>
+        </p:txBody>
+      </p:sp>
+      <p:sp>
+        <p:nvSpPr>
+          <p:cNvPr id="8" name="Rounded Rectangle 7"/>
           <p:cNvSpPr/>
           <p:nvPr/>
         </p:nvSpPr>
         <p:spPr>
           <a:xfrm>
-            <a:off x="3400000" y="2400000"/>
+            <a:off x="3400000" y="2200000"/>
+            <a:ext cx="1400000" cy="1800000"/>
+          </a:xfrm>
+          <a:prstGeom prst="roundRect">
+            <a:avLst>
+              <a:gd name="adj" fmla="val 5000"/>
+            </a:avLst>
+          </a:prstGeom>
+          <a:solidFill>
+            <a:srgbClr val="66BB6A"/>
+          </a:solidFill>
+          <a:ln>
+            <a:noFill/>
+          </a:ln>
+        </p:spPr>
+        <p:style>
+          <a:lnRef idx="1">
+            <a:schemeClr val="accent1"/>
+          </a:lnRef>
+          <a:fillRef idx="3">
+            <a:schemeClr val="accent1"/>
+          </a:fillRef>
+          <a:effectRef idx="2">
+            <a:schemeClr val="accent1"/>
+          </a:effectRef>
+          <a:fontRef idx="minor">
+            <a:schemeClr val="lt1"/>
+          </a:fontRef>
+        </p:style>
+        <p:txBody>
+          <a:bodyPr rtlCol="0" anchor="ctr" wrap="square"/>
+          <a:lstStyle/>
+          <a:p>
+            <a:pPr algn="ctr">
+              <a:defRPr sz="1200" b="1">
+                <a:solidFill>
+                  <a:srgbClr val="FFFFFF"/>
+                </a:solidFill>
+              </a:defRPr>
+            </a:pPr>
+            <a:r>
+              <a:t>Exercise 1:</a:t>
+            </a:r>
+            <a:br/>
+            <a:r>
+              <a:t>Aggregate</a:t>
+            </a:r>
+          </a:p>
+        </p:txBody>
+      </p:sp>
+      <p:sp>
+        <p:nvSpPr>
+          <p:cNvPr id="9" name="TextBox 8"/>
+          <p:cNvSpPr txBox="1"/>
+          <p:nvPr/>
+        </p:nvSpPr>
+        <p:spPr>
+          <a:xfrm>
+            <a:off x="3400000" y="4200000"/>
+            <a:ext cx="1400000" cy="400000"/>
+          </a:xfrm>
+          <a:prstGeom prst="rect">
+            <a:avLst/>
+          </a:prstGeom>
+          <a:noFill/>
+        </p:spPr>
+        <p:txBody>
+          <a:bodyPr wrap="square"/>
+          <a:lstStyle/>
+          <a:p>
+            <a:pPr algn="ctr">
+              <a:defRPr sz="1200" b="0">
+                <a:solidFill>
+                  <a:srgbClr val="888888"/>
+                </a:solidFill>
+              </a:defRPr>
+            </a:pPr>
+            <a:r>
+              <a:t>30 min</a:t>
+            </a:r>
+          </a:p>
+        </p:txBody>
+      </p:sp>
+      <p:sp>
+        <p:nvSpPr>
+          <p:cNvPr id="10" name="Rounded Rectangle 9"/>
+          <p:cNvSpPr/>
+          <p:nvPr/>
+        </p:nvSpPr>
+        <p:spPr>
+          <a:xfrm>
+            <a:off x="4900000" y="2200000"/>
             <a:ext cx="1400000" cy="1800000"/>
           </a:xfrm>
           <a:prstGeom prst="roundRect">
@@ -14030,37 +13610,31 @@
           <a:lstStyle/>
           <a:p>
             <a:pPr algn="ctr">
-              <a:spcBef>
-                <a:spcPts val="0"/>
-              </a:spcBef>
-              <a:spcAft>
-                <a:spcPts val="0"/>
-              </a:spcAft>
-              <a:defRPr sz="1300" b="1">
+              <a:defRPr sz="1200" b="1">
                 <a:solidFill>
                   <a:srgbClr val="FFFFFF"/>
                 </a:solidFill>
               </a:defRPr>
             </a:pPr>
             <a:r>
-              <a:t>DDD ↔ TEOB</a:t>
+              <a:t>Demo:</a:t>
             </a:r>
             <a:br/>
             <a:r>
-              <a:t>Mapping</a:t>
-            </a:r>
-          </a:p>
-        </p:txBody>
-      </p:sp>
-      <p:sp>
-        <p:nvSpPr>
-          <p:cNvPr id="10" name="TextBox 9"/>
+              <a:t>HTTP Service</a:t>
+            </a:r>
+          </a:p>
+        </p:txBody>
+      </p:sp>
+      <p:sp>
+        <p:nvSpPr>
+          <p:cNvPr id="11" name="TextBox 10"/>
           <p:cNvSpPr txBox="1"/>
           <p:nvPr/>
         </p:nvSpPr>
         <p:spPr>
           <a:xfrm>
-            <a:off x="3400000" y="4400000"/>
+            <a:off x="4900000" y="4200000"/>
             <a:ext cx="1400000" cy="400000"/>
           </a:xfrm>
           <a:prstGeom prst="rect">
@@ -14087,13 +13661,13 @@
       </p:sp>
       <p:sp>
         <p:nvSpPr>
-          <p:cNvPr id="11" name="Rounded Rectangle 10"/>
+          <p:cNvPr id="12" name="Rounded Rectangle 11"/>
           <p:cNvSpPr/>
           <p:nvPr/>
         </p:nvSpPr>
         <p:spPr>
           <a:xfrm>
-            <a:off x="4900000" y="2400000"/>
+            <a:off x="6400000" y="2200000"/>
             <a:ext cx="1400000" cy="1800000"/>
           </a:xfrm>
           <a:prstGeom prst="roundRect">
@@ -14127,37 +13701,31 @@
           <a:lstStyle/>
           <a:p>
             <a:pPr algn="ctr">
-              <a:spcBef>
-                <a:spcPts val="0"/>
-              </a:spcBef>
-              <a:spcAft>
-                <a:spcPts val="0"/>
-              </a:spcAft>
-              <a:defRPr sz="1300" b="1">
+              <a:defRPr sz="1200" b="1">
                 <a:solidFill>
                   <a:srgbClr val="FFFFFF"/>
                 </a:solidFill>
               </a:defRPr>
             </a:pPr>
             <a:r>
-              <a:t>Exercise 1</a:t>
+              <a:t>Exercise 2:</a:t>
             </a:r>
             <a:br/>
             <a:r>
-              <a:t>Gift Card</a:t>
-            </a:r>
-          </a:p>
-        </p:txBody>
-      </p:sp>
-      <p:sp>
-        <p:nvSpPr>
-          <p:cNvPr id="12" name="TextBox 11"/>
+              <a:t>Projection</a:t>
+            </a:r>
+          </a:p>
+        </p:txBody>
+      </p:sp>
+      <p:sp>
+        <p:nvSpPr>
+          <p:cNvPr id="13" name="TextBox 12"/>
           <p:cNvSpPr txBox="1"/>
           <p:nvPr/>
         </p:nvSpPr>
         <p:spPr>
           <a:xfrm>
-            <a:off x="4900000" y="4400000"/>
+            <a:off x="6400000" y="4200000"/>
             <a:ext cx="1400000" cy="400000"/>
           </a:xfrm>
           <a:prstGeom prst="rect">
@@ -14177,20 +13745,20 @@
               </a:defRPr>
             </a:pPr>
             <a:r>
-              <a:t>30 min</a:t>
-            </a:r>
-          </a:p>
-        </p:txBody>
-      </p:sp>
-      <p:sp>
-        <p:nvSpPr>
-          <p:cNvPr id="13" name="Rounded Rectangle 12"/>
+              <a:t>20 min</a:t>
+            </a:r>
+          </a:p>
+        </p:txBody>
+      </p:sp>
+      <p:sp>
+        <p:nvSpPr>
+          <p:cNvPr id="14" name="Rounded Rectangle 13"/>
           <p:cNvSpPr/>
           <p:nvPr/>
         </p:nvSpPr>
         <p:spPr>
           <a:xfrm>
-            <a:off x="6400000" y="2400000"/>
+            <a:off x="7900000" y="2200000"/>
             <a:ext cx="1400000" cy="1800000"/>
           </a:xfrm>
           <a:prstGeom prst="roundRect">
@@ -14199,7 +13767,7 @@
             </a:avLst>
           </a:prstGeom>
           <a:solidFill>
-            <a:srgbClr val="2266AA"/>
+            <a:srgbClr val="9C27B0"/>
           </a:solidFill>
           <a:ln>
             <a:noFill/>
@@ -14224,37 +13792,31 @@
           <a:lstStyle/>
           <a:p>
             <a:pPr algn="ctr">
-              <a:spcBef>
-                <a:spcPts val="0"/>
-              </a:spcBef>
-              <a:spcAft>
-                <a:spcPts val="0"/>
-              </a:spcAft>
-              <a:defRPr sz="1300" b="1">
+              <a:defRPr sz="1200" b="1">
                 <a:solidFill>
                   <a:srgbClr val="FFFFFF"/>
                 </a:solidFill>
               </a:defRPr>
             </a:pPr>
             <a:r>
-              <a:t>Aggregate</a:t>
+              <a:t>Demo:</a:t>
             </a:r>
             <a:br/>
             <a:r>
-              <a:t>Communication</a:t>
-            </a:r>
-          </a:p>
-        </p:txBody>
-      </p:sp>
-      <p:sp>
-        <p:nvSpPr>
-          <p:cNvPr id="14" name="TextBox 13"/>
+              <a:t>LLM</a:t>
+            </a:r>
+          </a:p>
+        </p:txBody>
+      </p:sp>
+      <p:sp>
+        <p:nvSpPr>
+          <p:cNvPr id="15" name="TextBox 14"/>
           <p:cNvSpPr txBox="1"/>
           <p:nvPr/>
         </p:nvSpPr>
         <p:spPr>
           <a:xfrm>
-            <a:off x="6400000" y="4400000"/>
+            <a:off x="7900000" y="4200000"/>
             <a:ext cx="1400000" cy="400000"/>
           </a:xfrm>
           <a:prstGeom prst="rect">
@@ -14281,110 +13843,13 @@
       </p:sp>
       <p:sp>
         <p:nvSpPr>
-          <p:cNvPr id="15" name="Rounded Rectangle 14"/>
+          <p:cNvPr id="16" name="Rounded Rectangle 15"/>
           <p:cNvSpPr/>
           <p:nvPr/>
         </p:nvSpPr>
         <p:spPr>
           <a:xfrm>
-            <a:off x="7900000" y="2400000"/>
-            <a:ext cx="1400000" cy="1800000"/>
-          </a:xfrm>
-          <a:prstGeom prst="roundRect">
-            <a:avLst>
-              <a:gd name="adj" fmla="val 5000"/>
-            </a:avLst>
-          </a:prstGeom>
-          <a:solidFill>
-            <a:srgbClr val="66BB6A"/>
-          </a:solidFill>
-          <a:ln>
-            <a:noFill/>
-          </a:ln>
-        </p:spPr>
-        <p:style>
-          <a:lnRef idx="1">
-            <a:schemeClr val="accent1"/>
-          </a:lnRef>
-          <a:fillRef idx="3">
-            <a:schemeClr val="accent1"/>
-          </a:fillRef>
-          <a:effectRef idx="2">
-            <a:schemeClr val="accent1"/>
-          </a:effectRef>
-          <a:fontRef idx="minor">
-            <a:schemeClr val="lt1"/>
-          </a:fontRef>
-        </p:style>
-        <p:txBody>
-          <a:bodyPr rtlCol="0" anchor="ctr" wrap="square"/>
-          <a:lstStyle/>
-          <a:p>
-            <a:pPr algn="ctr">
-              <a:spcBef>
-                <a:spcPts val="0"/>
-              </a:spcBef>
-              <a:spcAft>
-                <a:spcPts val="0"/>
-              </a:spcAft>
-              <a:defRPr sz="1300" b="1">
-                <a:solidFill>
-                  <a:srgbClr val="FFFFFF"/>
-                </a:solidFill>
-              </a:defRPr>
-            </a:pPr>
-            <a:r>
-              <a:t>Exercise 2</a:t>
-            </a:r>
-            <a:br/>
-            <a:r>
-              <a:t>Order+Payment</a:t>
-            </a:r>
-          </a:p>
-        </p:txBody>
-      </p:sp>
-      <p:sp>
-        <p:nvSpPr>
-          <p:cNvPr id="16" name="TextBox 15"/>
-          <p:cNvSpPr txBox="1"/>
-          <p:nvPr/>
-        </p:nvSpPr>
-        <p:spPr>
-          <a:xfrm>
-            <a:off x="7900000" y="4400000"/>
-            <a:ext cx="1400000" cy="400000"/>
-          </a:xfrm>
-          <a:prstGeom prst="rect">
-            <a:avLst/>
-          </a:prstGeom>
-          <a:noFill/>
-        </p:spPr>
-        <p:txBody>
-          <a:bodyPr wrap="square"/>
-          <a:lstStyle/>
-          <a:p>
-            <a:pPr algn="ctr">
-              <a:defRPr sz="1200" b="0">
-                <a:solidFill>
-                  <a:srgbClr val="888888"/>
-                </a:solidFill>
-              </a:defRPr>
-            </a:pPr>
-            <a:r>
-              <a:t>35 min</a:t>
-            </a:r>
-          </a:p>
-        </p:txBody>
-      </p:sp>
-      <p:sp>
-        <p:nvSpPr>
-          <p:cNvPr id="17" name="Rounded Rectangle 16"/>
-          <p:cNvSpPr/>
-          <p:nvPr/>
-        </p:nvSpPr>
-        <p:spPr>
-          <a:xfrm>
-            <a:off x="9400000" y="2400000"/>
+            <a:off x="9400000" y="2200000"/>
             <a:ext cx="1400000" cy="1800000"/>
           </a:xfrm>
           <a:prstGeom prst="roundRect">
@@ -14418,13 +13883,7 @@
           <a:lstStyle/>
           <a:p>
             <a:pPr algn="ctr">
-              <a:spcBef>
-                <a:spcPts val="0"/>
-              </a:spcBef>
-              <a:spcAft>
-                <a:spcPts val="0"/>
-              </a:spcAft>
-              <a:defRPr sz="1300" b="1">
+              <a:defRPr sz="1200" b="1">
                 <a:solidFill>
                   <a:srgbClr val="FFFFFF"/>
                 </a:solidFill>
@@ -14436,6 +13895,39 @@
             <a:br/>
             <a:r>
               <a:t>&amp; Next Steps</a:t>
+            </a:r>
+          </a:p>
+        </p:txBody>
+      </p:sp>
+      <p:sp>
+        <p:nvSpPr>
+          <p:cNvPr id="17" name="TextBox 16"/>
+          <p:cNvSpPr txBox="1"/>
+          <p:nvPr/>
+        </p:nvSpPr>
+        <p:spPr>
+          <a:xfrm>
+            <a:off x="9400000" y="4200000"/>
+            <a:ext cx="1400000" cy="400000"/>
+          </a:xfrm>
+          <a:prstGeom prst="rect">
+            <a:avLst/>
+          </a:prstGeom>
+          <a:noFill/>
+        </p:spPr>
+        <p:txBody>
+          <a:bodyPr wrap="square"/>
+          <a:lstStyle/>
+          <a:p>
+            <a:pPr algn="ctr">
+              <a:defRPr sz="1200" b="0">
+                <a:solidFill>
+                  <a:srgbClr val="888888"/>
+                </a:solidFill>
+              </a:defRPr>
+            </a:pPr>
+            <a:r>
+              <a:t>10 min</a:t>
             </a:r>
           </a:p>
         </p:txBody>
@@ -14448,40 +13940,7 @@
         </p:nvSpPr>
         <p:spPr>
           <a:xfrm>
-            <a:off x="9400000" y="4400000"/>
-            <a:ext cx="1400000" cy="400000"/>
-          </a:xfrm>
-          <a:prstGeom prst="rect">
-            <a:avLst/>
-          </a:prstGeom>
-          <a:noFill/>
-        </p:spPr>
-        <p:txBody>
-          <a:bodyPr wrap="square"/>
-          <a:lstStyle/>
-          <a:p>
-            <a:pPr algn="ctr">
-              <a:defRPr sz="1200" b="0">
-                <a:solidFill>
-                  <a:srgbClr val="888888"/>
-                </a:solidFill>
-              </a:defRPr>
-            </a:pPr>
-            <a:r>
-              <a:t>10 min</a:t>
-            </a:r>
-          </a:p>
-        </p:txBody>
-      </p:sp>
-      <p:sp>
-        <p:nvSpPr>
-          <p:cNvPr id="19" name="TextBox 18"/>
-          <p:cNvSpPr txBox="1"/>
-          <p:nvPr/>
-        </p:nvSpPr>
-        <p:spPr>
-          <a:xfrm>
-            <a:off x="731520" y="5400000"/>
+            <a:off x="731520" y="5200000"/>
             <a:ext cx="10728655" cy="600000"/>
           </a:xfrm>
           <a:prstGeom prst="rect">
@@ -14501,7 +13960,7 @@
               </a:defRPr>
             </a:pPr>
             <a:r>
-              <a:t>~2 hours total  •  Two hands-on exercises  •  Everything runs locally</a:t>
+              <a:t>~2 hours  •  One domain (gift cards)  •  Two exercises + two live demos</a:t>
             </a:r>
           </a:p>
         </p:txBody>
@@ -14806,190 +14265,6 @@
           </a:p>
         </p:txBody>
       </p:sp>
-      <p:sp>
-        <p:nvSpPr>
-          <p:cNvPr id="10" name="Rounded Rectangle 9"/>
-          <p:cNvSpPr/>
-          <p:nvPr/>
-        </p:nvSpPr>
-        <p:spPr>
-          <a:xfrm>
-            <a:off x="7000000" y="1800000"/>
-            <a:ext cx="1800000" cy="700000"/>
-          </a:xfrm>
-          <a:prstGeom prst="roundRect">
-            <a:avLst>
-              <a:gd name="adj" fmla="val 5000"/>
-            </a:avLst>
-          </a:prstGeom>
-          <a:solidFill>
-            <a:srgbClr val="2266AA"/>
-          </a:solidFill>
-          <a:ln>
-            <a:noFill/>
-          </a:ln>
-        </p:spPr>
-        <p:style>
-          <a:lnRef idx="1">
-            <a:schemeClr val="accent1"/>
-          </a:lnRef>
-          <a:fillRef idx="3">
-            <a:schemeClr val="accent1"/>
-          </a:fillRef>
-          <a:effectRef idx="2">
-            <a:schemeClr val="accent1"/>
-          </a:effectRef>
-          <a:fontRef idx="minor">
-            <a:schemeClr val="lt1"/>
-          </a:fontRef>
-        </p:style>
-        <p:txBody>
-          <a:bodyPr rtlCol="0" anchor="ctr" wrap="square"/>
-          <a:lstStyle/>
-          <a:p>
-            <a:pPr algn="ctr">
-              <a:spcBef>
-                <a:spcPts val="0"/>
-              </a:spcBef>
-              <a:spcAft>
-                <a:spcPts val="0"/>
-              </a:spcAft>
-              <a:defRPr sz="1400" b="1">
-                <a:solidFill>
-                  <a:srgbClr val="FFFFFF"/>
-                </a:solidFill>
-              </a:defRPr>
-            </a:pPr>
-            <a:r>
-              <a:t>Client A</a:t>
-            </a:r>
-          </a:p>
-        </p:txBody>
-      </p:sp>
-      <p:sp>
-        <p:nvSpPr>
-          <p:cNvPr id="11" name="Rounded Rectangle 10"/>
-          <p:cNvSpPr/>
-          <p:nvPr/>
-        </p:nvSpPr>
-        <p:spPr>
-          <a:xfrm>
-            <a:off x="7000000" y="2800000"/>
-            <a:ext cx="1800000" cy="700000"/>
-          </a:xfrm>
-          <a:prstGeom prst="roundRect">
-            <a:avLst>
-              <a:gd name="adj" fmla="val 5000"/>
-            </a:avLst>
-          </a:prstGeom>
-          <a:solidFill>
-            <a:srgbClr val="2266AA"/>
-          </a:solidFill>
-          <a:ln>
-            <a:noFill/>
-          </a:ln>
-        </p:spPr>
-        <p:style>
-          <a:lnRef idx="1">
-            <a:schemeClr val="accent1"/>
-          </a:lnRef>
-          <a:fillRef idx="3">
-            <a:schemeClr val="accent1"/>
-          </a:fillRef>
-          <a:effectRef idx="2">
-            <a:schemeClr val="accent1"/>
-          </a:effectRef>
-          <a:fontRef idx="minor">
-            <a:schemeClr val="lt1"/>
-          </a:fontRef>
-        </p:style>
-        <p:txBody>
-          <a:bodyPr rtlCol="0" anchor="ctr" wrap="square"/>
-          <a:lstStyle/>
-          <a:p>
-            <a:pPr algn="ctr">
-              <a:spcBef>
-                <a:spcPts val="0"/>
-              </a:spcBef>
-              <a:spcAft>
-                <a:spcPts val="0"/>
-              </a:spcAft>
-              <a:defRPr sz="1400" b="1">
-                <a:solidFill>
-                  <a:srgbClr val="FFFFFF"/>
-                </a:solidFill>
-              </a:defRPr>
-            </a:pPr>
-            <a:r>
-              <a:t>Client B</a:t>
-            </a:r>
-          </a:p>
-        </p:txBody>
-      </p:sp>
-      <p:sp>
-        <p:nvSpPr>
-          <p:cNvPr id="12" name="Rounded Rectangle 11"/>
-          <p:cNvSpPr/>
-          <p:nvPr/>
-        </p:nvSpPr>
-        <p:spPr>
-          <a:xfrm>
-            <a:off x="9500000" y="2100000"/>
-            <a:ext cx="2200000" cy="1200000"/>
-          </a:xfrm>
-          <a:prstGeom prst="roundRect">
-            <a:avLst>
-              <a:gd name="adj" fmla="val 5000"/>
-            </a:avLst>
-          </a:prstGeom>
-          <a:solidFill>
-            <a:srgbClr val="EF5350"/>
-          </a:solidFill>
-          <a:ln>
-            <a:noFill/>
-          </a:ln>
-        </p:spPr>
-        <p:style>
-          <a:lnRef idx="1">
-            <a:schemeClr val="accent1"/>
-          </a:lnRef>
-          <a:fillRef idx="3">
-            <a:schemeClr val="accent1"/>
-          </a:fillRef>
-          <a:effectRef idx="2">
-            <a:schemeClr val="accent1"/>
-          </a:effectRef>
-          <a:fontRef idx="minor">
-            <a:schemeClr val="lt1"/>
-          </a:fontRef>
-        </p:style>
-        <p:txBody>
-          <a:bodyPr rtlCol="0" anchor="ctr" wrap="square"/>
-          <a:lstStyle/>
-          <a:p>
-            <a:pPr algn="ctr">
-              <a:spcBef>
-                <a:spcPts val="0"/>
-              </a:spcBef>
-              <a:spcAft>
-                <a:spcPts val="0"/>
-              </a:spcAft>
-              <a:defRPr sz="1600" b="1">
-                <a:solidFill>
-                  <a:srgbClr val="FFFFFF"/>
-                </a:solidFill>
-              </a:defRPr>
-            </a:pPr>
-            <a:r>
-              <a:t>Database</a:t>
-            </a:r>
-            <a:br/>
-            <a:r>
-              <a:t>(mutable)</a:t>
-            </a:r>
-          </a:p>
-        </p:txBody>
-      </p:sp>
     </p:spTree>
   </p:cSld>
   <p:clrMapOvr>
@@ -15684,7 +14959,7 @@
               </a:defRPr>
             </a:pPr>
             <a:r>
-              <a:t>• External effect calls (to other systems, databases...)</a:t>
+              <a:t>• External effect calls (to other systems, LLMs, databases...)</a:t>
             </a:r>
           </a:p>
         </p:txBody>
@@ -15984,7 +15259,7 @@
               </a:defRPr>
             </a:pPr>
             <a:r>
-              <a:t>• LSM-tree / SSTable: no locks necessary</a:t>
+              <a:t>• No locks, no I/O overhead — scales!</a:t>
             </a:r>
           </a:p>
         </p:txBody>
@@ -15997,39 +15272,6 @@
         </p:nvSpPr>
         <p:spPr>
           <a:xfrm>
-            <a:off x="731520" y="3720000"/>
-            <a:ext cx="10728655" cy="380000"/>
-          </a:xfrm>
-          <a:prstGeom prst="rect">
-            <a:avLst/>
-          </a:prstGeom>
-          <a:noFill/>
-        </p:spPr>
-        <p:txBody>
-          <a:bodyPr wrap="square"/>
-          <a:lstStyle/>
-          <a:p>
-            <a:pPr algn="l">
-              <a:defRPr sz="1700" b="0">
-                <a:solidFill>
-                  <a:srgbClr val="444444"/>
-                </a:solidFill>
-              </a:defRPr>
-            </a:pPr>
-            <a:r>
-              <a:t>• No I/O overhead, no single master — scales!</a:t>
-            </a:r>
-          </a:p>
-        </p:txBody>
-      </p:sp>
-      <p:sp>
-        <p:nvSpPr>
-          <p:cNvPr id="10" name="TextBox 9"/>
-          <p:cNvSpPr txBox="1"/>
-          <p:nvPr/>
-        </p:nvSpPr>
-        <p:spPr>
-          <a:xfrm>
             <a:off x="7500000" y="1500000"/>
             <a:ext cx="4000000" cy="400000"/>
           </a:xfrm>
@@ -16057,14 +15299,14 @@
       </p:sp>
       <p:sp>
         <p:nvSpPr>
-          <p:cNvPr id="11" name="Rounded Rectangle 10"/>
+          <p:cNvPr id="10" name="Rounded Rectangle 9"/>
           <p:cNvSpPr/>
           <p:nvPr/>
         </p:nvSpPr>
         <p:spPr>
           <a:xfrm>
             <a:off x="7700000" y="2000000"/>
-            <a:ext cx="3200000" cy="380000"/>
+            <a:ext cx="3200000" cy="420000"/>
           </a:xfrm>
           <a:prstGeom prst="roundRect">
             <a:avLst>
@@ -16097,12 +15339,6 @@
           <a:lstStyle/>
           <a:p>
             <a:pPr algn="ctr">
-              <a:spcBef>
-                <a:spcPts val="0"/>
-              </a:spcBef>
-              <a:spcAft>
-                <a:spcPts val="0"/>
-              </a:spcAft>
               <a:defRPr sz="1300" b="1">
                 <a:solidFill>
                   <a:srgbClr val="66BB6A"/>
@@ -16110,21 +15346,21 @@
               </a:defRPr>
             </a:pPr>
             <a:r>
-              <a:t>#1  OrderPlaced</a:t>
-            </a:r>
-          </a:p>
-        </p:txBody>
-      </p:sp>
-      <p:sp>
-        <p:nvSpPr>
-          <p:cNvPr id="12" name="Rounded Rectangle 11"/>
+              <a:t>#1  CardIssued</a:t>
+            </a:r>
+          </a:p>
+        </p:txBody>
+      </p:sp>
+      <p:sp>
+        <p:nvSpPr>
+          <p:cNvPr id="11" name="Rounded Rectangle 10"/>
           <p:cNvSpPr/>
           <p:nvPr/>
         </p:nvSpPr>
         <p:spPr>
           <a:xfrm>
-            <a:off x="7700000" y="2500000"/>
-            <a:ext cx="3200000" cy="380000"/>
+            <a:off x="7700000" y="2550000"/>
+            <a:ext cx="3200000" cy="420000"/>
           </a:xfrm>
           <a:prstGeom prst="roundRect">
             <a:avLst>
@@ -16157,12 +15393,6 @@
           <a:lstStyle/>
           <a:p>
             <a:pPr algn="ctr">
-              <a:spcBef>
-                <a:spcPts val="0"/>
-              </a:spcBef>
-              <a:spcAft>
-                <a:spcPts val="0"/>
-              </a:spcAft>
               <a:defRPr sz="1300" b="1">
                 <a:solidFill>
                   <a:srgbClr val="66BB6A"/>
@@ -16170,21 +15400,21 @@
               </a:defRPr>
             </a:pPr>
             <a:r>
-              <a:t>#2  ItemAdded</a:t>
-            </a:r>
-          </a:p>
-        </p:txBody>
-      </p:sp>
-      <p:sp>
-        <p:nvSpPr>
-          <p:cNvPr id="13" name="Rounded Rectangle 12"/>
+              <a:t>#2  CardRedeemed</a:t>
+            </a:r>
+          </a:p>
+        </p:txBody>
+      </p:sp>
+      <p:sp>
+        <p:nvSpPr>
+          <p:cNvPr id="12" name="Rounded Rectangle 11"/>
           <p:cNvSpPr/>
           <p:nvPr/>
         </p:nvSpPr>
         <p:spPr>
           <a:xfrm>
-            <a:off x="7700000" y="3000000"/>
-            <a:ext cx="3200000" cy="380000"/>
+            <a:off x="7700000" y="3100000"/>
+            <a:ext cx="3200000" cy="420000"/>
           </a:xfrm>
           <a:prstGeom prst="roundRect">
             <a:avLst>
@@ -16217,12 +15447,6 @@
           <a:lstStyle/>
           <a:p>
             <a:pPr algn="ctr">
-              <a:spcBef>
-                <a:spcPts val="0"/>
-              </a:spcBef>
-              <a:spcAft>
-                <a:spcPts val="0"/>
-              </a:spcAft>
               <a:defRPr sz="1300" b="1">
                 <a:solidFill>
                   <a:srgbClr val="66BB6A"/>
@@ -16230,21 +15454,21 @@
               </a:defRPr>
             </a:pPr>
             <a:r>
-              <a:t>#3  ItemAdded</a:t>
-            </a:r>
-          </a:p>
-        </p:txBody>
-      </p:sp>
-      <p:sp>
-        <p:nvSpPr>
-          <p:cNvPr id="14" name="Rounded Rectangle 13"/>
+              <a:t>#3  CardRedeemed</a:t>
+            </a:r>
+          </a:p>
+        </p:txBody>
+      </p:sp>
+      <p:sp>
+        <p:nvSpPr>
+          <p:cNvPr id="13" name="Rounded Rectangle 12"/>
           <p:cNvSpPr/>
           <p:nvPr/>
         </p:nvSpPr>
         <p:spPr>
           <a:xfrm>
-            <a:off x="7700000" y="3500000"/>
-            <a:ext cx="3200000" cy="380000"/>
+            <a:off x="7700000" y="3650000"/>
+            <a:ext cx="3200000" cy="420000"/>
           </a:xfrm>
           <a:prstGeom prst="roundRect">
             <a:avLst>
@@ -16277,12 +15501,6 @@
           <a:lstStyle/>
           <a:p>
             <a:pPr algn="ctr">
-              <a:spcBef>
-                <a:spcPts val="0"/>
-              </a:spcBef>
-              <a:spcAft>
-                <a:spcPts val="0"/>
-              </a:spcAft>
               <a:defRPr sz="1300" b="1">
                 <a:solidFill>
                   <a:srgbClr val="66BB6A"/>
@@ -16290,80 +15508,20 @@
               </a:defRPr>
             </a:pPr>
             <a:r>
-              <a:t>#4  OrderConfirmed</a:t>
-            </a:r>
-          </a:p>
-        </p:txBody>
-      </p:sp>
-      <p:sp>
-        <p:nvSpPr>
-          <p:cNvPr id="15" name="Rounded Rectangle 14"/>
-          <p:cNvSpPr/>
-          <p:nvPr/>
-        </p:nvSpPr>
-        <p:spPr>
-          <a:xfrm>
-            <a:off x="7700000" y="4000000"/>
-            <a:ext cx="3200000" cy="380000"/>
-          </a:xfrm>
-          <a:prstGeom prst="roundRect">
-            <a:avLst>
-              <a:gd name="adj" fmla="val 5000"/>
-            </a:avLst>
-          </a:prstGeom>
-          <a:solidFill>
-            <a:srgbClr val="2D2D2D"/>
-          </a:solidFill>
-          <a:ln>
-            <a:noFill/>
-          </a:ln>
-        </p:spPr>
-        <p:style>
-          <a:lnRef idx="1">
-            <a:schemeClr val="accent1"/>
-          </a:lnRef>
-          <a:fillRef idx="3">
-            <a:schemeClr val="accent1"/>
-          </a:fillRef>
-          <a:effectRef idx="2">
-            <a:schemeClr val="accent1"/>
-          </a:effectRef>
-          <a:fontRef idx="minor">
-            <a:schemeClr val="lt1"/>
-          </a:fontRef>
-        </p:style>
-        <p:txBody>
-          <a:bodyPr rtlCol="0" anchor="ctr" wrap="square"/>
-          <a:lstStyle/>
-          <a:p>
-            <a:pPr algn="ctr">
-              <a:spcBef>
-                <a:spcPts val="0"/>
-              </a:spcBef>
-              <a:spcAft>
-                <a:spcPts val="0"/>
-              </a:spcAft>
-              <a:defRPr sz="1300" b="1">
-                <a:solidFill>
-                  <a:srgbClr val="66BB6A"/>
-                </a:solidFill>
-              </a:defRPr>
-            </a:pPr>
-            <a:r>
-              <a:t>#5  PaymentReceived</a:t>
-            </a:r>
-          </a:p>
-        </p:txBody>
-      </p:sp>
-      <p:sp>
-        <p:nvSpPr>
-          <p:cNvPr id="16" name="TextBox 15"/>
+              <a:t>#4  CardCancelled</a:t>
+            </a:r>
+          </a:p>
+        </p:txBody>
+      </p:sp>
+      <p:sp>
+        <p:nvSpPr>
+          <p:cNvPr id="14" name="TextBox 13"/>
           <p:cNvSpPr txBox="1"/>
           <p:nvPr/>
         </p:nvSpPr>
         <p:spPr>
           <a:xfrm>
-            <a:off x="7500000" y="4700000"/>
+            <a:off x="7500000" y="4300000"/>
             <a:ext cx="3600000" cy="400000"/>
           </a:xfrm>
           <a:prstGeom prst="rect">
@@ -16442,7 +15600,7 @@
               </a:defRPr>
             </a:pPr>
             <a:r>
-              <a:t>STREAM OF UPDATES: PURE EVENT SOURCING</a:t>
+              <a:t>PURE EVENT SOURCING: THE CORE LOOP</a:t>
             </a:r>
           </a:p>
         </p:txBody>
@@ -16499,7 +15657,7 @@
         <p:spPr>
           <a:xfrm>
             <a:off x="731520" y="1600000"/>
-            <a:ext cx="6000000" cy="3800000"/>
+            <a:ext cx="6000000" cy="3400000"/>
           </a:xfrm>
           <a:prstGeom prst="roundRect">
             <a:avLst>
@@ -16540,39 +15698,34 @@
               </a:defRPr>
             </a:pPr>
             <a:r>
-              <a:t>Command handler:</a:t>
-            </a:r>
-            <a:br/>
-            <a:r>
-              <a:t>  → gets validated</a:t>
-            </a:r>
-            <a:br/>
-            <a:r>
-              <a:t>  → may produce a reply</a:t>
-            </a:r>
-            <a:br/>
-            <a:r>
-              <a:t>  → produces events</a:t>
+              <a:t>decide(State, Command) → Effect&lt;Event, Reply&gt;</a:t>
             </a:r>
             <a:br/>
             <a:br/>
             <a:r>
-              <a:t>decide(State, Command) → Effect&lt;Event, Reply&gt;</a:t>
+              <a:t>  → validate command against current state</a:t>
+            </a:r>
+            <a:br/>
+            <a:r>
+              <a:t>  → produce events (or reject)</a:t>
+            </a:r>
+            <a:br/>
+            <a:r>
+              <a:t>  → optionally reply to caller</a:t>
             </a:r>
             <a:br/>
             <a:br/>
             <a:r>
-              <a:t>Events applied to state to get new state:</a:t>
+              <a:t>apply(State, Event) → State</a:t>
             </a:r>
             <a:br/>
             <a:br/>
             <a:r>
-              <a:t>apply(State, Event) → State</a:t>
+              <a:t>  → pure fold: no logic, just data transformation</a:t>
             </a:r>
             <a:br/>
-            <a:br/>
-            <a:r>
-              <a:t>// initial state = fold zero</a:t>
+            <a:r>
+              <a:t>  → used for replay</a:t>
             </a:r>
           </a:p>
         </p:txBody>
@@ -16619,12 +15772,6 @@
           <a:lstStyle/>
           <a:p>
             <a:pPr algn="ctr">
-              <a:spcBef>
-                <a:spcPts val="0"/>
-              </a:spcBef>
-              <a:spcAft>
-                <a:spcPts val="0"/>
-              </a:spcAft>
               <a:defRPr sz="1800" b="1">
                 <a:solidFill>
                   <a:srgbClr val="FFFFFF"/>
@@ -16712,12 +15859,6 @@
           <a:lstStyle/>
           <a:p>
             <a:pPr algn="ctr">
-              <a:spcBef>
-                <a:spcPts val="0"/>
-              </a:spcBef>
-              <a:spcAft>
-                <a:spcPts val="0"/>
-              </a:spcAft>
               <a:defRPr sz="1800" b="1">
                 <a:solidFill>
                   <a:srgbClr val="FFFFFF"/>
@@ -16805,12 +15946,6 @@
           <a:lstStyle/>
           <a:p>
             <a:pPr algn="ctr">
-              <a:spcBef>
-                <a:spcPts val="0"/>
-              </a:spcBef>
-              <a:spcAft>
-                <a:spcPts val="0"/>
-              </a:spcAft>
               <a:defRPr sz="1800" b="1">
                 <a:solidFill>
                   <a:srgbClr val="FFFFFF"/>
@@ -16898,12 +16033,6 @@
           <a:lstStyle/>
           <a:p>
             <a:pPr algn="ctr">
-              <a:spcBef>
-                <a:spcPts val="0"/>
-              </a:spcBef>
-              <a:spcAft>
-                <a:spcPts val="0"/>
-              </a:spcAft>
               <a:defRPr sz="1800" b="1">
                 <a:solidFill>
                   <a:srgbClr val="FFFFFF"/>
